--- a/plugins/gradient-cio/assets/examples/gradient-idd-manager-portfolio-fit.pptx
+++ b/plugins/gradient-cio/assets/examples/gradient-idd-manager-portfolio-fit.pptx
@@ -2934,7 +2934,7 @@
         </p:nvSpPr>
         <p:spPr>
           <a:xfrm>
-            <a:off x="685800" y="1828800"/>
+            <a:off x="685800" y="1664208"/>
             <a:ext cx="9966960" cy="274320"/>
           </a:xfrm>
           <a:prstGeom prst="rect">
@@ -2952,7 +2952,7 @@
               <a:spcAft>
                 <a:spcPts val="0"/>
               </a:spcAft>
-              <a:defRPr sz="900" b="1">
+              <a:defRPr sz="850" b="1">
                 <a:solidFill>
                   <a:srgbClr val="C6F432"/>
                 </a:solidFill>
@@ -2976,7 +2976,7 @@
         </p:nvSpPr>
         <p:spPr>
           <a:xfrm>
-            <a:off x="685800" y="2176272"/>
+            <a:off x="685800" y="2011680"/>
             <a:ext cx="9966960" cy="1234440"/>
           </a:xfrm>
           <a:prstGeom prst="rect">
@@ -2994,7 +2994,7 @@
               <a:spcAft>
                 <a:spcPts val="0"/>
               </a:spcAft>
-              <a:defRPr sz="3400" b="1">
+              <a:defRPr sz="3300" b="1">
                 <a:solidFill>
                   <a:srgbClr val="FFFFFF"/>
                 </a:solidFill>
@@ -3005,7 +3005,7 @@
               <a:rPr>
                 <a:latin typeface="Inter"/>
               </a:rPr>
-              <a:t>Northstar portfolio-fit report (TEST)</a:t>
+              <a:t>Northstar Portfolio Fit Review</a:t>
             </a:r>
           </a:p>
         </p:txBody>
@@ -3018,8 +3018,8 @@
         </p:nvSpPr>
         <p:spPr>
           <a:xfrm>
-            <a:off x="685800" y="3456432"/>
-            <a:ext cx="9692640" cy="640080"/>
+            <a:off x="685800" y="3273552"/>
+            <a:ext cx="9692640" cy="594360"/>
           </a:xfrm>
           <a:prstGeom prst="rect">
             <a:avLst/>
@@ -3036,7 +3036,7 @@
               <a:spcAft>
                 <a:spcPts val="0"/>
               </a:spcAft>
-              <a:defRPr sz="1500" b="0">
+              <a:defRPr sz="1400" b="0">
                 <a:solidFill>
                   <a:srgbClr val="9AA5B1"/>
                 </a:solidFill>
@@ -3047,7 +3047,7 @@
               <a:rPr>
                 <a:latin typeface="Inter"/>
               </a:rPr>
-              <a:t>Governed return evidence</a:t>
+              <a:t>Candidate manager contribution to total-fund objectives</a:t>
             </a:r>
           </a:p>
         </p:txBody>
@@ -3060,8 +3060,8 @@
         </p:nvSpPr>
         <p:spPr>
           <a:xfrm>
-            <a:off x="685800" y="4251960"/>
-            <a:ext cx="1005840" cy="54864"/>
+            <a:off x="685800" y="4005072"/>
+            <a:ext cx="822960" cy="45720"/>
           </a:xfrm>
           <a:prstGeom prst="rect">
             <a:avLst/>
@@ -3109,8 +3109,8 @@
         </p:nvSpPr>
         <p:spPr>
           <a:xfrm>
-            <a:off x="685800" y="4572000"/>
-            <a:ext cx="3063240" cy="182880"/>
+            <a:off x="685800" y="4315968"/>
+            <a:ext cx="4709160" cy="182880"/>
           </a:xfrm>
           <a:prstGeom prst="rect">
             <a:avLst/>
@@ -3138,7 +3138,7 @@
               <a:rPr>
                 <a:latin typeface="Inter"/>
               </a:rPr>
-              <a:t>MODE</a:t>
+              <a:t>REVIEW</a:t>
             </a:r>
           </a:p>
         </p:txBody>
@@ -3151,8 +3151,8 @@
         </p:nvSpPr>
         <p:spPr>
           <a:xfrm>
-            <a:off x="685800" y="4773168"/>
-            <a:ext cx="3063240" cy="320040"/>
+            <a:off x="685800" y="4507992"/>
+            <a:ext cx="4709160" cy="310896"/>
           </a:xfrm>
           <a:prstGeom prst="rect">
             <a:avLst/>
@@ -3180,7 +3180,7 @@
               <a:rPr>
                 <a:latin typeface="Inter"/>
               </a:rPr>
-              <a:t>Compare</a:t>
+              <a:t>Portfolio fit</a:t>
             </a:r>
           </a:p>
         </p:txBody>
@@ -3193,8 +3193,8 @@
         </p:nvSpPr>
         <p:spPr>
           <a:xfrm>
-            <a:off x="4160520" y="4572000"/>
-            <a:ext cx="3063240" cy="182880"/>
+            <a:off x="5852160" y="4315968"/>
+            <a:ext cx="4709160" cy="182880"/>
           </a:xfrm>
           <a:prstGeom prst="rect">
             <a:avLst/>
@@ -3222,7 +3222,7 @@
               <a:rPr>
                 <a:latin typeface="Inter"/>
               </a:rPr>
-              <a:t>SCOPE</a:t>
+              <a:t>EVIDENCE</a:t>
             </a:r>
           </a:p>
         </p:txBody>
@@ -3235,8 +3235,8 @@
         </p:nvSpPr>
         <p:spPr>
           <a:xfrm>
-            <a:off x="4160520" y="4773168"/>
-            <a:ext cx="3063240" cy="320040"/>
+            <a:off x="5852160" y="4507992"/>
+            <a:ext cx="4709160" cy="310896"/>
           </a:xfrm>
           <a:prstGeom prst="rect">
             <a:avLst/>
@@ -3264,21 +3264,189 @@
               <a:rPr>
                 <a:latin typeface="Inter"/>
               </a:rPr>
-              <a:t>Fictional TEST managers</a:t>
-            </a:r>
-          </a:p>
-        </p:txBody>
-      </p:sp>
-      <p:sp>
-        <p:nvSpPr>
-          <p:cNvPr id="13" name="Rectangle 12"/>
+              <a:t>Governed return series</a:t>
+            </a:r>
+          </a:p>
+        </p:txBody>
+      </p:sp>
+      <p:sp>
+        <p:nvSpPr>
+          <p:cNvPr id="13" name="TextBox 12"/>
+          <p:cNvSpPr txBox="1"/>
+          <p:nvPr/>
+        </p:nvSpPr>
+        <p:spPr>
+          <a:xfrm>
+            <a:off x="685800" y="4937759"/>
+            <a:ext cx="4709160" cy="182880"/>
+          </a:xfrm>
+          <a:prstGeom prst="rect">
+            <a:avLst/>
+          </a:prstGeom>
+          <a:noFill/>
+        </p:spPr>
+        <p:txBody>
+          <a:bodyPr wrap="none" lIns="9144" rIns="9144" tIns="9144" bIns="9144" anchor="t">
+            <a:spAutoFit/>
+          </a:bodyPr>
+          <a:lstStyle/>
+          <a:p>
+            <a:pPr algn="l">
+              <a:spcAft>
+                <a:spcPts val="0"/>
+              </a:spcAft>
+              <a:defRPr sz="700" b="1">
+                <a:solidFill>
+                  <a:srgbClr val="8A94A1"/>
+                </a:solidFill>
+                <a:latin typeface="Inter"/>
+              </a:defRPr>
+            </a:pPr>
+            <a:r>
+              <a:rPr>
+                <a:latin typeface="Inter"/>
+              </a:rPr>
+              <a:t>AUDIENCE</a:t>
+            </a:r>
+          </a:p>
+        </p:txBody>
+      </p:sp>
+      <p:sp>
+        <p:nvSpPr>
+          <p:cNvPr id="14" name="TextBox 13"/>
+          <p:cNvSpPr txBox="1"/>
+          <p:nvPr/>
+        </p:nvSpPr>
+        <p:spPr>
+          <a:xfrm>
+            <a:off x="685800" y="5129783"/>
+            <a:ext cx="4709160" cy="310896"/>
+          </a:xfrm>
+          <a:prstGeom prst="rect">
+            <a:avLst/>
+          </a:prstGeom>
+          <a:noFill/>
+        </p:spPr>
+        <p:txBody>
+          <a:bodyPr wrap="none" lIns="9144" rIns="9144" tIns="9144" bIns="9144" anchor="t">
+            <a:spAutoFit/>
+          </a:bodyPr>
+          <a:lstStyle/>
+          <a:p>
+            <a:pPr algn="l">
+              <a:spcAft>
+                <a:spcPts val="0"/>
+              </a:spcAft>
+              <a:defRPr sz="1000" b="1">
+                <a:solidFill>
+                  <a:srgbClr val="FFFFFF"/>
+                </a:solidFill>
+                <a:latin typeface="Inter"/>
+              </a:defRPr>
+            </a:pPr>
+            <a:r>
+              <a:rPr>
+                <a:latin typeface="Inter"/>
+              </a:rPr>
+              <a:t>Investment Committee</a:t>
+            </a:r>
+          </a:p>
+        </p:txBody>
+      </p:sp>
+      <p:sp>
+        <p:nvSpPr>
+          <p:cNvPr id="15" name="TextBox 14"/>
+          <p:cNvSpPr txBox="1"/>
+          <p:nvPr/>
+        </p:nvSpPr>
+        <p:spPr>
+          <a:xfrm>
+            <a:off x="5852160" y="4937759"/>
+            <a:ext cx="4709160" cy="182880"/>
+          </a:xfrm>
+          <a:prstGeom prst="rect">
+            <a:avLst/>
+          </a:prstGeom>
+          <a:noFill/>
+        </p:spPr>
+        <p:txBody>
+          <a:bodyPr wrap="none" lIns="9144" rIns="9144" tIns="9144" bIns="9144" anchor="t">
+            <a:spAutoFit/>
+          </a:bodyPr>
+          <a:lstStyle/>
+          <a:p>
+            <a:pPr algn="l">
+              <a:spcAft>
+                <a:spcPts val="0"/>
+              </a:spcAft>
+              <a:defRPr sz="700" b="1">
+                <a:solidFill>
+                  <a:srgbClr val="8A94A1"/>
+                </a:solidFill>
+                <a:latin typeface="Inter"/>
+              </a:defRPr>
+            </a:pPr>
+            <a:r>
+              <a:rPr>
+                <a:latin typeface="Inter"/>
+              </a:rPr>
+              <a:t>DATA AS OF</a:t>
+            </a:r>
+          </a:p>
+        </p:txBody>
+      </p:sp>
+      <p:sp>
+        <p:nvSpPr>
+          <p:cNvPr id="16" name="TextBox 15"/>
+          <p:cNvSpPr txBox="1"/>
+          <p:nvPr/>
+        </p:nvSpPr>
+        <p:spPr>
+          <a:xfrm>
+            <a:off x="5852160" y="5129783"/>
+            <a:ext cx="4709160" cy="310896"/>
+          </a:xfrm>
+          <a:prstGeom prst="rect">
+            <a:avLst/>
+          </a:prstGeom>
+          <a:noFill/>
+        </p:spPr>
+        <p:txBody>
+          <a:bodyPr wrap="none" lIns="9144" rIns="9144" tIns="9144" bIns="9144" anchor="t">
+            <a:spAutoFit/>
+          </a:bodyPr>
+          <a:lstStyle/>
+          <a:p>
+            <a:pPr algn="l">
+              <a:spcAft>
+                <a:spcPts val="0"/>
+              </a:spcAft>
+              <a:defRPr sz="1000" b="1">
+                <a:solidFill>
+                  <a:srgbClr val="FFFFFF"/>
+                </a:solidFill>
+                <a:latin typeface="Inter"/>
+              </a:defRPr>
+            </a:pPr>
+            <a:r>
+              <a:rPr>
+                <a:latin typeface="Inter"/>
+              </a:rPr>
+              <a:t>2025-12-31</a:t>
+            </a:r>
+          </a:p>
+        </p:txBody>
+      </p:sp>
+      <p:sp>
+        <p:nvSpPr>
+          <p:cNvPr id="17" name="Rectangle 16"/>
           <p:cNvSpPr/>
           <p:nvPr/>
         </p:nvSpPr>
         <p:spPr>
           <a:xfrm>
-            <a:off x="685800" y="5833872"/>
-            <a:ext cx="3063240" cy="384048"/>
+            <a:off x="685800" y="5687568"/>
+            <a:ext cx="3337560" cy="530352"/>
           </a:xfrm>
           <a:prstGeom prst="rect">
             <a:avLst/>
@@ -3320,14 +3488,140 @@
       </p:sp>
       <p:sp>
         <p:nvSpPr>
-          <p:cNvPr id="14" name="TextBox 13"/>
+          <p:cNvPr id="18" name="TextBox 17"/>
           <p:cNvSpPr txBox="1"/>
           <p:nvPr/>
         </p:nvSpPr>
         <p:spPr>
           <a:xfrm>
-            <a:off x="822960" y="5934456"/>
-            <a:ext cx="2788920" cy="164592"/>
+            <a:off x="822960" y="5760720"/>
+            <a:ext cx="3063240" cy="128016"/>
+          </a:xfrm>
+          <a:prstGeom prst="rect">
+            <a:avLst/>
+          </a:prstGeom>
+          <a:noFill/>
+        </p:spPr>
+        <p:txBody>
+          <a:bodyPr wrap="none" lIns="9144" rIns="9144" tIns="9144" bIns="9144" anchor="t">
+            <a:spAutoFit/>
+          </a:bodyPr>
+          <a:lstStyle/>
+          <a:p>
+            <a:pPr algn="l">
+              <a:spcAft>
+                <a:spcPts val="0"/>
+              </a:spcAft>
+              <a:defRPr sz="620" b="1">
+                <a:solidFill>
+                  <a:srgbClr val="0D1117"/>
+                </a:solidFill>
+                <a:latin typeface="Inter"/>
+              </a:defRPr>
+            </a:pPr>
+            <a:r>
+              <a:rPr>
+                <a:latin typeface="Inter"/>
+              </a:rPr>
+              <a:t>OVERALL VIEW</a:t>
+            </a:r>
+          </a:p>
+        </p:txBody>
+      </p:sp>
+      <p:sp>
+        <p:nvSpPr>
+          <p:cNvPr id="19" name="TextBox 18"/>
+          <p:cNvSpPr txBox="1"/>
+          <p:nvPr/>
+        </p:nvSpPr>
+        <p:spPr>
+          <a:xfrm>
+            <a:off x="822960" y="5916168"/>
+            <a:ext cx="3063240" cy="182880"/>
+          </a:xfrm>
+          <a:prstGeom prst="rect">
+            <a:avLst/>
+          </a:prstGeom>
+          <a:noFill/>
+        </p:spPr>
+        <p:txBody>
+          <a:bodyPr wrap="none" lIns="9144" rIns="9144" tIns="9144" bIns="9144" anchor="t">
+            <a:spAutoFit/>
+          </a:bodyPr>
+          <a:lstStyle/>
+          <a:p>
+            <a:pPr algn="l">
+              <a:spcAft>
+                <a:spcPts val="0"/>
+              </a:spcAft>
+              <a:defRPr sz="900" b="1">
+                <a:solidFill>
+                  <a:srgbClr val="0D1117"/>
+                </a:solidFill>
+                <a:latin typeface="Inter"/>
+              </a:defRPr>
+            </a:pPr>
+            <a:r>
+              <a:rPr>
+                <a:latin typeface="Inter"/>
+              </a:rPr>
+              <a:t>Insufficient governed evidence</a:t>
+            </a:r>
+          </a:p>
+        </p:txBody>
+      </p:sp>
+      <p:sp>
+        <p:nvSpPr>
+          <p:cNvPr id="20" name="TextBox 19"/>
+          <p:cNvSpPr txBox="1"/>
+          <p:nvPr/>
+        </p:nvSpPr>
+        <p:spPr>
+          <a:xfrm>
+            <a:off x="4297680" y="5733288"/>
+            <a:ext cx="3108960" cy="164592"/>
+          </a:xfrm>
+          <a:prstGeom prst="rect">
+            <a:avLst/>
+          </a:prstGeom>
+          <a:noFill/>
+        </p:spPr>
+        <p:txBody>
+          <a:bodyPr wrap="none" lIns="9144" rIns="9144" tIns="9144" bIns="9144" anchor="t">
+            <a:spAutoFit/>
+          </a:bodyPr>
+          <a:lstStyle/>
+          <a:p>
+            <a:pPr algn="l">
+              <a:spcAft>
+                <a:spcPts val="0"/>
+              </a:spcAft>
+              <a:defRPr sz="650" b="1">
+                <a:solidFill>
+                  <a:srgbClr val="8A94A1"/>
+                </a:solidFill>
+                <a:latin typeface="Inter"/>
+              </a:defRPr>
+            </a:pPr>
+            <a:r>
+              <a:rPr>
+                <a:latin typeface="Inter"/>
+              </a:rPr>
+              <a:t>SCOPE REVIEWED</a:t>
+            </a:r>
+          </a:p>
+        </p:txBody>
+      </p:sp>
+      <p:sp>
+        <p:nvSpPr>
+          <p:cNvPr id="21" name="TextBox 20"/>
+          <p:cNvSpPr txBox="1"/>
+          <p:nvPr/>
+        </p:nvSpPr>
+        <p:spPr>
+          <a:xfrm>
+            <a:off x="4297680" y="5934456"/>
+            <a:ext cx="3108960" cy="201168"/>
           </a:xfrm>
           <a:prstGeom prst="rect">
             <a:avLst/>
@@ -3346,90 +3640,6 @@
               </a:spcAft>
               <a:defRPr sz="800" b="1">
                 <a:solidFill>
-                  <a:srgbClr val="0D1117"/>
-                </a:solidFill>
-                <a:latin typeface="Inter"/>
-              </a:defRPr>
-            </a:pPr>
-            <a:r>
-              <a:rPr>
-                <a:latin typeface="Inter"/>
-              </a:rPr>
-              <a:t>Insufficient governed evidence</a:t>
-            </a:r>
-          </a:p>
-        </p:txBody>
-      </p:sp>
-      <p:sp>
-        <p:nvSpPr>
-          <p:cNvPr id="15" name="TextBox 14"/>
-          <p:cNvSpPr txBox="1"/>
-          <p:nvPr/>
-        </p:nvSpPr>
-        <p:spPr>
-          <a:xfrm>
-            <a:off x="3977639" y="5824728"/>
-            <a:ext cx="3108960" cy="164592"/>
-          </a:xfrm>
-          <a:prstGeom prst="rect">
-            <a:avLst/>
-          </a:prstGeom>
-          <a:noFill/>
-        </p:spPr>
-        <p:txBody>
-          <a:bodyPr wrap="none" lIns="9144" rIns="9144" tIns="9144" bIns="9144" anchor="t">
-            <a:spAutoFit/>
-          </a:bodyPr>
-          <a:lstStyle/>
-          <a:p>
-            <a:pPr algn="l">
-              <a:spcAft>
-                <a:spcPts val="0"/>
-              </a:spcAft>
-              <a:defRPr sz="650" b="1">
-                <a:solidFill>
-                  <a:srgbClr val="8A94A1"/>
-                </a:solidFill>
-                <a:latin typeface="Inter"/>
-              </a:defRPr>
-            </a:pPr>
-            <a:r>
-              <a:rPr>
-                <a:latin typeface="Inter"/>
-              </a:rPr>
-              <a:t>EVIDENCE COMPLETENESS</a:t>
-            </a:r>
-          </a:p>
-        </p:txBody>
-      </p:sp>
-      <p:sp>
-        <p:nvSpPr>
-          <p:cNvPr id="16" name="TextBox 15"/>
-          <p:cNvSpPr txBox="1"/>
-          <p:nvPr/>
-        </p:nvSpPr>
-        <p:spPr>
-          <a:xfrm>
-            <a:off x="3977639" y="5998464"/>
-            <a:ext cx="3108960" cy="201168"/>
-          </a:xfrm>
-          <a:prstGeom prst="rect">
-            <a:avLst/>
-          </a:prstGeom>
-          <a:noFill/>
-        </p:spPr>
-        <p:txBody>
-          <a:bodyPr wrap="none" lIns="9144" rIns="9144" tIns="9144" bIns="9144" anchor="t">
-            <a:spAutoFit/>
-          </a:bodyPr>
-          <a:lstStyle/>
-          <a:p>
-            <a:pPr algn="l">
-              <a:spcAft>
-                <a:spcPts val="0"/>
-              </a:spcAft>
-              <a:defRPr sz="800" b="1">
-                <a:solidFill>
                   <a:srgbClr val="FFFFFF"/>
                 </a:solidFill>
                 <a:latin typeface="Inter"/>
@@ -3446,14 +3656,14 @@
       </p:sp>
       <p:sp>
         <p:nvSpPr>
-          <p:cNvPr id="17" name="TextBox 16"/>
+          <p:cNvPr id="22" name="TextBox 21"/>
           <p:cNvSpPr txBox="1"/>
           <p:nvPr/>
         </p:nvSpPr>
         <p:spPr>
           <a:xfrm>
-            <a:off x="685800" y="6473952"/>
-            <a:ext cx="8046720" cy="182880"/>
+            <a:off x="685800" y="6400800"/>
+            <a:ext cx="8046720" cy="146304"/>
           </a:xfrm>
           <a:prstGeom prst="rect">
             <a:avLst/>
@@ -3481,14 +3691,56 @@
               <a:rPr>
                 <a:latin typeface="Inter"/>
               </a:rPr>
-              <a:t>Confidential — prepared for internal investment use</a:t>
-            </a:r>
-          </a:p>
-        </p:txBody>
-      </p:sp>
-      <p:sp>
-        <p:nvSpPr>
-          <p:cNvPr id="18" name="TextBox 17"/>
+              <a:t>Confidential — manager selection review</a:t>
+            </a:r>
+          </a:p>
+        </p:txBody>
+      </p:sp>
+      <p:sp>
+        <p:nvSpPr>
+          <p:cNvPr id="23" name="TextBox 22"/>
+          <p:cNvSpPr txBox="1"/>
+          <p:nvPr/>
+        </p:nvSpPr>
+        <p:spPr>
+          <a:xfrm>
+            <a:off x="685800" y="6556248"/>
+            <a:ext cx="8046720" cy="128016"/>
+          </a:xfrm>
+          <a:prstGeom prst="rect">
+            <a:avLst/>
+          </a:prstGeom>
+          <a:noFill/>
+        </p:spPr>
+        <p:txBody>
+          <a:bodyPr wrap="none" lIns="9144" rIns="9144" tIns="9144" bIns="9144" anchor="t">
+            <a:spAutoFit/>
+          </a:bodyPr>
+          <a:lstStyle/>
+          <a:p>
+            <a:pPr algn="l">
+              <a:spcAft>
+                <a:spcPts val="0"/>
+              </a:spcAft>
+              <a:defRPr sz="650" b="0">
+                <a:solidFill>
+                  <a:srgbClr val="8A94A1"/>
+                </a:solidFill>
+                <a:latin typeface="Inter"/>
+              </a:defRPr>
+            </a:pPr>
+            <a:r>
+              <a:rPr>
+                <a:latin typeface="Inter"/>
+              </a:rPr>
+              <a:t>Illustrative sample · not client data</a:t>
+            </a:r>
+          </a:p>
+        </p:txBody>
+      </p:sp>
+      <p:sp>
+        <p:nvSpPr>
+          <p:cNvPr id="24" name="TextBox 23"/>
           <p:cNvSpPr txBox="1"/>
           <p:nvPr/>
         </p:nvSpPr>
@@ -3604,7 +3856,7 @@
         <p:spPr>
           <a:xfrm>
             <a:off x="640080" y="329184"/>
-            <a:ext cx="9875520" cy="182880"/>
+            <a:ext cx="5303520" cy="182880"/>
           </a:xfrm>
           <a:prstGeom prst="rect">
             <a:avLst/>
@@ -3645,6 +3897,48 @@
         </p:nvSpPr>
         <p:spPr>
           <a:xfrm>
+            <a:off x="5897880" y="310896"/>
+            <a:ext cx="4800600" cy="256032"/>
+          </a:xfrm>
+          <a:prstGeom prst="rect">
+            <a:avLst/>
+          </a:prstGeom>
+          <a:noFill/>
+        </p:spPr>
+        <p:txBody>
+          <a:bodyPr wrap="none" lIns="9144" rIns="9144" tIns="9144" bIns="9144" anchor="t">
+            <a:spAutoFit/>
+          </a:bodyPr>
+          <a:lstStyle/>
+          <a:p>
+            <a:pPr algn="r">
+              <a:spcAft>
+                <a:spcPts val="0"/>
+              </a:spcAft>
+              <a:defRPr sz="680" b="1">
+                <a:solidFill>
+                  <a:srgbClr val="4F6B00"/>
+                </a:solidFill>
+                <a:latin typeface="Inter"/>
+              </a:defRPr>
+            </a:pPr>
+            <a:r>
+              <a:rPr>
+                <a:latin typeface="Inter"/>
+              </a:rPr>
+              <a:t>Illustrative, Gradient Maintained — demo data, not the client's holdings or managers</a:t>
+            </a:r>
+          </a:p>
+        </p:txBody>
+      </p:sp>
+      <p:sp>
+        <p:nvSpPr>
+          <p:cNvPr id="5" name="TextBox 4"/>
+          <p:cNvSpPr txBox="1"/>
+          <p:nvPr/>
+        </p:nvSpPr>
+        <p:spPr>
+          <a:xfrm>
             <a:off x="640080" y="566928"/>
             <a:ext cx="10058400" cy="530352"/>
           </a:xfrm>
@@ -3681,7 +3975,7 @@
       </p:sp>
       <p:sp>
         <p:nvSpPr>
-          <p:cNvPr id="5" name="Rectangle 4"/>
+          <p:cNvPr id="6" name="Rectangle 5"/>
           <p:cNvSpPr/>
           <p:nvPr/>
         </p:nvSpPr>
@@ -3730,7 +4024,7 @@
       </p:sp>
       <p:sp>
         <p:nvSpPr>
-          <p:cNvPr id="6" name="Rectangle 5"/>
+          <p:cNvPr id="7" name="Rectangle 6"/>
           <p:cNvSpPr/>
           <p:nvPr/>
         </p:nvSpPr>
@@ -3779,7 +4073,7 @@
       </p:sp>
       <p:sp>
         <p:nvSpPr>
-          <p:cNvPr id="7" name="TextBox 6"/>
+          <p:cNvPr id="8" name="TextBox 7"/>
           <p:cNvSpPr txBox="1"/>
           <p:nvPr/>
         </p:nvSpPr>
@@ -3821,7 +4115,7 @@
       </p:sp>
       <p:sp>
         <p:nvSpPr>
-          <p:cNvPr id="8" name="Rectangle 7"/>
+          <p:cNvPr id="9" name="Rectangle 8"/>
           <p:cNvSpPr/>
           <p:nvPr/>
         </p:nvSpPr>
@@ -3870,7 +4164,7 @@
       </p:sp>
       <p:sp>
         <p:nvSpPr>
-          <p:cNvPr id="9" name="Rectangle 8"/>
+          <p:cNvPr id="10" name="Rectangle 9"/>
           <p:cNvSpPr/>
           <p:nvPr/>
         </p:nvSpPr>
@@ -3919,7 +4213,7 @@
       </p:sp>
       <p:sp>
         <p:nvSpPr>
-          <p:cNvPr id="10" name="TextBox 9"/>
+          <p:cNvPr id="11" name="TextBox 10"/>
           <p:cNvSpPr txBox="1"/>
           <p:nvPr/>
         </p:nvSpPr>
@@ -3961,7 +4255,7 @@
       </p:sp>
       <p:sp>
         <p:nvSpPr>
-          <p:cNvPr id="11" name="TextBox 10"/>
+          <p:cNvPr id="12" name="TextBox 11"/>
           <p:cNvSpPr txBox="1"/>
           <p:nvPr/>
         </p:nvSpPr>
@@ -4003,7 +4297,7 @@
       </p:sp>
       <p:sp>
         <p:nvSpPr>
-          <p:cNvPr id="12" name="Rectangle 11"/>
+          <p:cNvPr id="13" name="Rectangle 12"/>
           <p:cNvSpPr/>
           <p:nvPr/>
         </p:nvSpPr>
@@ -4052,7 +4346,7 @@
       </p:sp>
       <p:sp>
         <p:nvSpPr>
-          <p:cNvPr id="13" name="Rectangle 12"/>
+          <p:cNvPr id="14" name="Rectangle 13"/>
           <p:cNvSpPr/>
           <p:nvPr/>
         </p:nvSpPr>
@@ -4101,7 +4395,7 @@
       </p:sp>
       <p:sp>
         <p:nvSpPr>
-          <p:cNvPr id="14" name="TextBox 13"/>
+          <p:cNvPr id="15" name="TextBox 14"/>
           <p:cNvSpPr txBox="1"/>
           <p:nvPr/>
         </p:nvSpPr>
@@ -4143,7 +4437,7 @@
       </p:sp>
       <p:sp>
         <p:nvSpPr>
-          <p:cNvPr id="15" name="TextBox 14"/>
+          <p:cNvPr id="16" name="TextBox 15"/>
           <p:cNvSpPr txBox="1"/>
           <p:nvPr/>
         </p:nvSpPr>
@@ -4185,7 +4479,7 @@
       </p:sp>
       <p:sp>
         <p:nvSpPr>
-          <p:cNvPr id="16" name="Rectangle 15"/>
+          <p:cNvPr id="17" name="Rectangle 16"/>
           <p:cNvSpPr/>
           <p:nvPr/>
         </p:nvSpPr>
@@ -4234,7 +4528,7 @@
       </p:sp>
       <p:sp>
         <p:nvSpPr>
-          <p:cNvPr id="17" name="Rectangle 16"/>
+          <p:cNvPr id="18" name="Rectangle 17"/>
           <p:cNvSpPr/>
           <p:nvPr/>
         </p:nvSpPr>
@@ -4283,7 +4577,7 @@
       </p:sp>
       <p:sp>
         <p:nvSpPr>
-          <p:cNvPr id="18" name="TextBox 17"/>
+          <p:cNvPr id="19" name="TextBox 18"/>
           <p:cNvSpPr txBox="1"/>
           <p:nvPr/>
         </p:nvSpPr>
@@ -4325,7 +4619,7 @@
       </p:sp>
       <p:sp>
         <p:nvSpPr>
-          <p:cNvPr id="19" name="TextBox 18"/>
+          <p:cNvPr id="20" name="TextBox 19"/>
           <p:cNvSpPr txBox="1"/>
           <p:nvPr/>
         </p:nvSpPr>
@@ -4367,7 +4661,7 @@
       </p:sp>
       <p:sp>
         <p:nvSpPr>
-          <p:cNvPr id="20" name="Rectangle 19"/>
+          <p:cNvPr id="21" name="Rectangle 20"/>
           <p:cNvSpPr/>
           <p:nvPr/>
         </p:nvSpPr>
@@ -4416,7 +4710,7 @@
       </p:sp>
       <p:sp>
         <p:nvSpPr>
-          <p:cNvPr id="21" name="TextBox 20"/>
+          <p:cNvPr id="22" name="TextBox 21"/>
           <p:cNvSpPr txBox="1"/>
           <p:nvPr/>
         </p:nvSpPr>
@@ -4458,7 +4752,7 @@
       </p:sp>
       <p:sp>
         <p:nvSpPr>
-          <p:cNvPr id="22" name="TextBox 21"/>
+          <p:cNvPr id="23" name="TextBox 22"/>
           <p:cNvSpPr txBox="1"/>
           <p:nvPr/>
         </p:nvSpPr>
@@ -4493,14 +4787,14 @@
               <a:rPr>
                 <a:latin typeface="Inter"/>
               </a:rPr>
-              <a:t>Confidential — prepared for internal investment use · Data as of 2025-12-31</a:t>
-            </a:r>
-          </a:p>
-        </p:txBody>
-      </p:sp>
-      <p:sp>
-        <p:nvSpPr>
-          <p:cNvPr id="23" name="TextBox 22"/>
+              <a:t>Confidential — manager selection review · Data as of 2025-12-31</a:t>
+            </a:r>
+          </a:p>
+        </p:txBody>
+      </p:sp>
+      <p:sp>
+        <p:nvSpPr>
+          <p:cNvPr id="24" name="TextBox 23"/>
           <p:cNvSpPr txBox="1"/>
           <p:nvPr/>
         </p:nvSpPr>
@@ -4616,7 +4910,7 @@
         <p:spPr>
           <a:xfrm>
             <a:off x="640080" y="329184"/>
-            <a:ext cx="9875520" cy="182880"/>
+            <a:ext cx="5303520" cy="182880"/>
           </a:xfrm>
           <a:prstGeom prst="rect">
             <a:avLst/>
@@ -4644,7 +4938,7 @@
               <a:rPr>
                 <a:latin typeface="Inter"/>
               </a:rPr>
-              <a:t>BENCHMARK IDENTITY REMAINS ADVISORY FOR THE TEST CANDIDATES</a:t>
+              <a:t>BENCHMARK IDENTITY REMAINS ADVISORY FOR THE REVIEWED CANDIDATES</a:t>
             </a:r>
           </a:p>
         </p:txBody>
@@ -4652,6 +4946,48 @@
       <p:sp>
         <p:nvSpPr>
           <p:cNvPr id="4" name="TextBox 3"/>
+          <p:cNvSpPr txBox="1"/>
+          <p:nvPr/>
+        </p:nvSpPr>
+        <p:spPr>
+          <a:xfrm>
+            <a:off x="5897880" y="310896"/>
+            <a:ext cx="4800600" cy="256032"/>
+          </a:xfrm>
+          <a:prstGeom prst="rect">
+            <a:avLst/>
+          </a:prstGeom>
+          <a:noFill/>
+        </p:spPr>
+        <p:txBody>
+          <a:bodyPr wrap="none" lIns="9144" rIns="9144" tIns="9144" bIns="9144" anchor="t">
+            <a:spAutoFit/>
+          </a:bodyPr>
+          <a:lstStyle/>
+          <a:p>
+            <a:pPr algn="r">
+              <a:spcAft>
+                <a:spcPts val="0"/>
+              </a:spcAft>
+              <a:defRPr sz="680" b="1">
+                <a:solidFill>
+                  <a:srgbClr val="4F6B00"/>
+                </a:solidFill>
+                <a:latin typeface="Inter"/>
+              </a:defRPr>
+            </a:pPr>
+            <a:r>
+              <a:rPr>
+                <a:latin typeface="Inter"/>
+              </a:rPr>
+              <a:t>Illustrative, Gradient Maintained — demo data, not the client's holdings or managers</a:t>
+            </a:r>
+          </a:p>
+        </p:txBody>
+      </p:sp>
+      <p:sp>
+        <p:nvSpPr>
+          <p:cNvPr id="5" name="TextBox 4"/>
           <p:cNvSpPr txBox="1"/>
           <p:nvPr/>
         </p:nvSpPr>
@@ -4693,7 +5029,7 @@
       </p:sp>
       <p:sp>
         <p:nvSpPr>
-          <p:cNvPr id="5" name="Rectangle 4"/>
+          <p:cNvPr id="6" name="Rectangle 5"/>
           <p:cNvSpPr/>
           <p:nvPr/>
         </p:nvSpPr>
@@ -4742,7 +5078,7 @@
       </p:sp>
       <p:sp>
         <p:nvSpPr>
-          <p:cNvPr id="6" name="Rectangle 5"/>
+          <p:cNvPr id="7" name="Rectangle 6"/>
           <p:cNvSpPr/>
           <p:nvPr/>
         </p:nvSpPr>
@@ -4791,7 +5127,7 @@
       </p:sp>
       <p:sp>
         <p:nvSpPr>
-          <p:cNvPr id="7" name="TextBox 6"/>
+          <p:cNvPr id="8" name="TextBox 7"/>
           <p:cNvSpPr txBox="1"/>
           <p:nvPr/>
         </p:nvSpPr>
@@ -4833,7 +5169,7 @@
       </p:sp>
       <p:graphicFrame>
         <p:nvGraphicFramePr>
-          <p:cNvPr id="8" name="Table 7"/>
+          <p:cNvPr id="9" name="Table 8"/>
           <p:cNvGraphicFramePr>
             <a:graphicFrameLocks noGrp="1"/>
           </p:cNvGraphicFramePr>
@@ -5026,7 +5362,7 @@
       </p:graphicFrame>
       <p:sp>
         <p:nvSpPr>
-          <p:cNvPr id="9" name="Rectangle 8"/>
+          <p:cNvPr id="10" name="Rectangle 9"/>
           <p:cNvSpPr/>
           <p:nvPr/>
         </p:nvSpPr>
@@ -5075,7 +5411,7 @@
       </p:sp>
       <p:sp>
         <p:nvSpPr>
-          <p:cNvPr id="10" name="TextBox 9"/>
+          <p:cNvPr id="11" name="TextBox 10"/>
           <p:cNvSpPr txBox="1"/>
           <p:nvPr/>
         </p:nvSpPr>
@@ -5117,7 +5453,7 @@
       </p:sp>
       <p:sp>
         <p:nvSpPr>
-          <p:cNvPr id="11" name="TextBox 10"/>
+          <p:cNvPr id="12" name="TextBox 11"/>
           <p:cNvSpPr txBox="1"/>
           <p:nvPr/>
         </p:nvSpPr>
@@ -5152,14 +5488,14 @@
               <a:rPr>
                 <a:latin typeface="Inter"/>
               </a:rPr>
-              <a:t>Confidential — prepared for internal investment use · Data as of 2025-12-31</a:t>
-            </a:r>
-          </a:p>
-        </p:txBody>
-      </p:sp>
-      <p:sp>
-        <p:nvSpPr>
-          <p:cNvPr id="12" name="TextBox 11"/>
+              <a:t>Confidential — manager selection review · Data as of 2025-12-31</a:t>
+            </a:r>
+          </a:p>
+        </p:txBody>
+      </p:sp>
+      <p:sp>
+        <p:nvSpPr>
+          <p:cNvPr id="13" name="TextBox 12"/>
           <p:cNvSpPr txBox="1"/>
           <p:nvPr/>
         </p:nvSpPr>
@@ -5275,7 +5611,7 @@
         <p:spPr>
           <a:xfrm>
             <a:off x="640080" y="329184"/>
-            <a:ext cx="9875520" cy="182880"/>
+            <a:ext cx="5303520" cy="182880"/>
           </a:xfrm>
           <a:prstGeom prst="rect">
             <a:avLst/>
@@ -5316,6 +5652,48 @@
         </p:nvSpPr>
         <p:spPr>
           <a:xfrm>
+            <a:off x="5897880" y="310896"/>
+            <a:ext cx="4800600" cy="256032"/>
+          </a:xfrm>
+          <a:prstGeom prst="rect">
+            <a:avLst/>
+          </a:prstGeom>
+          <a:noFill/>
+        </p:spPr>
+        <p:txBody>
+          <a:bodyPr wrap="none" lIns="9144" rIns="9144" tIns="9144" bIns="9144" anchor="t">
+            <a:spAutoFit/>
+          </a:bodyPr>
+          <a:lstStyle/>
+          <a:p>
+            <a:pPr algn="r">
+              <a:spcAft>
+                <a:spcPts val="0"/>
+              </a:spcAft>
+              <a:defRPr sz="680" b="1">
+                <a:solidFill>
+                  <a:srgbClr val="4F6B00"/>
+                </a:solidFill>
+                <a:latin typeface="Inter"/>
+              </a:defRPr>
+            </a:pPr>
+            <a:r>
+              <a:rPr>
+                <a:latin typeface="Inter"/>
+              </a:rPr>
+              <a:t>Illustrative, Gradient Maintained — demo data, not the client's holdings or managers</a:t>
+            </a:r>
+          </a:p>
+        </p:txBody>
+      </p:sp>
+      <p:sp>
+        <p:nvSpPr>
+          <p:cNvPr id="5" name="TextBox 4"/>
+          <p:cNvSpPr txBox="1"/>
+          <p:nvPr/>
+        </p:nvSpPr>
+        <p:spPr>
+          <a:xfrm>
             <a:off x="640080" y="566928"/>
             <a:ext cx="10058400" cy="530352"/>
           </a:xfrm>
@@ -5352,7 +5730,7 @@
       </p:sp>
       <p:sp>
         <p:nvSpPr>
-          <p:cNvPr id="5" name="Rectangle 4"/>
+          <p:cNvPr id="6" name="Rectangle 5"/>
           <p:cNvSpPr/>
           <p:nvPr/>
         </p:nvSpPr>
@@ -5401,7 +5779,7 @@
       </p:sp>
       <p:sp>
         <p:nvSpPr>
-          <p:cNvPr id="6" name="Rectangle 5"/>
+          <p:cNvPr id="7" name="Rectangle 6"/>
           <p:cNvSpPr/>
           <p:nvPr/>
         </p:nvSpPr>
@@ -5450,7 +5828,7 @@
       </p:sp>
       <p:sp>
         <p:nvSpPr>
-          <p:cNvPr id="7" name="TextBox 6"/>
+          <p:cNvPr id="8" name="TextBox 7"/>
           <p:cNvSpPr txBox="1"/>
           <p:nvPr/>
         </p:nvSpPr>
@@ -5492,7 +5870,7 @@
       </p:sp>
       <p:sp>
         <p:nvSpPr>
-          <p:cNvPr id="8" name="Rectangle 7"/>
+          <p:cNvPr id="9" name="Rectangle 8"/>
           <p:cNvSpPr/>
           <p:nvPr/>
         </p:nvSpPr>
@@ -5541,7 +5919,7 @@
       </p:sp>
       <p:sp>
         <p:nvSpPr>
-          <p:cNvPr id="9" name="Rectangle 8"/>
+          <p:cNvPr id="10" name="Rectangle 9"/>
           <p:cNvSpPr/>
           <p:nvPr/>
         </p:nvSpPr>
@@ -5590,7 +5968,7 @@
       </p:sp>
       <p:sp>
         <p:nvSpPr>
-          <p:cNvPr id="10" name="TextBox 9"/>
+          <p:cNvPr id="11" name="TextBox 10"/>
           <p:cNvSpPr txBox="1"/>
           <p:nvPr/>
         </p:nvSpPr>
@@ -5632,7 +6010,7 @@
       </p:sp>
       <p:sp>
         <p:nvSpPr>
-          <p:cNvPr id="11" name="TextBox 10"/>
+          <p:cNvPr id="12" name="TextBox 11"/>
           <p:cNvSpPr txBox="1"/>
           <p:nvPr/>
         </p:nvSpPr>
@@ -5674,7 +6052,7 @@
       </p:sp>
       <p:sp>
         <p:nvSpPr>
-          <p:cNvPr id="12" name="Rectangle 11"/>
+          <p:cNvPr id="13" name="Rectangle 12"/>
           <p:cNvSpPr/>
           <p:nvPr/>
         </p:nvSpPr>
@@ -5723,7 +6101,7 @@
       </p:sp>
       <p:sp>
         <p:nvSpPr>
-          <p:cNvPr id="13" name="Rectangle 12"/>
+          <p:cNvPr id="14" name="Rectangle 13"/>
           <p:cNvSpPr/>
           <p:nvPr/>
         </p:nvSpPr>
@@ -5772,7 +6150,7 @@
       </p:sp>
       <p:sp>
         <p:nvSpPr>
-          <p:cNvPr id="14" name="TextBox 13"/>
+          <p:cNvPr id="15" name="TextBox 14"/>
           <p:cNvSpPr txBox="1"/>
           <p:nvPr/>
         </p:nvSpPr>
@@ -5814,7 +6192,7 @@
       </p:sp>
       <p:sp>
         <p:nvSpPr>
-          <p:cNvPr id="15" name="TextBox 14"/>
+          <p:cNvPr id="16" name="TextBox 15"/>
           <p:cNvSpPr txBox="1"/>
           <p:nvPr/>
         </p:nvSpPr>
@@ -5856,7 +6234,7 @@
       </p:sp>
       <p:sp>
         <p:nvSpPr>
-          <p:cNvPr id="16" name="Rectangle 15"/>
+          <p:cNvPr id="17" name="Rectangle 16"/>
           <p:cNvSpPr/>
           <p:nvPr/>
         </p:nvSpPr>
@@ -5905,7 +6283,7 @@
       </p:sp>
       <p:sp>
         <p:nvSpPr>
-          <p:cNvPr id="17" name="TextBox 16"/>
+          <p:cNvPr id="18" name="TextBox 17"/>
           <p:cNvSpPr txBox="1"/>
           <p:nvPr/>
         </p:nvSpPr>
@@ -5947,7 +6325,7 @@
       </p:sp>
       <p:sp>
         <p:nvSpPr>
-          <p:cNvPr id="18" name="TextBox 17"/>
+          <p:cNvPr id="19" name="TextBox 18"/>
           <p:cNvSpPr txBox="1"/>
           <p:nvPr/>
         </p:nvSpPr>
@@ -5982,14 +6360,14 @@
               <a:rPr>
                 <a:latin typeface="Inter"/>
               </a:rPr>
-              <a:t>Confidential — prepared for internal investment use · Data as of 2025-12-31</a:t>
-            </a:r>
-          </a:p>
-        </p:txBody>
-      </p:sp>
-      <p:sp>
-        <p:nvSpPr>
-          <p:cNvPr id="19" name="TextBox 18"/>
+              <a:t>Confidential — manager selection review · Data as of 2025-12-31</a:t>
+            </a:r>
+          </a:p>
+        </p:txBody>
+      </p:sp>
+      <p:sp>
+        <p:nvSpPr>
+          <p:cNvPr id="20" name="TextBox 19"/>
           <p:cNvSpPr txBox="1"/>
           <p:nvPr/>
         </p:nvSpPr>
@@ -6105,7 +6483,7 @@
         <p:spPr>
           <a:xfrm>
             <a:off x="640080" y="329184"/>
-            <a:ext cx="9875520" cy="182880"/>
+            <a:ext cx="5303520" cy="182880"/>
           </a:xfrm>
           <a:prstGeom prst="rect">
             <a:avLst/>
@@ -6146,6 +6524,48 @@
         </p:nvSpPr>
         <p:spPr>
           <a:xfrm>
+            <a:off x="5897880" y="310896"/>
+            <a:ext cx="4800600" cy="256032"/>
+          </a:xfrm>
+          <a:prstGeom prst="rect">
+            <a:avLst/>
+          </a:prstGeom>
+          <a:noFill/>
+        </p:spPr>
+        <p:txBody>
+          <a:bodyPr wrap="none" lIns="9144" rIns="9144" tIns="9144" bIns="9144" anchor="t">
+            <a:spAutoFit/>
+          </a:bodyPr>
+          <a:lstStyle/>
+          <a:p>
+            <a:pPr algn="r">
+              <a:spcAft>
+                <a:spcPts val="0"/>
+              </a:spcAft>
+              <a:defRPr sz="680" b="1">
+                <a:solidFill>
+                  <a:srgbClr val="4F6B00"/>
+                </a:solidFill>
+                <a:latin typeface="Inter"/>
+              </a:defRPr>
+            </a:pPr>
+            <a:r>
+              <a:rPr>
+                <a:latin typeface="Inter"/>
+              </a:rPr>
+              <a:t>Illustrative, Gradient Maintained — demo data, not the client's holdings or managers</a:t>
+            </a:r>
+          </a:p>
+        </p:txBody>
+      </p:sp>
+      <p:sp>
+        <p:nvSpPr>
+          <p:cNvPr id="5" name="TextBox 4"/>
+          <p:cNvSpPr txBox="1"/>
+          <p:nvPr/>
+        </p:nvSpPr>
+        <p:spPr>
+          <a:xfrm>
             <a:off x="640080" y="566928"/>
             <a:ext cx="10058400" cy="530352"/>
           </a:xfrm>
@@ -6182,7 +6602,7 @@
       </p:sp>
       <p:sp>
         <p:nvSpPr>
-          <p:cNvPr id="5" name="Rectangle 4"/>
+          <p:cNvPr id="6" name="Rectangle 5"/>
           <p:cNvSpPr/>
           <p:nvPr/>
         </p:nvSpPr>
@@ -6231,7 +6651,7 @@
       </p:sp>
       <p:sp>
         <p:nvSpPr>
-          <p:cNvPr id="6" name="Rectangle 5"/>
+          <p:cNvPr id="7" name="Rectangle 6"/>
           <p:cNvSpPr/>
           <p:nvPr/>
         </p:nvSpPr>
@@ -6280,7 +6700,7 @@
       </p:sp>
       <p:sp>
         <p:nvSpPr>
-          <p:cNvPr id="7" name="TextBox 6"/>
+          <p:cNvPr id="8" name="TextBox 7"/>
           <p:cNvSpPr txBox="1"/>
           <p:nvPr/>
         </p:nvSpPr>
@@ -6322,7 +6742,7 @@
       </p:sp>
       <p:sp>
         <p:nvSpPr>
-          <p:cNvPr id="8" name="Rectangle 7"/>
+          <p:cNvPr id="9" name="Rectangle 8"/>
           <p:cNvSpPr/>
           <p:nvPr/>
         </p:nvSpPr>
@@ -6371,7 +6791,7 @@
       </p:sp>
       <p:sp>
         <p:nvSpPr>
-          <p:cNvPr id="9" name="Rectangle 8"/>
+          <p:cNvPr id="10" name="Rectangle 9"/>
           <p:cNvSpPr/>
           <p:nvPr/>
         </p:nvSpPr>
@@ -6420,7 +6840,7 @@
       </p:sp>
       <p:sp>
         <p:nvSpPr>
-          <p:cNvPr id="10" name="TextBox 9"/>
+          <p:cNvPr id="11" name="TextBox 10"/>
           <p:cNvSpPr txBox="1"/>
           <p:nvPr/>
         </p:nvSpPr>
@@ -6462,7 +6882,7 @@
       </p:sp>
       <p:sp>
         <p:nvSpPr>
-          <p:cNvPr id="11" name="TextBox 10"/>
+          <p:cNvPr id="12" name="TextBox 11"/>
           <p:cNvSpPr txBox="1"/>
           <p:nvPr/>
         </p:nvSpPr>
@@ -6504,7 +6924,7 @@
       </p:sp>
       <p:sp>
         <p:nvSpPr>
-          <p:cNvPr id="12" name="Rectangle 11"/>
+          <p:cNvPr id="13" name="Rectangle 12"/>
           <p:cNvSpPr/>
           <p:nvPr/>
         </p:nvSpPr>
@@ -6553,7 +6973,7 @@
       </p:sp>
       <p:sp>
         <p:nvSpPr>
-          <p:cNvPr id="13" name="Rectangle 12"/>
+          <p:cNvPr id="14" name="Rectangle 13"/>
           <p:cNvSpPr/>
           <p:nvPr/>
         </p:nvSpPr>
@@ -6602,7 +7022,7 @@
       </p:sp>
       <p:sp>
         <p:nvSpPr>
-          <p:cNvPr id="14" name="TextBox 13"/>
+          <p:cNvPr id="15" name="TextBox 14"/>
           <p:cNvSpPr txBox="1"/>
           <p:nvPr/>
         </p:nvSpPr>
@@ -6644,7 +7064,7 @@
       </p:sp>
       <p:sp>
         <p:nvSpPr>
-          <p:cNvPr id="15" name="TextBox 14"/>
+          <p:cNvPr id="16" name="TextBox 15"/>
           <p:cNvSpPr txBox="1"/>
           <p:nvPr/>
         </p:nvSpPr>
@@ -6686,7 +7106,7 @@
       </p:sp>
       <p:sp>
         <p:nvSpPr>
-          <p:cNvPr id="16" name="Rectangle 15"/>
+          <p:cNvPr id="17" name="Rectangle 16"/>
           <p:cNvSpPr/>
           <p:nvPr/>
         </p:nvSpPr>
@@ -6735,7 +7155,7 @@
       </p:sp>
       <p:sp>
         <p:nvSpPr>
-          <p:cNvPr id="17" name="TextBox 16"/>
+          <p:cNvPr id="18" name="TextBox 17"/>
           <p:cNvSpPr txBox="1"/>
           <p:nvPr/>
         </p:nvSpPr>
@@ -6777,7 +7197,7 @@
       </p:sp>
       <p:sp>
         <p:nvSpPr>
-          <p:cNvPr id="18" name="TextBox 17"/>
+          <p:cNvPr id="19" name="TextBox 18"/>
           <p:cNvSpPr txBox="1"/>
           <p:nvPr/>
         </p:nvSpPr>
@@ -6812,14 +7232,14 @@
               <a:rPr>
                 <a:latin typeface="Inter"/>
               </a:rPr>
-              <a:t>Confidential — prepared for internal investment use · Data as of 2025-12-31</a:t>
-            </a:r>
-          </a:p>
-        </p:txBody>
-      </p:sp>
-      <p:sp>
-        <p:nvSpPr>
-          <p:cNvPr id="19" name="TextBox 18"/>
+              <a:t>Confidential — manager selection review · Data as of 2025-12-31</a:t>
+            </a:r>
+          </a:p>
+        </p:txBody>
+      </p:sp>
+      <p:sp>
+        <p:nvSpPr>
+          <p:cNvPr id="20" name="TextBox 19"/>
           <p:cNvSpPr txBox="1"/>
           <p:nvPr/>
         </p:nvSpPr>
@@ -6935,7 +7355,7 @@
         <p:spPr>
           <a:xfrm>
             <a:off x="640080" y="329184"/>
-            <a:ext cx="9875520" cy="182880"/>
+            <a:ext cx="5303520" cy="182880"/>
           </a:xfrm>
           <a:prstGeom prst="rect">
             <a:avLst/>
@@ -6976,6 +7396,48 @@
         </p:nvSpPr>
         <p:spPr>
           <a:xfrm>
+            <a:off x="5897880" y="310896"/>
+            <a:ext cx="4800600" cy="256032"/>
+          </a:xfrm>
+          <a:prstGeom prst="rect">
+            <a:avLst/>
+          </a:prstGeom>
+          <a:noFill/>
+        </p:spPr>
+        <p:txBody>
+          <a:bodyPr wrap="none" lIns="9144" rIns="9144" tIns="9144" bIns="9144" anchor="t">
+            <a:spAutoFit/>
+          </a:bodyPr>
+          <a:lstStyle/>
+          <a:p>
+            <a:pPr algn="r">
+              <a:spcAft>
+                <a:spcPts val="0"/>
+              </a:spcAft>
+              <a:defRPr sz="680" b="1">
+                <a:solidFill>
+                  <a:srgbClr val="4F6B00"/>
+                </a:solidFill>
+                <a:latin typeface="Inter"/>
+              </a:defRPr>
+            </a:pPr>
+            <a:r>
+              <a:rPr>
+                <a:latin typeface="Inter"/>
+              </a:rPr>
+              <a:t>Illustrative, Gradient Maintained — demo data, not the client's holdings or managers</a:t>
+            </a:r>
+          </a:p>
+        </p:txBody>
+      </p:sp>
+      <p:sp>
+        <p:nvSpPr>
+          <p:cNvPr id="5" name="TextBox 4"/>
+          <p:cNvSpPr txBox="1"/>
+          <p:nvPr/>
+        </p:nvSpPr>
+        <p:spPr>
+          <a:xfrm>
             <a:off x="640080" y="566928"/>
             <a:ext cx="10058400" cy="530352"/>
           </a:xfrm>
@@ -7012,7 +7474,7 @@
       </p:sp>
       <p:sp>
         <p:nvSpPr>
-          <p:cNvPr id="5" name="Rectangle 4"/>
+          <p:cNvPr id="6" name="Rectangle 5"/>
           <p:cNvSpPr/>
           <p:nvPr/>
         </p:nvSpPr>
@@ -7061,7 +7523,7 @@
       </p:sp>
       <p:sp>
         <p:nvSpPr>
-          <p:cNvPr id="6" name="Rectangle 5"/>
+          <p:cNvPr id="7" name="Rectangle 6"/>
           <p:cNvSpPr/>
           <p:nvPr/>
         </p:nvSpPr>
@@ -7110,7 +7572,7 @@
       </p:sp>
       <p:sp>
         <p:nvSpPr>
-          <p:cNvPr id="7" name="TextBox 6"/>
+          <p:cNvPr id="8" name="TextBox 7"/>
           <p:cNvSpPr txBox="1"/>
           <p:nvPr/>
         </p:nvSpPr>
@@ -7152,7 +7614,7 @@
       </p:sp>
       <p:sp>
         <p:nvSpPr>
-          <p:cNvPr id="8" name="Rectangle 7"/>
+          <p:cNvPr id="9" name="Rectangle 8"/>
           <p:cNvSpPr/>
           <p:nvPr/>
         </p:nvSpPr>
@@ -7201,7 +7663,7 @@
       </p:sp>
       <p:sp>
         <p:nvSpPr>
-          <p:cNvPr id="9" name="Rectangle 8"/>
+          <p:cNvPr id="10" name="Rectangle 9"/>
           <p:cNvSpPr/>
           <p:nvPr/>
         </p:nvSpPr>
@@ -7250,7 +7712,7 @@
       </p:sp>
       <p:sp>
         <p:nvSpPr>
-          <p:cNvPr id="10" name="TextBox 9"/>
+          <p:cNvPr id="11" name="TextBox 10"/>
           <p:cNvSpPr txBox="1"/>
           <p:nvPr/>
         </p:nvSpPr>
@@ -7292,7 +7754,7 @@
       </p:sp>
       <p:sp>
         <p:nvSpPr>
-          <p:cNvPr id="11" name="TextBox 10"/>
+          <p:cNvPr id="12" name="TextBox 11"/>
           <p:cNvSpPr txBox="1"/>
           <p:nvPr/>
         </p:nvSpPr>
@@ -7334,7 +7796,7 @@
       </p:sp>
       <p:sp>
         <p:nvSpPr>
-          <p:cNvPr id="12" name="Rectangle 11"/>
+          <p:cNvPr id="13" name="Rectangle 12"/>
           <p:cNvSpPr/>
           <p:nvPr/>
         </p:nvSpPr>
@@ -7383,7 +7845,7 @@
       </p:sp>
       <p:sp>
         <p:nvSpPr>
-          <p:cNvPr id="13" name="Rectangle 12"/>
+          <p:cNvPr id="14" name="Rectangle 13"/>
           <p:cNvSpPr/>
           <p:nvPr/>
         </p:nvSpPr>
@@ -7432,7 +7894,7 @@
       </p:sp>
       <p:sp>
         <p:nvSpPr>
-          <p:cNvPr id="14" name="TextBox 13"/>
+          <p:cNvPr id="15" name="TextBox 14"/>
           <p:cNvSpPr txBox="1"/>
           <p:nvPr/>
         </p:nvSpPr>
@@ -7474,7 +7936,7 @@
       </p:sp>
       <p:sp>
         <p:nvSpPr>
-          <p:cNvPr id="15" name="TextBox 14"/>
+          <p:cNvPr id="16" name="TextBox 15"/>
           <p:cNvSpPr txBox="1"/>
           <p:nvPr/>
         </p:nvSpPr>
@@ -7516,7 +7978,7 @@
       </p:sp>
       <p:sp>
         <p:nvSpPr>
-          <p:cNvPr id="16" name="Rectangle 15"/>
+          <p:cNvPr id="17" name="Rectangle 16"/>
           <p:cNvSpPr/>
           <p:nvPr/>
         </p:nvSpPr>
@@ -7565,7 +8027,7 @@
       </p:sp>
       <p:sp>
         <p:nvSpPr>
-          <p:cNvPr id="17" name="TextBox 16"/>
+          <p:cNvPr id="18" name="TextBox 17"/>
           <p:cNvSpPr txBox="1"/>
           <p:nvPr/>
         </p:nvSpPr>
@@ -7607,7 +8069,7 @@
       </p:sp>
       <p:sp>
         <p:nvSpPr>
-          <p:cNvPr id="18" name="TextBox 17"/>
+          <p:cNvPr id="19" name="TextBox 18"/>
           <p:cNvSpPr txBox="1"/>
           <p:nvPr/>
         </p:nvSpPr>
@@ -7642,14 +8104,14 @@
               <a:rPr>
                 <a:latin typeface="Inter"/>
               </a:rPr>
-              <a:t>Confidential — prepared for internal investment use · Data as of 2025-12-31</a:t>
-            </a:r>
-          </a:p>
-        </p:txBody>
-      </p:sp>
-      <p:sp>
-        <p:nvSpPr>
-          <p:cNvPr id="19" name="TextBox 18"/>
+              <a:t>Confidential — manager selection review · Data as of 2025-12-31</a:t>
+            </a:r>
+          </a:p>
+        </p:txBody>
+      </p:sp>
+      <p:sp>
+        <p:nvSpPr>
+          <p:cNvPr id="20" name="TextBox 19"/>
           <p:cNvSpPr txBox="1"/>
           <p:nvPr/>
         </p:nvSpPr>
@@ -7765,7 +8227,7 @@
         <p:spPr>
           <a:xfrm>
             <a:off x="640080" y="329184"/>
-            <a:ext cx="9875520" cy="182880"/>
+            <a:ext cx="5303520" cy="182880"/>
           </a:xfrm>
           <a:prstGeom prst="rect">
             <a:avLst/>
@@ -7806,6 +8268,48 @@
         </p:nvSpPr>
         <p:spPr>
           <a:xfrm>
+            <a:off x="5897880" y="310896"/>
+            <a:ext cx="4800600" cy="256032"/>
+          </a:xfrm>
+          <a:prstGeom prst="rect">
+            <a:avLst/>
+          </a:prstGeom>
+          <a:noFill/>
+        </p:spPr>
+        <p:txBody>
+          <a:bodyPr wrap="none" lIns="9144" rIns="9144" tIns="9144" bIns="9144" anchor="t">
+            <a:spAutoFit/>
+          </a:bodyPr>
+          <a:lstStyle/>
+          <a:p>
+            <a:pPr algn="r">
+              <a:spcAft>
+                <a:spcPts val="0"/>
+              </a:spcAft>
+              <a:defRPr sz="680" b="1">
+                <a:solidFill>
+                  <a:srgbClr val="4F6B00"/>
+                </a:solidFill>
+                <a:latin typeface="Inter"/>
+              </a:defRPr>
+            </a:pPr>
+            <a:r>
+              <a:rPr>
+                <a:latin typeface="Inter"/>
+              </a:rPr>
+              <a:t>Illustrative, Gradient Maintained — demo data, not the client's holdings or managers</a:t>
+            </a:r>
+          </a:p>
+        </p:txBody>
+      </p:sp>
+      <p:sp>
+        <p:nvSpPr>
+          <p:cNvPr id="5" name="TextBox 4"/>
+          <p:cNvSpPr txBox="1"/>
+          <p:nvPr/>
+        </p:nvSpPr>
+        <p:spPr>
+          <a:xfrm>
             <a:off x="640080" y="566928"/>
             <a:ext cx="10058400" cy="530352"/>
           </a:xfrm>
@@ -7842,7 +8346,7 @@
       </p:sp>
       <p:sp>
         <p:nvSpPr>
-          <p:cNvPr id="5" name="Rectangle 4"/>
+          <p:cNvPr id="6" name="Rectangle 5"/>
           <p:cNvSpPr/>
           <p:nvPr/>
         </p:nvSpPr>
@@ -7891,7 +8395,7 @@
       </p:sp>
       <p:sp>
         <p:nvSpPr>
-          <p:cNvPr id="6" name="Rectangle 5"/>
+          <p:cNvPr id="7" name="Rectangle 6"/>
           <p:cNvSpPr/>
           <p:nvPr/>
         </p:nvSpPr>
@@ -7940,7 +8444,7 @@
       </p:sp>
       <p:sp>
         <p:nvSpPr>
-          <p:cNvPr id="7" name="TextBox 6"/>
+          <p:cNvPr id="8" name="TextBox 7"/>
           <p:cNvSpPr txBox="1"/>
           <p:nvPr/>
         </p:nvSpPr>
@@ -7982,7 +8486,7 @@
       </p:sp>
       <p:sp>
         <p:nvSpPr>
-          <p:cNvPr id="8" name="TextBox 7"/>
+          <p:cNvPr id="9" name="TextBox 8"/>
           <p:cNvSpPr txBox="1"/>
           <p:nvPr/>
         </p:nvSpPr>
@@ -8031,7 +8535,7 @@
       </p:sp>
       <p:sp>
         <p:nvSpPr>
-          <p:cNvPr id="9" name="Rectangle 8"/>
+          <p:cNvPr id="10" name="Rectangle 9"/>
           <p:cNvSpPr/>
           <p:nvPr/>
         </p:nvSpPr>
@@ -8080,7 +8584,7 @@
       </p:sp>
       <p:sp>
         <p:nvSpPr>
-          <p:cNvPr id="10" name="TextBox 9"/>
+          <p:cNvPr id="11" name="TextBox 10"/>
           <p:cNvSpPr txBox="1"/>
           <p:nvPr/>
         </p:nvSpPr>
@@ -8122,7 +8626,7 @@
       </p:sp>
       <p:sp>
         <p:nvSpPr>
-          <p:cNvPr id="11" name="TextBox 10"/>
+          <p:cNvPr id="12" name="TextBox 11"/>
           <p:cNvSpPr txBox="1"/>
           <p:nvPr/>
         </p:nvSpPr>
@@ -8157,14 +8661,14 @@
               <a:rPr>
                 <a:latin typeface="Inter"/>
               </a:rPr>
-              <a:t>Confidential — prepared for internal investment use · Data as of 2025-12-31</a:t>
-            </a:r>
-          </a:p>
-        </p:txBody>
-      </p:sp>
-      <p:sp>
-        <p:nvSpPr>
-          <p:cNvPr id="12" name="TextBox 11"/>
+              <a:t>Confidential — manager selection review · Data as of 2025-12-31</a:t>
+            </a:r>
+          </a:p>
+        </p:txBody>
+      </p:sp>
+      <p:sp>
+        <p:nvSpPr>
+          <p:cNvPr id="13" name="TextBox 12"/>
           <p:cNvSpPr txBox="1"/>
           <p:nvPr/>
         </p:nvSpPr>
@@ -8280,7 +8784,7 @@
         <p:spPr>
           <a:xfrm>
             <a:off x="640080" y="329184"/>
-            <a:ext cx="9875520" cy="182880"/>
+            <a:ext cx="5303520" cy="182880"/>
           </a:xfrm>
           <a:prstGeom prst="rect">
             <a:avLst/>
@@ -8308,7 +8812,7 @@
               <a:rPr>
                 <a:latin typeface="Inter"/>
               </a:rPr>
-              <a:t>SAVED FICTIONAL TEST EVIDENCE</a:t>
+              <a:t>SAVED ILLUSTRATIVE SAMPLE EVIDENCE</a:t>
             </a:r>
           </a:p>
         </p:txBody>
@@ -8316,6 +8820,48 @@
       <p:sp>
         <p:nvSpPr>
           <p:cNvPr id="4" name="TextBox 3"/>
+          <p:cNvSpPr txBox="1"/>
+          <p:nvPr/>
+        </p:nvSpPr>
+        <p:spPr>
+          <a:xfrm>
+            <a:off x="5897880" y="310896"/>
+            <a:ext cx="4800600" cy="256032"/>
+          </a:xfrm>
+          <a:prstGeom prst="rect">
+            <a:avLst/>
+          </a:prstGeom>
+          <a:noFill/>
+        </p:spPr>
+        <p:txBody>
+          <a:bodyPr wrap="none" lIns="9144" rIns="9144" tIns="9144" bIns="9144" anchor="t">
+            <a:spAutoFit/>
+          </a:bodyPr>
+          <a:lstStyle/>
+          <a:p>
+            <a:pPr algn="r">
+              <a:spcAft>
+                <a:spcPts val="0"/>
+              </a:spcAft>
+              <a:defRPr sz="680" b="1">
+                <a:solidFill>
+                  <a:srgbClr val="4F6B00"/>
+                </a:solidFill>
+                <a:latin typeface="Inter"/>
+              </a:defRPr>
+            </a:pPr>
+            <a:r>
+              <a:rPr>
+                <a:latin typeface="Inter"/>
+              </a:rPr>
+              <a:t>Illustrative, Gradient Maintained — demo data, not the client's holdings or managers</a:t>
+            </a:r>
+          </a:p>
+        </p:txBody>
+      </p:sp>
+      <p:sp>
+        <p:nvSpPr>
+          <p:cNvPr id="5" name="TextBox 4"/>
           <p:cNvSpPr txBox="1"/>
           <p:nvPr/>
         </p:nvSpPr>
@@ -8350,14 +8896,14 @@
               <a:rPr>
                 <a:latin typeface="Inter"/>
               </a:rPr>
-              <a:t>Appendix A — Sources and methods</a:t>
-            </a:r>
-          </a:p>
-        </p:txBody>
-      </p:sp>
-      <p:sp>
-        <p:nvSpPr>
-          <p:cNvPr id="5" name="Rectangle 4"/>
+              <a:t>Appendix — Sources and methods</a:t>
+            </a:r>
+          </a:p>
+        </p:txBody>
+      </p:sp>
+      <p:sp>
+        <p:nvSpPr>
+          <p:cNvPr id="6" name="Rectangle 5"/>
           <p:cNvSpPr/>
           <p:nvPr/>
         </p:nvSpPr>
@@ -8406,7 +8952,7 @@
       </p:sp>
       <p:sp>
         <p:nvSpPr>
-          <p:cNvPr id="6" name="Rectangle 5"/>
+          <p:cNvPr id="7" name="Rectangle 6"/>
           <p:cNvSpPr/>
           <p:nvPr/>
         </p:nvSpPr>
@@ -8455,7 +9001,7 @@
       </p:sp>
       <p:sp>
         <p:nvSpPr>
-          <p:cNvPr id="7" name="TextBox 6"/>
+          <p:cNvPr id="8" name="TextBox 7"/>
           <p:cNvSpPr txBox="1"/>
           <p:nvPr/>
         </p:nvSpPr>
@@ -8490,14 +9036,14 @@
               <a:rPr>
                 <a:latin typeface="Inter"/>
               </a:rPr>
-              <a:t>07</a:t>
+              <a:t>A</a:t>
             </a:r>
           </a:p>
         </p:txBody>
       </p:sp>
       <p:graphicFrame>
         <p:nvGraphicFramePr>
-          <p:cNvPr id="8" name="Table 7"/>
+          <p:cNvPr id="9" name="Table 8"/>
           <p:cNvGraphicFramePr>
             <a:graphicFrameLocks noGrp="1"/>
           </p:cNvGraphicFramePr>
@@ -8505,7 +9051,7 @@
         </p:nvGraphicFramePr>
         <p:xfrm>
           <a:off x="640080" y="1325880"/>
-          <a:ext cx="10908792" cy="1169662"/>
+          <a:ext cx="10908792" cy="968494"/>
         </p:xfrm>
         <a:graphic>
           <a:graphicData uri="http://schemas.openxmlformats.org/drawingml/2006/table">
@@ -8515,10 +9061,16 @@
               </a:tblPr>
               <a:tblGrid>
                 <a:gridCol w="2011680"/>
-                <a:gridCol w="4448556"/>
-                <a:gridCol w="4448556"/>
+                <a:gridCol w="1112139"/>
+                <a:gridCol w="1112139"/>
+                <a:gridCol w="1112139"/>
+                <a:gridCol w="1112139"/>
+                <a:gridCol w="1112139"/>
+                <a:gridCol w="1112139"/>
+                <a:gridCol w="1112139"/>
+                <a:gridCol w="1112139"/>
               </a:tblGrid>
-              <a:tr h="584831">
+              <a:tr h="484247">
                 <a:tc>
                   <a:txBody>
                     <a:bodyPr/>
@@ -8590,7 +9142,169 @@
                         <a:rPr>
                           <a:latin typeface="Inter"/>
                         </a:rPr>
-                        <a:t>Tool</a:t>
+                        <a:t>Basis</a:t>
+                      </a:r>
+                    </a:p>
+                  </a:txBody>
+                  <a:tcPr marL="54864" marR="54864" marT="27432" marB="27432" anchor="ctr">
+                    <a:solidFill>
+                      <a:srgbClr val="0D1117"/>
+                    </a:solidFill>
+                  </a:tcPr>
+                </a:tc>
+                <a:tc>
+                  <a:txBody>
+                    <a:bodyPr/>
+                    <a:lstStyle/>
+                    <a:p>
+                      <a:pPr>
+                        <a:defRPr sz="750" b="1">
+                          <a:solidFill>
+                            <a:srgbClr val="FFFFFF"/>
+                          </a:solidFill>
+                          <a:latin typeface="Inter"/>
+                        </a:defRPr>
+                      </a:pPr>
+                      <a:r>
+                        <a:rPr>
+                          <a:latin typeface="Inter"/>
+                        </a:rPr>
+                        <a:t>Tool / view</a:t>
+                      </a:r>
+                    </a:p>
+                  </a:txBody>
+                  <a:tcPr marL="54864" marR="54864" marT="27432" marB="27432" anchor="ctr">
+                    <a:solidFill>
+                      <a:srgbClr val="0D1117"/>
+                    </a:solidFill>
+                  </a:tcPr>
+                </a:tc>
+                <a:tc>
+                  <a:txBody>
+                    <a:bodyPr/>
+                    <a:lstStyle/>
+                    <a:p>
+                      <a:pPr>
+                        <a:defRPr sz="750" b="1">
+                          <a:solidFill>
+                            <a:srgbClr val="FFFFFF"/>
+                          </a:solidFill>
+                          <a:latin typeface="Inter"/>
+                        </a:defRPr>
+                      </a:pPr>
+                      <a:r>
+                        <a:rPr>
+                          <a:latin typeface="Inter"/>
+                        </a:rPr>
+                        <a:t>Key parameters</a:t>
+                      </a:r>
+                    </a:p>
+                  </a:txBody>
+                  <a:tcPr marL="54864" marR="54864" marT="27432" marB="27432" anchor="ctr">
+                    <a:solidFill>
+                      <a:srgbClr val="0D1117"/>
+                    </a:solidFill>
+                  </a:tcPr>
+                </a:tc>
+                <a:tc>
+                  <a:txBody>
+                    <a:bodyPr/>
+                    <a:lstStyle/>
+                    <a:p>
+                      <a:pPr>
+                        <a:defRPr sz="750" b="1">
+                          <a:solidFill>
+                            <a:srgbClr val="FFFFFF"/>
+                          </a:solidFill>
+                          <a:latin typeface="Inter"/>
+                        </a:defRPr>
+                      </a:pPr>
+                      <a:r>
+                        <a:rPr>
+                          <a:latin typeface="Inter"/>
+                        </a:rPr>
+                        <a:t>As of</a:t>
+                      </a:r>
+                    </a:p>
+                  </a:txBody>
+                  <a:tcPr marL="54864" marR="54864" marT="27432" marB="27432" anchor="ctr">
+                    <a:solidFill>
+                      <a:srgbClr val="0D1117"/>
+                    </a:solidFill>
+                  </a:tcPr>
+                </a:tc>
+                <a:tc>
+                  <a:txBody>
+                    <a:bodyPr/>
+                    <a:lstStyle/>
+                    <a:p>
+                      <a:pPr>
+                        <a:defRPr sz="750" b="1">
+                          <a:solidFill>
+                            <a:srgbClr val="FFFFFF"/>
+                          </a:solidFill>
+                          <a:latin typeface="Inter"/>
+                        </a:defRPr>
+                      </a:pPr>
+                      <a:r>
+                        <a:rPr>
+                          <a:latin typeface="Inter"/>
+                        </a:rPr>
+                        <a:t>Data scope</a:t>
+                      </a:r>
+                    </a:p>
+                  </a:txBody>
+                  <a:tcPr marL="54864" marR="54864" marT="27432" marB="27432" anchor="ctr">
+                    <a:solidFill>
+                      <a:srgbClr val="0D1117"/>
+                    </a:solidFill>
+                  </a:tcPr>
+                </a:tc>
+                <a:tc>
+                  <a:txBody>
+                    <a:bodyPr/>
+                    <a:lstStyle/>
+                    <a:p>
+                      <a:pPr>
+                        <a:defRPr sz="750" b="1">
+                          <a:solidFill>
+                            <a:srgbClr val="FFFFFF"/>
+                          </a:solidFill>
+                          <a:latin typeface="Inter"/>
+                        </a:defRPr>
+                      </a:pPr>
+                      <a:r>
+                        <a:rPr>
+                          <a:latin typeface="Inter"/>
+                        </a:rPr>
+                        <a:t>Validation</a:t>
+                      </a:r>
+                    </a:p>
+                  </a:txBody>
+                  <a:tcPr marL="54864" marR="54864" marT="27432" marB="27432" anchor="ctr">
+                    <a:solidFill>
+                      <a:srgbClr val="0D1117"/>
+                    </a:solidFill>
+                  </a:tcPr>
+                </a:tc>
+                <a:tc>
+                  <a:txBody>
+                    <a:bodyPr/>
+                    <a:lstStyle/>
+                    <a:p>
+                      <a:pPr>
+                        <a:defRPr sz="750" b="1">
+                          <a:solidFill>
+                            <a:srgbClr val="FFFFFF"/>
+                          </a:solidFill>
+                          <a:latin typeface="Inter"/>
+                        </a:defRPr>
+                      </a:pPr>
+                      <a:r>
+                        <a:rPr>
+                          <a:latin typeface="Inter"/>
+                        </a:rPr>
+                        <a:t>Digest</a:t>
                       </a:r>
                     </a:p>
                   </a:txBody>
@@ -8601,14 +9315,14 @@
                   </a:tcPr>
                 </a:tc>
               </a:tr>
-              <a:tr h="584831">
+              <a:tr h="484247">
                 <a:tc>
                   <a:txBody>
                     <a:bodyPr/>
                     <a:lstStyle/>
                     <a:p>
                       <a:pPr>
-                        <a:defRPr sz="800" b="1">
+                        <a:defRPr sz="650" b="1">
                           <a:solidFill>
                             <a:srgbClr val="0D1117"/>
                           </a:solidFill>
@@ -8635,7 +9349,7 @@
                     <a:lstStyle/>
                     <a:p>
                       <a:pPr>
-                        <a:defRPr sz="800" b="0">
+                        <a:defRPr sz="650" b="0">
                           <a:solidFill>
                             <a:srgbClr val="0D1117"/>
                           </a:solidFill>
@@ -8662,7 +9376,34 @@
                     <a:lstStyle/>
                     <a:p>
                       <a:pPr>
-                        <a:defRPr sz="800" b="0">
+                        <a:defRPr sz="650" b="0">
+                          <a:solidFill>
+                            <a:srgbClr val="0D1117"/>
+                          </a:solidFill>
+                          <a:latin typeface="Inter"/>
+                        </a:defRPr>
+                      </a:pPr>
+                      <a:r>
+                        <a:rPr>
+                          <a:latin typeface="Inter"/>
+                        </a:rPr>
+                        <a:t>gradient_tool</a:t>
+                      </a:r>
+                    </a:p>
+                  </a:txBody>
+                  <a:tcPr marL="54864" marR="54864" marT="27432" marB="27432" anchor="ctr">
+                    <a:solidFill>
+                      <a:srgbClr val="FFFFFF"/>
+                    </a:solidFill>
+                  </a:tcPr>
+                </a:tc>
+                <a:tc>
+                  <a:txBody>
+                    <a:bodyPr/>
+                    <a:lstStyle/>
+                    <a:p>
+                      <a:pPr>
+                        <a:defRPr sz="650" b="0">
                           <a:solidFill>
                             <a:srgbClr val="0D1117"/>
                           </a:solidFill>
@@ -8683,6 +9424,141 @@
                     </a:solidFill>
                   </a:tcPr>
                 </a:tc>
+                <a:tc>
+                  <a:txBody>
+                    <a:bodyPr/>
+                    <a:lstStyle/>
+                    <a:p>
+                      <a:pPr>
+                        <a:defRPr sz="650" b="0">
+                          <a:solidFill>
+                            <a:srgbClr val="0D1117"/>
+                          </a:solidFill>
+                          <a:latin typeface="Inter"/>
+                        </a:defRPr>
+                      </a:pPr>
+                      <a:r>
+                        <a:rPr>
+                          <a:latin typeface="Inter"/>
+                        </a:rPr>
+                        <a:t>illustrative sample</a:t>
+                      </a:r>
+                    </a:p>
+                  </a:txBody>
+                  <a:tcPr marL="54864" marR="54864" marT="27432" marB="27432" anchor="ctr">
+                    <a:solidFill>
+                      <a:srgbClr val="FFFFFF"/>
+                    </a:solidFill>
+                  </a:tcPr>
+                </a:tc>
+                <a:tc>
+                  <a:txBody>
+                    <a:bodyPr/>
+                    <a:lstStyle/>
+                    <a:p>
+                      <a:pPr>
+                        <a:defRPr sz="650" b="0">
+                          <a:solidFill>
+                            <a:srgbClr val="0D1117"/>
+                          </a:solidFill>
+                          <a:latin typeface="Inter"/>
+                        </a:defRPr>
+                      </a:pPr>
+                      <a:r>
+                        <a:rPr>
+                          <a:latin typeface="Inter"/>
+                        </a:rPr>
+                        <a:t>2025-12-31</a:t>
+                      </a:r>
+                    </a:p>
+                  </a:txBody>
+                  <a:tcPr marL="54864" marR="54864" marT="27432" marB="27432" anchor="ctr">
+                    <a:solidFill>
+                      <a:srgbClr val="FFFFFF"/>
+                    </a:solidFill>
+                  </a:tcPr>
+                </a:tc>
+                <a:tc>
+                  <a:txBody>
+                    <a:bodyPr/>
+                    <a:lstStyle/>
+                    <a:p>
+                      <a:pPr>
+                        <a:defRPr sz="650" b="0">
+                          <a:solidFill>
+                            <a:srgbClr val="0D1117"/>
+                          </a:solidFill>
+                          <a:latin typeface="Inter"/>
+                        </a:defRPr>
+                      </a:pPr>
+                      <a:r>
+                        <a:rPr>
+                          <a:latin typeface="Inter"/>
+                        </a:rPr>
+                        <a:t>Gradient-governed review evidence</a:t>
+                      </a:r>
+                    </a:p>
+                  </a:txBody>
+                  <a:tcPr marL="54864" marR="54864" marT="27432" marB="27432" anchor="ctr">
+                    <a:solidFill>
+                      <a:srgbClr val="FFFFFF"/>
+                    </a:solidFill>
+                  </a:tcPr>
+                </a:tc>
+                <a:tc>
+                  <a:txBody>
+                    <a:bodyPr/>
+                    <a:lstStyle/>
+                    <a:p>
+                      <a:pPr>
+                        <a:defRPr sz="650" b="0">
+                          <a:solidFill>
+                            <a:srgbClr val="0D1117"/>
+                          </a:solidFill>
+                          <a:latin typeface="Inter"/>
+                        </a:defRPr>
+                      </a:pPr>
+                      <a:r>
+                        <a:rPr>
+                          <a:latin typeface="Inter"/>
+                        </a:rPr>
+                        <a:t>passed</a:t>
+                      </a:r>
+                    </a:p>
+                  </a:txBody>
+                  <a:tcPr marL="54864" marR="54864" marT="27432" marB="27432" anchor="ctr">
+                    <a:solidFill>
+                      <a:srgbClr val="FFFFFF"/>
+                    </a:solidFill>
+                  </a:tcPr>
+                </a:tc>
+                <a:tc>
+                  <a:txBody>
+                    <a:bodyPr/>
+                    <a:lstStyle/>
+                    <a:p>
+                      <a:pPr>
+                        <a:defRPr sz="650" b="0">
+                          <a:solidFill>
+                            <a:srgbClr val="0D1117"/>
+                          </a:solidFill>
+                          <a:latin typeface="Inter"/>
+                        </a:defRPr>
+                      </a:pPr>
+                      <a:r>
+                        <a:rPr>
+                          <a:latin typeface="Inter"/>
+                        </a:rPr>
+                        <a:t>sha256:aaaaaaaaaaaaaaaaaaaaaaaaaaaaaaaaaaaaaaaaaaaaaaaaaaaaaaaaaaaaaaaa</a:t>
+                      </a:r>
+                    </a:p>
+                  </a:txBody>
+                  <a:tcPr marL="54864" marR="54864" marT="27432" marB="27432" anchor="ctr">
+                    <a:solidFill>
+                      <a:srgbClr val="FFFFFF"/>
+                    </a:solidFill>
+                  </a:tcPr>
+                </a:tc>
               </a:tr>
             </a:tbl>
           </a:graphicData>
@@ -8690,7 +9566,49 @@
       </p:graphicFrame>
       <p:sp>
         <p:nvSpPr>
-          <p:cNvPr id="9" name="Rectangle 8"/>
+          <p:cNvPr id="10" name="TextBox 9"/>
+          <p:cNvSpPr txBox="1"/>
+          <p:nvPr/>
+        </p:nvSpPr>
+        <p:spPr>
+          <a:xfrm>
+            <a:off x="640080" y="2312662"/>
+            <a:ext cx="10908792" cy="164592"/>
+          </a:xfrm>
+          <a:prstGeom prst="rect">
+            <a:avLst/>
+          </a:prstGeom>
+          <a:noFill/>
+        </p:spPr>
+        <p:txBody>
+          <a:bodyPr wrap="none" lIns="9144" rIns="9144" tIns="9144" bIns="9144" anchor="t">
+            <a:spAutoFit/>
+          </a:bodyPr>
+          <a:lstStyle/>
+          <a:p>
+            <a:pPr algn="l">
+              <a:spcAft>
+                <a:spcPts val="0"/>
+              </a:spcAft>
+              <a:defRPr sz="680" b="0">
+                <a:solidFill>
+                  <a:srgbClr val="8A94A1"/>
+                </a:solidFill>
+                <a:latin typeface="Inter"/>
+              </a:defRPr>
+            </a:pPr>
+            <a:r>
+              <a:rPr>
+                <a:latin typeface="Inter"/>
+              </a:rPr>
+              <a:t>Illustrative, Gradient Maintained — demo data, not the client's holdings or managers. All organizations, portfolios, managers and results in this public example are illustrative.</a:t>
+            </a:r>
+          </a:p>
+        </p:txBody>
+      </p:sp>
+      <p:sp>
+        <p:nvSpPr>
+          <p:cNvPr id="11" name="Rectangle 10"/>
           <p:cNvSpPr/>
           <p:nvPr/>
         </p:nvSpPr>
@@ -8739,7 +9657,7 @@
       </p:sp>
       <p:sp>
         <p:nvSpPr>
-          <p:cNvPr id="10" name="Rectangle 9"/>
+          <p:cNvPr id="12" name="Rectangle 11"/>
           <p:cNvSpPr/>
           <p:nvPr/>
         </p:nvSpPr>
@@ -8788,7 +9706,7 @@
       </p:sp>
       <p:sp>
         <p:nvSpPr>
-          <p:cNvPr id="11" name="TextBox 10"/>
+          <p:cNvPr id="13" name="TextBox 12"/>
           <p:cNvSpPr txBox="1"/>
           <p:nvPr/>
         </p:nvSpPr>
@@ -8830,7 +9748,7 @@
       </p:sp>
       <p:sp>
         <p:nvSpPr>
-          <p:cNvPr id="12" name="TextBox 11"/>
+          <p:cNvPr id="14" name="TextBox 13"/>
           <p:cNvSpPr txBox="1"/>
           <p:nvPr/>
         </p:nvSpPr>
@@ -8872,7 +9790,7 @@
       </p:sp>
       <p:sp>
         <p:nvSpPr>
-          <p:cNvPr id="13" name="Rectangle 12"/>
+          <p:cNvPr id="15" name="Rectangle 14"/>
           <p:cNvSpPr/>
           <p:nvPr/>
         </p:nvSpPr>
@@ -8921,7 +9839,7 @@
       </p:sp>
       <p:sp>
         <p:nvSpPr>
-          <p:cNvPr id="14" name="Rectangle 13"/>
+          <p:cNvPr id="16" name="Rectangle 15"/>
           <p:cNvSpPr/>
           <p:nvPr/>
         </p:nvSpPr>
@@ -8970,7 +9888,7 @@
       </p:sp>
       <p:sp>
         <p:nvSpPr>
-          <p:cNvPr id="15" name="TextBox 14"/>
+          <p:cNvPr id="17" name="TextBox 16"/>
           <p:cNvSpPr txBox="1"/>
           <p:nvPr/>
         </p:nvSpPr>
@@ -9012,7 +9930,7 @@
       </p:sp>
       <p:sp>
         <p:nvSpPr>
-          <p:cNvPr id="16" name="TextBox 15"/>
+          <p:cNvPr id="18" name="TextBox 17"/>
           <p:cNvSpPr txBox="1"/>
           <p:nvPr/>
         </p:nvSpPr>
@@ -9054,7 +9972,7 @@
       </p:sp>
       <p:sp>
         <p:nvSpPr>
-          <p:cNvPr id="17" name="Rectangle 16"/>
+          <p:cNvPr id="19" name="Rectangle 18"/>
           <p:cNvSpPr/>
           <p:nvPr/>
         </p:nvSpPr>
@@ -9103,7 +10021,7 @@
       </p:sp>
       <p:sp>
         <p:nvSpPr>
-          <p:cNvPr id="18" name="TextBox 17"/>
+          <p:cNvPr id="20" name="TextBox 19"/>
           <p:cNvSpPr txBox="1"/>
           <p:nvPr/>
         </p:nvSpPr>
@@ -9145,7 +10063,7 @@
       </p:sp>
       <p:sp>
         <p:nvSpPr>
-          <p:cNvPr id="19" name="TextBox 18"/>
+          <p:cNvPr id="21" name="TextBox 20"/>
           <p:cNvSpPr txBox="1"/>
           <p:nvPr/>
         </p:nvSpPr>
@@ -9180,14 +10098,14 @@
               <a:rPr>
                 <a:latin typeface="Inter"/>
               </a:rPr>
-              <a:t>Confidential — prepared for internal investment use · Data as of 2025-12-31</a:t>
-            </a:r>
-          </a:p>
-        </p:txBody>
-      </p:sp>
-      <p:sp>
-        <p:nvSpPr>
-          <p:cNvPr id="20" name="TextBox 19"/>
+              <a:t>Confidential — manager selection review · Data as of 2025-12-31</a:t>
+            </a:r>
+          </a:p>
+        </p:txBody>
+      </p:sp>
+      <p:sp>
+        <p:nvSpPr>
+          <p:cNvPr id="22" name="TextBox 21"/>
           <p:cNvSpPr txBox="1"/>
           <p:nvPr/>
         </p:nvSpPr>

--- a/plugins/gradient-cio/assets/examples/gradient-idd-manager-portfolio-fit.pptx
+++ b/plugins/gradient-cio/assets/examples/gradient-idd-manager-portfolio-fit.pptx
@@ -514,7 +514,7 @@
           </a:p>
           <a:p>
             <a:r>
-              <a:t>Observation: Comparative metrics are unavailable [S1]. Why it matters: No ranking is supportable. Uncertainty: Missing evidence may differ by manager. What would change the view: A governed comparison result.</a:t>
+              <a:t>Observation: No comparison metrics were returned for the four candidates [S1]. Why it matters: Without them, no ranking of the candidates is supportable. Uncertainty: The missing evidence may differ by manager. What would change the view: Comparison results for each candidate.</a:t>
             </a:r>
           </a:p>
         </p:txBody>
@@ -589,7 +589,7 @@
           </a:p>
           <a:p>
             <a:r>
-              <a:t>Observation: Relative evidence is unavailable [S1]. Why it matters: Benchmark-relative behavior is unknown. Uncertainty: Capture may vary by window. What would change the view: A governed relative-return result.</a:t>
+              <a:t>Observation: Benchmark-relative returns were not returned for any candidate [S1]. Why it matters: Behavior against the mandate benchmark is unknown. Uncertainty: Up and down capture may vary by window. What would change the view: Benchmark-relative results for each candidate.</a:t>
             </a:r>
           </a:p>
         </p:txBody>
@@ -664,7 +664,7 @@
           </a:p>
           <a:p>
             <a:r>
-              <a:t>Observation: Robustness evidence is unavailable [S1]. Why it matters: Persistence cannot be assessed. Uncertainty: Results may depend on dates. What would change the view: Governed window tests.</a:t>
+              <a:t>Observation: Persistence and correlation tests were not returned [S1]. Why it matters: Whether results repeat across periods cannot be assessed. Uncertainty: Results may depend on the dates chosen. What would change the view: Tests across several date windows.</a:t>
             </a:r>
           </a:p>
         </p:txBody>
@@ -3222,7 +3222,7 @@
               <a:rPr>
                 <a:latin typeface="Inter"/>
               </a:rPr>
-              <a:t>EVIDENCE</a:t>
+              <a:t>PREPARED FOR</a:t>
             </a:r>
           </a:p>
         </p:txBody>
@@ -3264,7 +3264,7 @@
               <a:rPr>
                 <a:latin typeface="Inter"/>
               </a:rPr>
-              <a:t>Governed return series</a:t>
+              <a:t>Investment Committee</a:t>
             </a:r>
           </a:p>
         </p:txBody>
@@ -3306,7 +3306,7 @@
               <a:rPr>
                 <a:latin typeface="Inter"/>
               </a:rPr>
-              <a:t>AUDIENCE</a:t>
+              <a:t>DATA AS OF</a:t>
             </a:r>
           </a:p>
         </p:txBody>
@@ -3348,7 +3348,7 @@
               <a:rPr>
                 <a:latin typeface="Inter"/>
               </a:rPr>
-              <a:t>Investment Committee</a:t>
+              <a:t>2025-12-31</a:t>
             </a:r>
           </a:p>
         </p:txBody>
@@ -3356,307 +3356,6 @@
       <p:sp>
         <p:nvSpPr>
           <p:cNvPr id="15" name="TextBox 14"/>
-          <p:cNvSpPr txBox="1"/>
-          <p:nvPr/>
-        </p:nvSpPr>
-        <p:spPr>
-          <a:xfrm>
-            <a:off x="5852160" y="4937759"/>
-            <a:ext cx="4709160" cy="182880"/>
-          </a:xfrm>
-          <a:prstGeom prst="rect">
-            <a:avLst/>
-          </a:prstGeom>
-          <a:noFill/>
-        </p:spPr>
-        <p:txBody>
-          <a:bodyPr wrap="none" lIns="9144" rIns="9144" tIns="9144" bIns="9144" anchor="t">
-            <a:spAutoFit/>
-          </a:bodyPr>
-          <a:lstStyle/>
-          <a:p>
-            <a:pPr algn="l">
-              <a:spcAft>
-                <a:spcPts val="0"/>
-              </a:spcAft>
-              <a:defRPr sz="700" b="1">
-                <a:solidFill>
-                  <a:srgbClr val="8A94A1"/>
-                </a:solidFill>
-                <a:latin typeface="Inter"/>
-              </a:defRPr>
-            </a:pPr>
-            <a:r>
-              <a:rPr>
-                <a:latin typeface="Inter"/>
-              </a:rPr>
-              <a:t>DATA AS OF</a:t>
-            </a:r>
-          </a:p>
-        </p:txBody>
-      </p:sp>
-      <p:sp>
-        <p:nvSpPr>
-          <p:cNvPr id="16" name="TextBox 15"/>
-          <p:cNvSpPr txBox="1"/>
-          <p:nvPr/>
-        </p:nvSpPr>
-        <p:spPr>
-          <a:xfrm>
-            <a:off x="5852160" y="5129783"/>
-            <a:ext cx="4709160" cy="310896"/>
-          </a:xfrm>
-          <a:prstGeom prst="rect">
-            <a:avLst/>
-          </a:prstGeom>
-          <a:noFill/>
-        </p:spPr>
-        <p:txBody>
-          <a:bodyPr wrap="none" lIns="9144" rIns="9144" tIns="9144" bIns="9144" anchor="t">
-            <a:spAutoFit/>
-          </a:bodyPr>
-          <a:lstStyle/>
-          <a:p>
-            <a:pPr algn="l">
-              <a:spcAft>
-                <a:spcPts val="0"/>
-              </a:spcAft>
-              <a:defRPr sz="1000" b="1">
-                <a:solidFill>
-                  <a:srgbClr val="FFFFFF"/>
-                </a:solidFill>
-                <a:latin typeface="Inter"/>
-              </a:defRPr>
-            </a:pPr>
-            <a:r>
-              <a:rPr>
-                <a:latin typeface="Inter"/>
-              </a:rPr>
-              <a:t>2025-12-31</a:t>
-            </a:r>
-          </a:p>
-        </p:txBody>
-      </p:sp>
-      <p:sp>
-        <p:nvSpPr>
-          <p:cNvPr id="17" name="Rectangle 16"/>
-          <p:cNvSpPr/>
-          <p:nvPr/>
-        </p:nvSpPr>
-        <p:spPr>
-          <a:xfrm>
-            <a:off x="685800" y="5687568"/>
-            <a:ext cx="3337560" cy="530352"/>
-          </a:xfrm>
-          <a:prstGeom prst="rect">
-            <a:avLst/>
-          </a:prstGeom>
-          <a:solidFill>
-            <a:srgbClr val="9AA5B1"/>
-          </a:solidFill>
-          <a:ln>
-            <a:solidFill>
-              <a:srgbClr val="9AA5B1"/>
-            </a:solidFill>
-          </a:ln>
-        </p:spPr>
-        <p:style>
-          <a:lnRef idx="1">
-            <a:schemeClr val="accent1"/>
-          </a:lnRef>
-          <a:fillRef idx="3">
-            <a:schemeClr val="accent1"/>
-          </a:fillRef>
-          <a:effectRef idx="2">
-            <a:schemeClr val="accent1"/>
-          </a:effectRef>
-          <a:fontRef idx="minor">
-            <a:schemeClr val="lt1"/>
-          </a:fontRef>
-        </p:style>
-        <p:txBody>
-          <a:bodyPr rtlCol="0" anchor="ctr"/>
-          <a:lstStyle/>
-          <a:p>
-            <a:pPr algn="ctr">
-              <a:defRPr>
-                <a:latin typeface="Inter"/>
-              </a:defRPr>
-            </a:pPr>
-          </a:p>
-        </p:txBody>
-      </p:sp>
-      <p:sp>
-        <p:nvSpPr>
-          <p:cNvPr id="18" name="TextBox 17"/>
-          <p:cNvSpPr txBox="1"/>
-          <p:nvPr/>
-        </p:nvSpPr>
-        <p:spPr>
-          <a:xfrm>
-            <a:off x="822960" y="5760720"/>
-            <a:ext cx="3063240" cy="128016"/>
-          </a:xfrm>
-          <a:prstGeom prst="rect">
-            <a:avLst/>
-          </a:prstGeom>
-          <a:noFill/>
-        </p:spPr>
-        <p:txBody>
-          <a:bodyPr wrap="none" lIns="9144" rIns="9144" tIns="9144" bIns="9144" anchor="t">
-            <a:spAutoFit/>
-          </a:bodyPr>
-          <a:lstStyle/>
-          <a:p>
-            <a:pPr algn="l">
-              <a:spcAft>
-                <a:spcPts val="0"/>
-              </a:spcAft>
-              <a:defRPr sz="620" b="1">
-                <a:solidFill>
-                  <a:srgbClr val="0D1117"/>
-                </a:solidFill>
-                <a:latin typeface="Inter"/>
-              </a:defRPr>
-            </a:pPr>
-            <a:r>
-              <a:rPr>
-                <a:latin typeface="Inter"/>
-              </a:rPr>
-              <a:t>OVERALL VIEW</a:t>
-            </a:r>
-          </a:p>
-        </p:txBody>
-      </p:sp>
-      <p:sp>
-        <p:nvSpPr>
-          <p:cNvPr id="19" name="TextBox 18"/>
-          <p:cNvSpPr txBox="1"/>
-          <p:nvPr/>
-        </p:nvSpPr>
-        <p:spPr>
-          <a:xfrm>
-            <a:off x="822960" y="5916168"/>
-            <a:ext cx="3063240" cy="182880"/>
-          </a:xfrm>
-          <a:prstGeom prst="rect">
-            <a:avLst/>
-          </a:prstGeom>
-          <a:noFill/>
-        </p:spPr>
-        <p:txBody>
-          <a:bodyPr wrap="none" lIns="9144" rIns="9144" tIns="9144" bIns="9144" anchor="t">
-            <a:spAutoFit/>
-          </a:bodyPr>
-          <a:lstStyle/>
-          <a:p>
-            <a:pPr algn="l">
-              <a:spcAft>
-                <a:spcPts val="0"/>
-              </a:spcAft>
-              <a:defRPr sz="900" b="1">
-                <a:solidFill>
-                  <a:srgbClr val="0D1117"/>
-                </a:solidFill>
-                <a:latin typeface="Inter"/>
-              </a:defRPr>
-            </a:pPr>
-            <a:r>
-              <a:rPr>
-                <a:latin typeface="Inter"/>
-              </a:rPr>
-              <a:t>Insufficient governed evidence</a:t>
-            </a:r>
-          </a:p>
-        </p:txBody>
-      </p:sp>
-      <p:sp>
-        <p:nvSpPr>
-          <p:cNvPr id="20" name="TextBox 19"/>
-          <p:cNvSpPr txBox="1"/>
-          <p:nvPr/>
-        </p:nvSpPr>
-        <p:spPr>
-          <a:xfrm>
-            <a:off x="4297680" y="5733288"/>
-            <a:ext cx="3108960" cy="164592"/>
-          </a:xfrm>
-          <a:prstGeom prst="rect">
-            <a:avLst/>
-          </a:prstGeom>
-          <a:noFill/>
-        </p:spPr>
-        <p:txBody>
-          <a:bodyPr wrap="none" lIns="9144" rIns="9144" tIns="9144" bIns="9144" anchor="t">
-            <a:spAutoFit/>
-          </a:bodyPr>
-          <a:lstStyle/>
-          <a:p>
-            <a:pPr algn="l">
-              <a:spcAft>
-                <a:spcPts val="0"/>
-              </a:spcAft>
-              <a:defRPr sz="650" b="1">
-                <a:solidFill>
-                  <a:srgbClr val="8A94A1"/>
-                </a:solidFill>
-                <a:latin typeface="Inter"/>
-              </a:defRPr>
-            </a:pPr>
-            <a:r>
-              <a:rPr>
-                <a:latin typeface="Inter"/>
-              </a:rPr>
-              <a:t>SCOPE REVIEWED</a:t>
-            </a:r>
-          </a:p>
-        </p:txBody>
-      </p:sp>
-      <p:sp>
-        <p:nvSpPr>
-          <p:cNvPr id="21" name="TextBox 20"/>
-          <p:cNvSpPr txBox="1"/>
-          <p:nvPr/>
-        </p:nvSpPr>
-        <p:spPr>
-          <a:xfrm>
-            <a:off x="4297680" y="5934456"/>
-            <a:ext cx="3108960" cy="201168"/>
-          </a:xfrm>
-          <a:prstGeom prst="rect">
-            <a:avLst/>
-          </a:prstGeom>
-          <a:noFill/>
-        </p:spPr>
-        <p:txBody>
-          <a:bodyPr wrap="none" lIns="9144" rIns="9144" tIns="9144" bIns="9144" anchor="t">
-            <a:spAutoFit/>
-          </a:bodyPr>
-          <a:lstStyle/>
-          <a:p>
-            <a:pPr algn="l">
-              <a:spcAft>
-                <a:spcPts val="0"/>
-              </a:spcAft>
-              <a:defRPr sz="800" b="1">
-                <a:solidFill>
-                  <a:srgbClr val="FFFFFF"/>
-                </a:solidFill>
-                <a:latin typeface="Inter"/>
-              </a:defRPr>
-            </a:pPr>
-            <a:r>
-              <a:rPr>
-                <a:latin typeface="Inter"/>
-              </a:rPr>
-              <a:t>1 of 4 · Partial</a:t>
-            </a:r>
-          </a:p>
-        </p:txBody>
-      </p:sp>
-      <p:sp>
-        <p:nvSpPr>
-          <p:cNvPr id="22" name="TextBox 21"/>
           <p:cNvSpPr txBox="1"/>
           <p:nvPr/>
         </p:nvSpPr>
@@ -3698,7 +3397,7 @@
       </p:sp>
       <p:sp>
         <p:nvSpPr>
-          <p:cNvPr id="23" name="TextBox 22"/>
+          <p:cNvPr id="16" name="TextBox 15"/>
           <p:cNvSpPr txBox="1"/>
           <p:nvPr/>
         </p:nvSpPr>
@@ -3740,7 +3439,7 @@
       </p:sp>
       <p:sp>
         <p:nvSpPr>
-          <p:cNvPr id="24" name="TextBox 23"/>
+          <p:cNvPr id="17" name="TextBox 16"/>
           <p:cNvSpPr txBox="1"/>
           <p:nvPr/>
         </p:nvSpPr>
@@ -3856,7 +3555,7 @@
         <p:spPr>
           <a:xfrm>
             <a:off x="640080" y="329184"/>
-            <a:ext cx="5303520" cy="182880"/>
+            <a:ext cx="9875520" cy="182880"/>
           </a:xfrm>
           <a:prstGeom prst="rect">
             <a:avLst/>
@@ -3897,48 +3596,6 @@
         </p:nvSpPr>
         <p:spPr>
           <a:xfrm>
-            <a:off x="5897880" y="310896"/>
-            <a:ext cx="4800600" cy="256032"/>
-          </a:xfrm>
-          <a:prstGeom prst="rect">
-            <a:avLst/>
-          </a:prstGeom>
-          <a:noFill/>
-        </p:spPr>
-        <p:txBody>
-          <a:bodyPr wrap="none" lIns="9144" rIns="9144" tIns="9144" bIns="9144" anchor="t">
-            <a:spAutoFit/>
-          </a:bodyPr>
-          <a:lstStyle/>
-          <a:p>
-            <a:pPr algn="r">
-              <a:spcAft>
-                <a:spcPts val="0"/>
-              </a:spcAft>
-              <a:defRPr sz="680" b="1">
-                <a:solidFill>
-                  <a:srgbClr val="4F6B00"/>
-                </a:solidFill>
-                <a:latin typeface="Inter"/>
-              </a:defRPr>
-            </a:pPr>
-            <a:r>
-              <a:rPr>
-                <a:latin typeface="Inter"/>
-              </a:rPr>
-              <a:t>Illustrative, Gradient Maintained — demo data, not the client's holdings or managers</a:t>
-            </a:r>
-          </a:p>
-        </p:txBody>
-      </p:sp>
-      <p:sp>
-        <p:nvSpPr>
-          <p:cNvPr id="5" name="TextBox 4"/>
-          <p:cNvSpPr txBox="1"/>
-          <p:nvPr/>
-        </p:nvSpPr>
-        <p:spPr>
-          <a:xfrm>
             <a:off x="640080" y="566928"/>
             <a:ext cx="10058400" cy="530352"/>
           </a:xfrm>
@@ -3975,7 +3632,7 @@
       </p:sp>
       <p:sp>
         <p:nvSpPr>
-          <p:cNvPr id="6" name="Rectangle 5"/>
+          <p:cNvPr id="5" name="Rectangle 4"/>
           <p:cNvSpPr/>
           <p:nvPr/>
         </p:nvSpPr>
@@ -4024,7 +3681,7 @@
       </p:sp>
       <p:sp>
         <p:nvSpPr>
-          <p:cNvPr id="7" name="Rectangle 6"/>
+          <p:cNvPr id="6" name="Rectangle 5"/>
           <p:cNvSpPr/>
           <p:nvPr/>
         </p:nvSpPr>
@@ -4073,7 +3730,7 @@
       </p:sp>
       <p:sp>
         <p:nvSpPr>
-          <p:cNvPr id="8" name="TextBox 7"/>
+          <p:cNvPr id="7" name="TextBox 6"/>
           <p:cNvSpPr txBox="1"/>
           <p:nvPr/>
         </p:nvSpPr>
@@ -4115,14 +3772,14 @@
       </p:sp>
       <p:sp>
         <p:nvSpPr>
-          <p:cNvPr id="9" name="Rectangle 8"/>
+          <p:cNvPr id="8" name="Rectangle 7"/>
           <p:cNvSpPr/>
           <p:nvPr/>
         </p:nvSpPr>
         <p:spPr>
           <a:xfrm>
             <a:off x="640080" y="1325880"/>
-            <a:ext cx="10908792" cy="1557527"/>
+            <a:ext cx="10908792" cy="1709164"/>
           </a:xfrm>
           <a:prstGeom prst="rect">
             <a:avLst/>
@@ -4164,14 +3821,14 @@
       </p:sp>
       <p:sp>
         <p:nvSpPr>
-          <p:cNvPr id="10" name="Rectangle 9"/>
+          <p:cNvPr id="9" name="Rectangle 8"/>
           <p:cNvSpPr/>
           <p:nvPr/>
         </p:nvSpPr>
         <p:spPr>
           <a:xfrm>
             <a:off x="640080" y="1325880"/>
-            <a:ext cx="54864" cy="1557527"/>
+            <a:ext cx="54864" cy="1709164"/>
           </a:xfrm>
           <a:prstGeom prst="rect">
             <a:avLst/>
@@ -4213,7 +3870,7 @@
       </p:sp>
       <p:sp>
         <p:nvSpPr>
-          <p:cNvPr id="11" name="TextBox 10"/>
+          <p:cNvPr id="10" name="TextBox 9"/>
           <p:cNvSpPr txBox="1"/>
           <p:nvPr/>
         </p:nvSpPr>
@@ -4255,14 +3912,14 @@
       </p:sp>
       <p:sp>
         <p:nvSpPr>
-          <p:cNvPr id="12" name="TextBox 11"/>
+          <p:cNvPr id="11" name="TextBox 10"/>
           <p:cNvSpPr txBox="1"/>
           <p:nvPr/>
         </p:nvSpPr>
         <p:spPr>
           <a:xfrm>
             <a:off x="804671" y="1719072"/>
-            <a:ext cx="10616184" cy="1072895"/>
+            <a:ext cx="10616184" cy="1224532"/>
           </a:xfrm>
           <a:prstGeom prst="rect">
             <a:avLst/>
@@ -4290,21 +3947,21 @@
               <a:rPr>
                 <a:latin typeface="Inter"/>
               </a:rPr>
-              <a:t>Observation: Coverage is incomplete [S1]. Why it matters: Comparison is constrained. Uncertainty: Missing reads may change results. What would change the view: Governed comparison evidence.</a:t>
-            </a:r>
-          </a:p>
-        </p:txBody>
-      </p:sp>
-      <p:sp>
-        <p:nvSpPr>
-          <p:cNvPr id="13" name="Rectangle 12"/>
+              <a:t>Observation: Only one of four portfolio-fit inputs is available [S1]. Why it matters: Diversification benefit cannot be estimated. Uncertainty: Missing series may change the correlation. What would change the view: Return series for the manager and the portfolio.</a:t>
+            </a:r>
+          </a:p>
+        </p:txBody>
+      </p:sp>
+      <p:sp>
+        <p:nvSpPr>
+          <p:cNvPr id="12" name="Rectangle 11"/>
           <p:cNvSpPr/>
           <p:nvPr/>
         </p:nvSpPr>
         <p:spPr>
           <a:xfrm>
-            <a:off x="640080" y="2993136"/>
-            <a:ext cx="10908792" cy="1557527"/>
+            <a:off x="640080" y="3144772"/>
+            <a:ext cx="10908792" cy="1468712"/>
           </a:xfrm>
           <a:prstGeom prst="rect">
             <a:avLst/>
@@ -4346,14 +4003,14 @@
       </p:sp>
       <p:sp>
         <p:nvSpPr>
-          <p:cNvPr id="14" name="Rectangle 13"/>
+          <p:cNvPr id="13" name="Rectangle 12"/>
           <p:cNvSpPr/>
           <p:nvPr/>
         </p:nvSpPr>
         <p:spPr>
           <a:xfrm>
-            <a:off x="640080" y="2993136"/>
-            <a:ext cx="54864" cy="1557527"/>
+            <a:off x="640080" y="3144772"/>
+            <a:ext cx="54864" cy="1468712"/>
           </a:xfrm>
           <a:prstGeom prst="rect">
             <a:avLst/>
@@ -4395,13 +4052,13 @@
       </p:sp>
       <p:sp>
         <p:nvSpPr>
-          <p:cNvPr id="15" name="TextBox 14"/>
+          <p:cNvPr id="14" name="TextBox 13"/>
           <p:cNvSpPr txBox="1"/>
           <p:nvPr/>
         </p:nvSpPr>
         <p:spPr>
           <a:xfrm>
-            <a:off x="804671" y="3102864"/>
+            <a:off x="804671" y="3254500"/>
             <a:ext cx="10616184" cy="228600"/>
           </a:xfrm>
           <a:prstGeom prst="rect">
@@ -4437,14 +4094,14 @@
       </p:sp>
       <p:sp>
         <p:nvSpPr>
-          <p:cNvPr id="16" name="TextBox 15"/>
+          <p:cNvPr id="15" name="TextBox 14"/>
           <p:cNvSpPr txBox="1"/>
           <p:nvPr/>
         </p:nvSpPr>
         <p:spPr>
           <a:xfrm>
-            <a:off x="804671" y="3386328"/>
-            <a:ext cx="10616184" cy="1072895"/>
+            <a:off x="804671" y="3537964"/>
+            <a:ext cx="10616184" cy="984080"/>
           </a:xfrm>
           <a:prstGeom prst="rect">
             <a:avLst/>
@@ -4472,21 +4129,21 @@
               <a:rPr>
                 <a:latin typeface="Inter"/>
               </a:rPr>
-              <a:t>Observation: Benchmark matching is advisory [S1]. Why it matters: Relative evidence is bounded. Uncertainty: Mandate fit is unconfirmed. What would change the view: Canonical matches.</a:t>
-            </a:r>
-          </a:p>
-        </p:txBody>
-      </p:sp>
-      <p:sp>
-        <p:nvSpPr>
-          <p:cNvPr id="17" name="Rectangle 16"/>
+              <a:t>Observation: The benchmark match is suggested, not confirmed [S1]. Why it matters: Fit is judged against the sleeve benchmark. Uncertainty: Mandate fit is unconfirmed. What would change the view: A confirmed benchmark mapping.</a:t>
+            </a:r>
+          </a:p>
+        </p:txBody>
+      </p:sp>
+      <p:sp>
+        <p:nvSpPr>
+          <p:cNvPr id="16" name="Rectangle 15"/>
           <p:cNvSpPr/>
           <p:nvPr/>
         </p:nvSpPr>
         <p:spPr>
           <a:xfrm>
-            <a:off x="640080" y="4660392"/>
-            <a:ext cx="10908792" cy="1557527"/>
+            <a:off x="640080" y="4723213"/>
+            <a:ext cx="10908792" cy="1494706"/>
           </a:xfrm>
           <a:prstGeom prst="rect">
             <a:avLst/>
@@ -4528,14 +4185,14 @@
       </p:sp>
       <p:sp>
         <p:nvSpPr>
-          <p:cNvPr id="18" name="Rectangle 17"/>
+          <p:cNvPr id="17" name="Rectangle 16"/>
           <p:cNvSpPr/>
           <p:nvPr/>
         </p:nvSpPr>
         <p:spPr>
           <a:xfrm>
-            <a:off x="640080" y="4660392"/>
-            <a:ext cx="54864" cy="1557527"/>
+            <a:off x="640080" y="4723213"/>
+            <a:ext cx="54864" cy="1494706"/>
           </a:xfrm>
           <a:prstGeom prst="rect">
             <a:avLst/>
@@ -4577,13 +4234,13 @@
       </p:sp>
       <p:sp>
         <p:nvSpPr>
-          <p:cNvPr id="19" name="TextBox 18"/>
+          <p:cNvPr id="18" name="TextBox 17"/>
           <p:cNvSpPr txBox="1"/>
           <p:nvPr/>
         </p:nvSpPr>
         <p:spPr>
           <a:xfrm>
-            <a:off x="804671" y="4770120"/>
+            <a:off x="804671" y="4832941"/>
             <a:ext cx="10616184" cy="228600"/>
           </a:xfrm>
           <a:prstGeom prst="rect">
@@ -4619,14 +4276,14 @@
       </p:sp>
       <p:sp>
         <p:nvSpPr>
-          <p:cNvPr id="20" name="TextBox 19"/>
+          <p:cNvPr id="19" name="TextBox 18"/>
           <p:cNvSpPr txBox="1"/>
           <p:nvPr/>
         </p:nvSpPr>
         <p:spPr>
           <a:xfrm>
-            <a:off x="804671" y="5053584"/>
-            <a:ext cx="10616184" cy="1072896"/>
+            <a:off x="804671" y="5116405"/>
+            <a:ext cx="10616184" cy="1010074"/>
           </a:xfrm>
           <a:prstGeom prst="rect">
             <a:avLst/>
@@ -4654,14 +4311,14 @@
               <a:rPr>
                 <a:latin typeface="Inter"/>
               </a:rPr>
-              <a:t>Observation: Robustness is unavailable [S1]. Why it matters: Persistence is unknown. Uncertainty: Window sensitivity is untested. What would change the view: Governed robustness results.</a:t>
-            </a:r>
-          </a:p>
-        </p:txBody>
-      </p:sp>
-      <p:sp>
-        <p:nvSpPr>
-          <p:cNvPr id="21" name="Rectangle 20"/>
+              <a:t>Observation: Fit across market regimes was not tested [S1]. Why it matters: A manager can diversify in one regime and not another. Uncertainty: Results may depend on the window. What would change the view: A regime-split analysis.</a:t>
+            </a:r>
+          </a:p>
+        </p:txBody>
+      </p:sp>
+      <p:sp>
+        <p:nvSpPr>
+          <p:cNvPr id="20" name="Rectangle 19"/>
           <p:cNvSpPr/>
           <p:nvPr/>
         </p:nvSpPr>
@@ -4710,7 +4367,7 @@
       </p:sp>
       <p:sp>
         <p:nvSpPr>
-          <p:cNvPr id="22" name="TextBox 21"/>
+          <p:cNvPr id="21" name="TextBox 20"/>
           <p:cNvSpPr txBox="1"/>
           <p:nvPr/>
         </p:nvSpPr>
@@ -4752,7 +4409,7 @@
       </p:sp>
       <p:sp>
         <p:nvSpPr>
-          <p:cNvPr id="23" name="TextBox 22"/>
+          <p:cNvPr id="22" name="TextBox 21"/>
           <p:cNvSpPr txBox="1"/>
           <p:nvPr/>
         </p:nvSpPr>
@@ -4794,7 +4451,7 @@
       </p:sp>
       <p:sp>
         <p:nvSpPr>
-          <p:cNvPr id="24" name="TextBox 23"/>
+          <p:cNvPr id="23" name="TextBox 22"/>
           <p:cNvSpPr txBox="1"/>
           <p:nvPr/>
         </p:nvSpPr>
@@ -4910,7 +4567,7 @@
         <p:spPr>
           <a:xfrm>
             <a:off x="640080" y="329184"/>
-            <a:ext cx="5303520" cy="182880"/>
+            <a:ext cx="9875520" cy="182880"/>
           </a:xfrm>
           <a:prstGeom prst="rect">
             <a:avLst/>
@@ -4938,7 +4595,7 @@
               <a:rPr>
                 <a:latin typeface="Inter"/>
               </a:rPr>
-              <a:t>BENCHMARK IDENTITY REMAINS ADVISORY FOR THE REVIEWED CANDIDATES</a:t>
+              <a:t>BENCHMARK MATCHES ARE SUGGESTED, NOT YET CONFIRMED</a:t>
             </a:r>
           </a:p>
         </p:txBody>
@@ -4946,48 +4603,6 @@
       <p:sp>
         <p:nvSpPr>
           <p:cNvPr id="4" name="TextBox 3"/>
-          <p:cNvSpPr txBox="1"/>
-          <p:nvPr/>
-        </p:nvSpPr>
-        <p:spPr>
-          <a:xfrm>
-            <a:off x="5897880" y="310896"/>
-            <a:ext cx="4800600" cy="256032"/>
-          </a:xfrm>
-          <a:prstGeom prst="rect">
-            <a:avLst/>
-          </a:prstGeom>
-          <a:noFill/>
-        </p:spPr>
-        <p:txBody>
-          <a:bodyPr wrap="none" lIns="9144" rIns="9144" tIns="9144" bIns="9144" anchor="t">
-            <a:spAutoFit/>
-          </a:bodyPr>
-          <a:lstStyle/>
-          <a:p>
-            <a:pPr algn="r">
-              <a:spcAft>
-                <a:spcPts val="0"/>
-              </a:spcAft>
-              <a:defRPr sz="680" b="1">
-                <a:solidFill>
-                  <a:srgbClr val="4F6B00"/>
-                </a:solidFill>
-                <a:latin typeface="Inter"/>
-              </a:defRPr>
-            </a:pPr>
-            <a:r>
-              <a:rPr>
-                <a:latin typeface="Inter"/>
-              </a:rPr>
-              <a:t>Illustrative, Gradient Maintained — demo data, not the client's holdings or managers</a:t>
-            </a:r>
-          </a:p>
-        </p:txBody>
-      </p:sp>
-      <p:sp>
-        <p:nvSpPr>
-          <p:cNvPr id="5" name="TextBox 4"/>
           <p:cNvSpPr txBox="1"/>
           <p:nvPr/>
         </p:nvSpPr>
@@ -5029,7 +4644,7 @@
       </p:sp>
       <p:sp>
         <p:nvSpPr>
-          <p:cNvPr id="6" name="Rectangle 5"/>
+          <p:cNvPr id="5" name="Rectangle 4"/>
           <p:cNvSpPr/>
           <p:nvPr/>
         </p:nvSpPr>
@@ -5078,7 +4693,7 @@
       </p:sp>
       <p:sp>
         <p:nvSpPr>
-          <p:cNvPr id="7" name="Rectangle 6"/>
+          <p:cNvPr id="6" name="Rectangle 5"/>
           <p:cNvSpPr/>
           <p:nvPr/>
         </p:nvSpPr>
@@ -5127,7 +4742,7 @@
       </p:sp>
       <p:sp>
         <p:nvSpPr>
-          <p:cNvPr id="8" name="TextBox 7"/>
+          <p:cNvPr id="7" name="TextBox 6"/>
           <p:cNvSpPr txBox="1"/>
           <p:nvPr/>
         </p:nvSpPr>
@@ -5169,7 +4784,7 @@
       </p:sp>
       <p:graphicFrame>
         <p:nvGraphicFramePr>
-          <p:cNvPr id="9" name="Table 8"/>
+          <p:cNvPr id="8" name="Table 7"/>
           <p:cNvGraphicFramePr>
             <a:graphicFrameLocks noGrp="1"/>
           </p:cNvGraphicFramePr>
@@ -5318,7 +4933,7 @@
                         <a:rPr>
                           <a:latin typeface="Inter"/>
                         </a:rPr>
-                        <a:t>● unavailable</a:t>
+                        <a:t>● Not available</a:t>
                       </a:r>
                     </a:p>
                   </a:txBody>
@@ -5345,7 +4960,7 @@
                         <a:rPr>
                           <a:latin typeface="Inter"/>
                         </a:rPr>
-                        <a:t>Canonical match unavailable [S1]</a:t>
+                        <a:t>Match not confirmed [S1]</a:t>
                       </a:r>
                     </a:p>
                   </a:txBody>
@@ -5362,7 +4977,7 @@
       </p:graphicFrame>
       <p:sp>
         <p:nvSpPr>
-          <p:cNvPr id="10" name="Rectangle 9"/>
+          <p:cNvPr id="9" name="Rectangle 8"/>
           <p:cNvSpPr/>
           <p:nvPr/>
         </p:nvSpPr>
@@ -5411,7 +5026,7 @@
       </p:sp>
       <p:sp>
         <p:nvSpPr>
-          <p:cNvPr id="11" name="TextBox 10"/>
+          <p:cNvPr id="10" name="TextBox 9"/>
           <p:cNvSpPr txBox="1"/>
           <p:nvPr/>
         </p:nvSpPr>
@@ -5453,7 +5068,7 @@
       </p:sp>
       <p:sp>
         <p:nvSpPr>
-          <p:cNvPr id="12" name="TextBox 11"/>
+          <p:cNvPr id="11" name="TextBox 10"/>
           <p:cNvSpPr txBox="1"/>
           <p:nvPr/>
         </p:nvSpPr>
@@ -5495,7 +5110,7 @@
       </p:sp>
       <p:sp>
         <p:nvSpPr>
-          <p:cNvPr id="13" name="TextBox 12"/>
+          <p:cNvPr id="12" name="TextBox 11"/>
           <p:cNvSpPr txBox="1"/>
           <p:nvPr/>
         </p:nvSpPr>
@@ -5611,7 +5226,7 @@
         <p:spPr>
           <a:xfrm>
             <a:off x="640080" y="329184"/>
-            <a:ext cx="5303520" cy="182880"/>
+            <a:ext cx="9875520" cy="182880"/>
           </a:xfrm>
           <a:prstGeom prst="rect">
             <a:avLst/>
@@ -5652,48 +5267,6 @@
         </p:nvSpPr>
         <p:spPr>
           <a:xfrm>
-            <a:off x="5897880" y="310896"/>
-            <a:ext cx="4800600" cy="256032"/>
-          </a:xfrm>
-          <a:prstGeom prst="rect">
-            <a:avLst/>
-          </a:prstGeom>
-          <a:noFill/>
-        </p:spPr>
-        <p:txBody>
-          <a:bodyPr wrap="none" lIns="9144" rIns="9144" tIns="9144" bIns="9144" anchor="t">
-            <a:spAutoFit/>
-          </a:bodyPr>
-          <a:lstStyle/>
-          <a:p>
-            <a:pPr algn="r">
-              <a:spcAft>
-                <a:spcPts val="0"/>
-              </a:spcAft>
-              <a:defRPr sz="680" b="1">
-                <a:solidFill>
-                  <a:srgbClr val="4F6B00"/>
-                </a:solidFill>
-                <a:latin typeface="Inter"/>
-              </a:defRPr>
-            </a:pPr>
-            <a:r>
-              <a:rPr>
-                <a:latin typeface="Inter"/>
-              </a:rPr>
-              <a:t>Illustrative, Gradient Maintained — demo data, not the client's holdings or managers</a:t>
-            </a:r>
-          </a:p>
-        </p:txBody>
-      </p:sp>
-      <p:sp>
-        <p:nvSpPr>
-          <p:cNvPr id="5" name="TextBox 4"/>
-          <p:cNvSpPr txBox="1"/>
-          <p:nvPr/>
-        </p:nvSpPr>
-        <p:spPr>
-          <a:xfrm>
             <a:off x="640080" y="566928"/>
             <a:ext cx="10058400" cy="530352"/>
           </a:xfrm>
@@ -5730,7 +5303,7 @@
       </p:sp>
       <p:sp>
         <p:nvSpPr>
-          <p:cNvPr id="6" name="Rectangle 5"/>
+          <p:cNvPr id="5" name="Rectangle 4"/>
           <p:cNvSpPr/>
           <p:nvPr/>
         </p:nvSpPr>
@@ -5779,7 +5352,7 @@
       </p:sp>
       <p:sp>
         <p:nvSpPr>
-          <p:cNvPr id="7" name="Rectangle 6"/>
+          <p:cNvPr id="6" name="Rectangle 5"/>
           <p:cNvSpPr/>
           <p:nvPr/>
         </p:nvSpPr>
@@ -5828,7 +5401,7 @@
       </p:sp>
       <p:sp>
         <p:nvSpPr>
-          <p:cNvPr id="8" name="TextBox 7"/>
+          <p:cNvPr id="7" name="TextBox 6"/>
           <p:cNvSpPr txBox="1"/>
           <p:nvPr/>
         </p:nvSpPr>
@@ -5870,14 +5443,14 @@
       </p:sp>
       <p:sp>
         <p:nvSpPr>
-          <p:cNvPr id="9" name="Rectangle 8"/>
+          <p:cNvPr id="8" name="Rectangle 7"/>
           <p:cNvSpPr/>
           <p:nvPr/>
         </p:nvSpPr>
         <p:spPr>
           <a:xfrm>
             <a:off x="640080" y="1325880"/>
-            <a:ext cx="10908792" cy="2391156"/>
+            <a:ext cx="10908792" cy="2050970"/>
           </a:xfrm>
           <a:prstGeom prst="rect">
             <a:avLst/>
@@ -5919,14 +5492,14 @@
       </p:sp>
       <p:sp>
         <p:nvSpPr>
-          <p:cNvPr id="10" name="Rectangle 9"/>
+          <p:cNvPr id="9" name="Rectangle 8"/>
           <p:cNvSpPr/>
           <p:nvPr/>
         </p:nvSpPr>
         <p:spPr>
           <a:xfrm>
             <a:off x="640080" y="1325880"/>
-            <a:ext cx="54864" cy="2391156"/>
+            <a:ext cx="54864" cy="2050970"/>
           </a:xfrm>
           <a:prstGeom prst="rect">
             <a:avLst/>
@@ -5968,7 +5541,7 @@
       </p:sp>
       <p:sp>
         <p:nvSpPr>
-          <p:cNvPr id="11" name="TextBox 10"/>
+          <p:cNvPr id="10" name="TextBox 9"/>
           <p:cNvSpPr txBox="1"/>
           <p:nvPr/>
         </p:nvSpPr>
@@ -6010,14 +5583,14 @@
       </p:sp>
       <p:sp>
         <p:nvSpPr>
-          <p:cNvPr id="12" name="TextBox 11"/>
+          <p:cNvPr id="11" name="TextBox 10"/>
           <p:cNvSpPr txBox="1"/>
           <p:nvPr/>
         </p:nvSpPr>
         <p:spPr>
           <a:xfrm>
             <a:off x="804671" y="1719072"/>
-            <a:ext cx="10616184" cy="1906523"/>
+            <a:ext cx="10616184" cy="1566338"/>
           </a:xfrm>
           <a:prstGeom prst="rect">
             <a:avLst/>
@@ -6045,21 +5618,21 @@
               <a:rPr>
                 <a:latin typeface="Inter"/>
               </a:rPr>
-              <a:t>Not available — governed comparison result missing [S1].</a:t>
-            </a:r>
-          </a:p>
-        </p:txBody>
-      </p:sp>
-      <p:sp>
-        <p:nvSpPr>
-          <p:cNvPr id="13" name="Rectangle 12"/>
+              <a:t>The comparison tool returned no results for these candidates [S1].</a:t>
+            </a:r>
+          </a:p>
+        </p:txBody>
+      </p:sp>
+      <p:sp>
+        <p:nvSpPr>
+          <p:cNvPr id="12" name="Rectangle 11"/>
           <p:cNvSpPr/>
           <p:nvPr/>
         </p:nvSpPr>
         <p:spPr>
           <a:xfrm>
-            <a:off x="640080" y="3826763"/>
-            <a:ext cx="10908792" cy="2391156"/>
+            <a:off x="640080" y="3486578"/>
+            <a:ext cx="10908792" cy="2731341"/>
           </a:xfrm>
           <a:prstGeom prst="rect">
             <a:avLst/>
@@ -6101,14 +5674,14 @@
       </p:sp>
       <p:sp>
         <p:nvSpPr>
-          <p:cNvPr id="14" name="Rectangle 13"/>
+          <p:cNvPr id="13" name="Rectangle 12"/>
           <p:cNvSpPr/>
           <p:nvPr/>
         </p:nvSpPr>
         <p:spPr>
           <a:xfrm>
-            <a:off x="640080" y="3826763"/>
-            <a:ext cx="54864" cy="2391156"/>
+            <a:off x="640080" y="3486578"/>
+            <a:ext cx="54864" cy="2731341"/>
           </a:xfrm>
           <a:prstGeom prst="rect">
             <a:avLst/>
@@ -6150,13 +5723,13 @@
       </p:sp>
       <p:sp>
         <p:nvSpPr>
-          <p:cNvPr id="15" name="TextBox 14"/>
+          <p:cNvPr id="14" name="TextBox 13"/>
           <p:cNvSpPr txBox="1"/>
           <p:nvPr/>
         </p:nvSpPr>
         <p:spPr>
           <a:xfrm>
-            <a:off x="804671" y="3936491"/>
+            <a:off x="804671" y="3596306"/>
             <a:ext cx="10616184" cy="228600"/>
           </a:xfrm>
           <a:prstGeom prst="rect">
@@ -6192,14 +5765,14 @@
       </p:sp>
       <p:sp>
         <p:nvSpPr>
-          <p:cNvPr id="16" name="TextBox 15"/>
+          <p:cNvPr id="15" name="TextBox 14"/>
           <p:cNvSpPr txBox="1"/>
           <p:nvPr/>
         </p:nvSpPr>
         <p:spPr>
           <a:xfrm>
-            <a:off x="804671" y="4219955"/>
-            <a:ext cx="10616184" cy="1906524"/>
+            <a:off x="804671" y="3879770"/>
+            <a:ext cx="10616184" cy="2246709"/>
           </a:xfrm>
           <a:prstGeom prst="rect">
             <a:avLst/>
@@ -6227,14 +5800,14 @@
               <a:rPr>
                 <a:latin typeface="Inter"/>
               </a:rPr>
-              <a:t>Observation: Comparative metrics are unavailable [S1]. Why it matters: No ranking is supportable. Uncertainty: Missing evidence may differ by manager. What would change the view: A governed comparison…</a:t>
-            </a:r>
-          </a:p>
-        </p:txBody>
-      </p:sp>
-      <p:sp>
-        <p:nvSpPr>
-          <p:cNvPr id="17" name="Rectangle 16"/>
+              <a:t>Observation: No comparison metrics were returned for the four candidates [S1]. Why it matters: Without them, no ranking of the candidates is supportable. Uncertainty: The missing evidence may…</a:t>
+            </a:r>
+          </a:p>
+        </p:txBody>
+      </p:sp>
+      <p:sp>
+        <p:nvSpPr>
+          <p:cNvPr id="16" name="Rectangle 15"/>
           <p:cNvSpPr/>
           <p:nvPr/>
         </p:nvSpPr>
@@ -6283,7 +5856,7 @@
       </p:sp>
       <p:sp>
         <p:nvSpPr>
-          <p:cNvPr id="18" name="TextBox 17"/>
+          <p:cNvPr id="17" name="TextBox 16"/>
           <p:cNvSpPr txBox="1"/>
           <p:nvPr/>
         </p:nvSpPr>
@@ -6325,7 +5898,7 @@
       </p:sp>
       <p:sp>
         <p:nvSpPr>
-          <p:cNvPr id="19" name="TextBox 18"/>
+          <p:cNvPr id="18" name="TextBox 17"/>
           <p:cNvSpPr txBox="1"/>
           <p:nvPr/>
         </p:nvSpPr>
@@ -6367,7 +5940,7 @@
       </p:sp>
       <p:sp>
         <p:nvSpPr>
-          <p:cNvPr id="20" name="TextBox 19"/>
+          <p:cNvPr id="19" name="TextBox 18"/>
           <p:cNvSpPr txBox="1"/>
           <p:nvPr/>
         </p:nvSpPr>
@@ -6483,7 +6056,7 @@
         <p:spPr>
           <a:xfrm>
             <a:off x="640080" y="329184"/>
-            <a:ext cx="5303520" cy="182880"/>
+            <a:ext cx="9875520" cy="182880"/>
           </a:xfrm>
           <a:prstGeom prst="rect">
             <a:avLst/>
@@ -6524,48 +6097,6 @@
         </p:nvSpPr>
         <p:spPr>
           <a:xfrm>
-            <a:off x="5897880" y="310896"/>
-            <a:ext cx="4800600" cy="256032"/>
-          </a:xfrm>
-          <a:prstGeom prst="rect">
-            <a:avLst/>
-          </a:prstGeom>
-          <a:noFill/>
-        </p:spPr>
-        <p:txBody>
-          <a:bodyPr wrap="none" lIns="9144" rIns="9144" tIns="9144" bIns="9144" anchor="t">
-            <a:spAutoFit/>
-          </a:bodyPr>
-          <a:lstStyle/>
-          <a:p>
-            <a:pPr algn="r">
-              <a:spcAft>
-                <a:spcPts val="0"/>
-              </a:spcAft>
-              <a:defRPr sz="680" b="1">
-                <a:solidFill>
-                  <a:srgbClr val="4F6B00"/>
-                </a:solidFill>
-                <a:latin typeface="Inter"/>
-              </a:defRPr>
-            </a:pPr>
-            <a:r>
-              <a:rPr>
-                <a:latin typeface="Inter"/>
-              </a:rPr>
-              <a:t>Illustrative, Gradient Maintained — demo data, not the client's holdings or managers</a:t>
-            </a:r>
-          </a:p>
-        </p:txBody>
-      </p:sp>
-      <p:sp>
-        <p:nvSpPr>
-          <p:cNvPr id="5" name="TextBox 4"/>
-          <p:cNvSpPr txBox="1"/>
-          <p:nvPr/>
-        </p:nvSpPr>
-        <p:spPr>
-          <a:xfrm>
             <a:off x="640080" y="566928"/>
             <a:ext cx="10058400" cy="530352"/>
           </a:xfrm>
@@ -6602,7 +6133,7 @@
       </p:sp>
       <p:sp>
         <p:nvSpPr>
-          <p:cNvPr id="6" name="Rectangle 5"/>
+          <p:cNvPr id="5" name="Rectangle 4"/>
           <p:cNvSpPr/>
           <p:nvPr/>
         </p:nvSpPr>
@@ -6651,7 +6182,7 @@
       </p:sp>
       <p:sp>
         <p:nvSpPr>
-          <p:cNvPr id="7" name="Rectangle 6"/>
+          <p:cNvPr id="6" name="Rectangle 5"/>
           <p:cNvSpPr/>
           <p:nvPr/>
         </p:nvSpPr>
@@ -6700,7 +6231,7 @@
       </p:sp>
       <p:sp>
         <p:nvSpPr>
-          <p:cNvPr id="8" name="TextBox 7"/>
+          <p:cNvPr id="7" name="TextBox 6"/>
           <p:cNvSpPr txBox="1"/>
           <p:nvPr/>
         </p:nvSpPr>
@@ -6742,14 +6273,14 @@
       </p:sp>
       <p:sp>
         <p:nvSpPr>
-          <p:cNvPr id="9" name="Rectangle 8"/>
+          <p:cNvPr id="8" name="Rectangle 7"/>
           <p:cNvSpPr/>
           <p:nvPr/>
         </p:nvSpPr>
         <p:spPr>
           <a:xfrm>
             <a:off x="640080" y="1325880"/>
-            <a:ext cx="10908792" cy="2374035"/>
+            <a:ext cx="10908792" cy="2055208"/>
           </a:xfrm>
           <a:prstGeom prst="rect">
             <a:avLst/>
@@ -6791,14 +6322,14 @@
       </p:sp>
       <p:sp>
         <p:nvSpPr>
-          <p:cNvPr id="10" name="Rectangle 9"/>
+          <p:cNvPr id="9" name="Rectangle 8"/>
           <p:cNvSpPr/>
           <p:nvPr/>
         </p:nvSpPr>
         <p:spPr>
           <a:xfrm>
             <a:off x="640080" y="1325880"/>
-            <a:ext cx="54864" cy="2374035"/>
+            <a:ext cx="54864" cy="2055208"/>
           </a:xfrm>
           <a:prstGeom prst="rect">
             <a:avLst/>
@@ -6840,7 +6371,7 @@
       </p:sp>
       <p:sp>
         <p:nvSpPr>
-          <p:cNvPr id="11" name="TextBox 10"/>
+          <p:cNvPr id="10" name="TextBox 9"/>
           <p:cNvSpPr txBox="1"/>
           <p:nvPr/>
         </p:nvSpPr>
@@ -6882,14 +6413,14 @@
       </p:sp>
       <p:sp>
         <p:nvSpPr>
-          <p:cNvPr id="12" name="TextBox 11"/>
+          <p:cNvPr id="11" name="TextBox 10"/>
           <p:cNvSpPr txBox="1"/>
           <p:nvPr/>
         </p:nvSpPr>
         <p:spPr>
           <a:xfrm>
             <a:off x="804671" y="1719072"/>
-            <a:ext cx="10616184" cy="1889403"/>
+            <a:ext cx="10616184" cy="1570576"/>
           </a:xfrm>
           <a:prstGeom prst="rect">
             <a:avLst/>
@@ -6917,21 +6448,21 @@
               <a:rPr>
                 <a:latin typeface="Inter"/>
               </a:rPr>
-              <a:t>Not available — relative-return result missing [S1].</a:t>
-            </a:r>
-          </a:p>
-        </p:txBody>
-      </p:sp>
-      <p:sp>
-        <p:nvSpPr>
-          <p:cNvPr id="13" name="Rectangle 12"/>
+              <a:t>Benchmark-relative returns were not returned [S1].</a:t>
+            </a:r>
+          </a:p>
+        </p:txBody>
+      </p:sp>
+      <p:sp>
+        <p:nvSpPr>
+          <p:cNvPr id="12" name="Rectangle 11"/>
           <p:cNvSpPr/>
           <p:nvPr/>
         </p:nvSpPr>
         <p:spPr>
           <a:xfrm>
-            <a:off x="640080" y="3809643"/>
-            <a:ext cx="10908792" cy="2408276"/>
+            <a:off x="640080" y="3490816"/>
+            <a:ext cx="10908792" cy="2727103"/>
           </a:xfrm>
           <a:prstGeom prst="rect">
             <a:avLst/>
@@ -6973,14 +6504,14 @@
       </p:sp>
       <p:sp>
         <p:nvSpPr>
-          <p:cNvPr id="14" name="Rectangle 13"/>
+          <p:cNvPr id="13" name="Rectangle 12"/>
           <p:cNvSpPr/>
           <p:nvPr/>
         </p:nvSpPr>
         <p:spPr>
           <a:xfrm>
-            <a:off x="640080" y="3809643"/>
-            <a:ext cx="54864" cy="2408276"/>
+            <a:off x="640080" y="3490816"/>
+            <a:ext cx="54864" cy="2727103"/>
           </a:xfrm>
           <a:prstGeom prst="rect">
             <a:avLst/>
@@ -7022,13 +6553,13 @@
       </p:sp>
       <p:sp>
         <p:nvSpPr>
-          <p:cNvPr id="15" name="TextBox 14"/>
+          <p:cNvPr id="14" name="TextBox 13"/>
           <p:cNvSpPr txBox="1"/>
           <p:nvPr/>
         </p:nvSpPr>
         <p:spPr>
           <a:xfrm>
-            <a:off x="804671" y="3919371"/>
+            <a:off x="804671" y="3600544"/>
             <a:ext cx="10616184" cy="228600"/>
           </a:xfrm>
           <a:prstGeom prst="rect">
@@ -7064,14 +6595,14 @@
       </p:sp>
       <p:sp>
         <p:nvSpPr>
-          <p:cNvPr id="16" name="TextBox 15"/>
+          <p:cNvPr id="15" name="TextBox 14"/>
           <p:cNvSpPr txBox="1"/>
           <p:nvPr/>
         </p:nvSpPr>
         <p:spPr>
           <a:xfrm>
-            <a:off x="804671" y="4202835"/>
-            <a:ext cx="10616184" cy="1923644"/>
+            <a:off x="804671" y="3884008"/>
+            <a:ext cx="10616184" cy="2242471"/>
           </a:xfrm>
           <a:prstGeom prst="rect">
             <a:avLst/>
@@ -7099,14 +6630,14 @@
               <a:rPr>
                 <a:latin typeface="Inter"/>
               </a:rPr>
-              <a:t>Observation: Relative evidence is unavailable [S1]. Why it matters: Benchmark-relative behavior is unknown. Uncertainty: Capture may vary by window. What would change the view: A governed relative-return result.</a:t>
-            </a:r>
-          </a:p>
-        </p:txBody>
-      </p:sp>
-      <p:sp>
-        <p:nvSpPr>
-          <p:cNvPr id="17" name="Rectangle 16"/>
+              <a:t>Observation: Benchmark-relative returns were not returned for any candidate [S1]. Why it matters: Behavior against the mandate benchmark is unknown. Uncertainty: Up and down capture may vary by…</a:t>
+            </a:r>
+          </a:p>
+        </p:txBody>
+      </p:sp>
+      <p:sp>
+        <p:nvSpPr>
+          <p:cNvPr id="16" name="Rectangle 15"/>
           <p:cNvSpPr/>
           <p:nvPr/>
         </p:nvSpPr>
@@ -7155,7 +6686,7 @@
       </p:sp>
       <p:sp>
         <p:nvSpPr>
-          <p:cNvPr id="18" name="TextBox 17"/>
+          <p:cNvPr id="17" name="TextBox 16"/>
           <p:cNvSpPr txBox="1"/>
           <p:nvPr/>
         </p:nvSpPr>
@@ -7197,7 +6728,7 @@
       </p:sp>
       <p:sp>
         <p:nvSpPr>
-          <p:cNvPr id="19" name="TextBox 18"/>
+          <p:cNvPr id="18" name="TextBox 17"/>
           <p:cNvSpPr txBox="1"/>
           <p:nvPr/>
         </p:nvSpPr>
@@ -7239,7 +6770,7 @@
       </p:sp>
       <p:sp>
         <p:nvSpPr>
-          <p:cNvPr id="20" name="TextBox 19"/>
+          <p:cNvPr id="19" name="TextBox 18"/>
           <p:cNvSpPr txBox="1"/>
           <p:nvPr/>
         </p:nvSpPr>
@@ -7355,7 +6886,7 @@
         <p:spPr>
           <a:xfrm>
             <a:off x="640080" y="329184"/>
-            <a:ext cx="5303520" cy="182880"/>
+            <a:ext cx="9875520" cy="182880"/>
           </a:xfrm>
           <a:prstGeom prst="rect">
             <a:avLst/>
@@ -7396,48 +6927,6 @@
         </p:nvSpPr>
         <p:spPr>
           <a:xfrm>
-            <a:off x="5897880" y="310896"/>
-            <a:ext cx="4800600" cy="256032"/>
-          </a:xfrm>
-          <a:prstGeom prst="rect">
-            <a:avLst/>
-          </a:prstGeom>
-          <a:noFill/>
-        </p:spPr>
-        <p:txBody>
-          <a:bodyPr wrap="none" lIns="9144" rIns="9144" tIns="9144" bIns="9144" anchor="t">
-            <a:spAutoFit/>
-          </a:bodyPr>
-          <a:lstStyle/>
-          <a:p>
-            <a:pPr algn="r">
-              <a:spcAft>
-                <a:spcPts val="0"/>
-              </a:spcAft>
-              <a:defRPr sz="680" b="1">
-                <a:solidFill>
-                  <a:srgbClr val="4F6B00"/>
-                </a:solidFill>
-                <a:latin typeface="Inter"/>
-              </a:defRPr>
-            </a:pPr>
-            <a:r>
-              <a:rPr>
-                <a:latin typeface="Inter"/>
-              </a:rPr>
-              <a:t>Illustrative, Gradient Maintained — demo data, not the client's holdings or managers</a:t>
-            </a:r>
-          </a:p>
-        </p:txBody>
-      </p:sp>
-      <p:sp>
-        <p:nvSpPr>
-          <p:cNvPr id="5" name="TextBox 4"/>
-          <p:cNvSpPr txBox="1"/>
-          <p:nvPr/>
-        </p:nvSpPr>
-        <p:spPr>
-          <a:xfrm>
             <a:off x="640080" y="566928"/>
             <a:ext cx="10058400" cy="530352"/>
           </a:xfrm>
@@ -7474,7 +6963,7 @@
       </p:sp>
       <p:sp>
         <p:nvSpPr>
-          <p:cNvPr id="6" name="Rectangle 5"/>
+          <p:cNvPr id="5" name="Rectangle 4"/>
           <p:cNvSpPr/>
           <p:nvPr/>
         </p:nvSpPr>
@@ -7523,7 +7012,7 @@
       </p:sp>
       <p:sp>
         <p:nvSpPr>
-          <p:cNvPr id="7" name="Rectangle 6"/>
+          <p:cNvPr id="6" name="Rectangle 5"/>
           <p:cNvSpPr/>
           <p:nvPr/>
         </p:nvSpPr>
@@ -7572,7 +7061,7 @@
       </p:sp>
       <p:sp>
         <p:nvSpPr>
-          <p:cNvPr id="8" name="TextBox 7"/>
+          <p:cNvPr id="7" name="TextBox 6"/>
           <p:cNvSpPr txBox="1"/>
           <p:nvPr/>
         </p:nvSpPr>
@@ -7614,14 +7103,14 @@
       </p:sp>
       <p:sp>
         <p:nvSpPr>
-          <p:cNvPr id="9" name="Rectangle 8"/>
+          <p:cNvPr id="8" name="Rectangle 7"/>
           <p:cNvSpPr/>
           <p:nvPr/>
         </p:nvSpPr>
         <p:spPr>
           <a:xfrm>
             <a:off x="640080" y="1325880"/>
-            <a:ext cx="10908792" cy="2391156"/>
+            <a:ext cx="10908792" cy="2125472"/>
           </a:xfrm>
           <a:prstGeom prst="rect">
             <a:avLst/>
@@ -7663,14 +7152,14 @@
       </p:sp>
       <p:sp>
         <p:nvSpPr>
-          <p:cNvPr id="10" name="Rectangle 9"/>
+          <p:cNvPr id="9" name="Rectangle 8"/>
           <p:cNvSpPr/>
           <p:nvPr/>
         </p:nvSpPr>
         <p:spPr>
           <a:xfrm>
             <a:off x="640080" y="1325880"/>
-            <a:ext cx="54864" cy="2391156"/>
+            <a:ext cx="54864" cy="2125472"/>
           </a:xfrm>
           <a:prstGeom prst="rect">
             <a:avLst/>
@@ -7712,7 +7201,7 @@
       </p:sp>
       <p:sp>
         <p:nvSpPr>
-          <p:cNvPr id="11" name="TextBox 10"/>
+          <p:cNvPr id="10" name="TextBox 9"/>
           <p:cNvSpPr txBox="1"/>
           <p:nvPr/>
         </p:nvSpPr>
@@ -7754,14 +7243,14 @@
       </p:sp>
       <p:sp>
         <p:nvSpPr>
-          <p:cNvPr id="12" name="TextBox 11"/>
+          <p:cNvPr id="11" name="TextBox 10"/>
           <p:cNvSpPr txBox="1"/>
           <p:nvPr/>
         </p:nvSpPr>
         <p:spPr>
           <a:xfrm>
             <a:off x="804671" y="1719072"/>
-            <a:ext cx="10616184" cy="1906523"/>
+            <a:ext cx="10616184" cy="1640840"/>
           </a:xfrm>
           <a:prstGeom prst="rect">
             <a:avLst/>
@@ -7789,21 +7278,21 @@
               <a:rPr>
                 <a:latin typeface="Inter"/>
               </a:rPr>
-              <a:t>Not available — governed robustness and correlation results missing [S1].</a:t>
-            </a:r>
-          </a:p>
-        </p:txBody>
-      </p:sp>
-      <p:sp>
-        <p:nvSpPr>
-          <p:cNvPr id="13" name="Rectangle 12"/>
+              <a:t>Persistence and correlation tests were not returned [S1].</a:t>
+            </a:r>
+          </a:p>
+        </p:txBody>
+      </p:sp>
+      <p:sp>
+        <p:nvSpPr>
+          <p:cNvPr id="12" name="Rectangle 11"/>
           <p:cNvSpPr/>
           <p:nvPr/>
         </p:nvSpPr>
         <p:spPr>
           <a:xfrm>
-            <a:off x="640080" y="3826763"/>
-            <a:ext cx="10908792" cy="2391156"/>
+            <a:off x="640080" y="3561080"/>
+            <a:ext cx="10908792" cy="2656840"/>
           </a:xfrm>
           <a:prstGeom prst="rect">
             <a:avLst/>
@@ -7845,14 +7334,14 @@
       </p:sp>
       <p:sp>
         <p:nvSpPr>
-          <p:cNvPr id="14" name="Rectangle 13"/>
+          <p:cNvPr id="13" name="Rectangle 12"/>
           <p:cNvSpPr/>
           <p:nvPr/>
         </p:nvSpPr>
         <p:spPr>
           <a:xfrm>
-            <a:off x="640080" y="3826763"/>
-            <a:ext cx="54864" cy="2391156"/>
+            <a:off x="640080" y="3561080"/>
+            <a:ext cx="54864" cy="2656840"/>
           </a:xfrm>
           <a:prstGeom prst="rect">
             <a:avLst/>
@@ -7894,13 +7383,13 @@
       </p:sp>
       <p:sp>
         <p:nvSpPr>
-          <p:cNvPr id="15" name="TextBox 14"/>
+          <p:cNvPr id="14" name="TextBox 13"/>
           <p:cNvSpPr txBox="1"/>
           <p:nvPr/>
         </p:nvSpPr>
         <p:spPr>
           <a:xfrm>
-            <a:off x="804671" y="3936491"/>
+            <a:off x="804671" y="3670808"/>
             <a:ext cx="10616184" cy="228600"/>
           </a:xfrm>
           <a:prstGeom prst="rect">
@@ -7936,14 +7425,14 @@
       </p:sp>
       <p:sp>
         <p:nvSpPr>
-          <p:cNvPr id="16" name="TextBox 15"/>
+          <p:cNvPr id="15" name="TextBox 14"/>
           <p:cNvSpPr txBox="1"/>
           <p:nvPr/>
         </p:nvSpPr>
         <p:spPr>
           <a:xfrm>
-            <a:off x="804671" y="4219955"/>
-            <a:ext cx="10616184" cy="1906524"/>
+            <a:off x="804671" y="3954272"/>
+            <a:ext cx="10616184" cy="2172208"/>
           </a:xfrm>
           <a:prstGeom prst="rect">
             <a:avLst/>
@@ -7971,14 +7460,14 @@
               <a:rPr>
                 <a:latin typeface="Inter"/>
               </a:rPr>
-              <a:t>Observation: Robustness evidence is unavailable [S1]. Why it matters: Persistence cannot be assessed. Uncertainty: Results may depend on dates. What would change the view: Governed window tests.</a:t>
-            </a:r>
-          </a:p>
-        </p:txBody>
-      </p:sp>
-      <p:sp>
-        <p:nvSpPr>
-          <p:cNvPr id="17" name="Rectangle 16"/>
+              <a:t>Observation: Persistence and correlation tests were not returned [S1]. Why it matters: Whether results repeat across periods cannot be assessed. Uncertainty: Results may depend on the dates chosen…</a:t>
+            </a:r>
+          </a:p>
+        </p:txBody>
+      </p:sp>
+      <p:sp>
+        <p:nvSpPr>
+          <p:cNvPr id="16" name="Rectangle 15"/>
           <p:cNvSpPr/>
           <p:nvPr/>
         </p:nvSpPr>
@@ -8027,7 +7516,7 @@
       </p:sp>
       <p:sp>
         <p:nvSpPr>
-          <p:cNvPr id="18" name="TextBox 17"/>
+          <p:cNvPr id="17" name="TextBox 16"/>
           <p:cNvSpPr txBox="1"/>
           <p:nvPr/>
         </p:nvSpPr>
@@ -8069,7 +7558,7 @@
       </p:sp>
       <p:sp>
         <p:nvSpPr>
-          <p:cNvPr id="19" name="TextBox 18"/>
+          <p:cNvPr id="18" name="TextBox 17"/>
           <p:cNvSpPr txBox="1"/>
           <p:nvPr/>
         </p:nvSpPr>
@@ -8111,7 +7600,7 @@
       </p:sp>
       <p:sp>
         <p:nvSpPr>
-          <p:cNvPr id="20" name="TextBox 19"/>
+          <p:cNvPr id="19" name="TextBox 18"/>
           <p:cNvSpPr txBox="1"/>
           <p:nvPr/>
         </p:nvSpPr>
@@ -8227,7 +7716,7 @@
         <p:spPr>
           <a:xfrm>
             <a:off x="640080" y="329184"/>
-            <a:ext cx="5303520" cy="182880"/>
+            <a:ext cx="9875520" cy="182880"/>
           </a:xfrm>
           <a:prstGeom prst="rect">
             <a:avLst/>
@@ -8255,7 +7744,7 @@
               <a:rPr>
                 <a:latin typeface="Inter"/>
               </a:rPr>
-              <a:t>ONE GOVERNED EVIDENCE REQUEST REMAINS</a:t>
+              <a:t>ONE DATA REQUEST REMAINS</a:t>
             </a:r>
           </a:p>
         </p:txBody>
@@ -8263,48 +7752,6 @@
       <p:sp>
         <p:nvSpPr>
           <p:cNvPr id="4" name="TextBox 3"/>
-          <p:cNvSpPr txBox="1"/>
-          <p:nvPr/>
-        </p:nvSpPr>
-        <p:spPr>
-          <a:xfrm>
-            <a:off x="5897880" y="310896"/>
-            <a:ext cx="4800600" cy="256032"/>
-          </a:xfrm>
-          <a:prstGeom prst="rect">
-            <a:avLst/>
-          </a:prstGeom>
-          <a:noFill/>
-        </p:spPr>
-        <p:txBody>
-          <a:bodyPr wrap="none" lIns="9144" rIns="9144" tIns="9144" bIns="9144" anchor="t">
-            <a:spAutoFit/>
-          </a:bodyPr>
-          <a:lstStyle/>
-          <a:p>
-            <a:pPr algn="r">
-              <a:spcAft>
-                <a:spcPts val="0"/>
-              </a:spcAft>
-              <a:defRPr sz="680" b="1">
-                <a:solidFill>
-                  <a:srgbClr val="4F6B00"/>
-                </a:solidFill>
-                <a:latin typeface="Inter"/>
-              </a:defRPr>
-            </a:pPr>
-            <a:r>
-              <a:rPr>
-                <a:latin typeface="Inter"/>
-              </a:rPr>
-              <a:t>Illustrative, Gradient Maintained — demo data, not the client's holdings or managers</a:t>
-            </a:r>
-          </a:p>
-        </p:txBody>
-      </p:sp>
-      <p:sp>
-        <p:nvSpPr>
-          <p:cNvPr id="5" name="TextBox 4"/>
           <p:cNvSpPr txBox="1"/>
           <p:nvPr/>
         </p:nvSpPr>
@@ -8346,7 +7793,7 @@
       </p:sp>
       <p:sp>
         <p:nvSpPr>
-          <p:cNvPr id="6" name="Rectangle 5"/>
+          <p:cNvPr id="5" name="Rectangle 4"/>
           <p:cNvSpPr/>
           <p:nvPr/>
         </p:nvSpPr>
@@ -8395,7 +7842,7 @@
       </p:sp>
       <p:sp>
         <p:nvSpPr>
-          <p:cNvPr id="7" name="Rectangle 6"/>
+          <p:cNvPr id="6" name="Rectangle 5"/>
           <p:cNvSpPr/>
           <p:nvPr/>
         </p:nvSpPr>
@@ -8444,7 +7891,7 @@
       </p:sp>
       <p:sp>
         <p:nvSpPr>
-          <p:cNvPr id="8" name="TextBox 7"/>
+          <p:cNvPr id="7" name="TextBox 6"/>
           <p:cNvSpPr txBox="1"/>
           <p:nvPr/>
         </p:nvSpPr>
@@ -8486,7 +7933,7 @@
       </p:sp>
       <p:sp>
         <p:nvSpPr>
-          <p:cNvPr id="9" name="TextBox 8"/>
+          <p:cNvPr id="8" name="TextBox 7"/>
           <p:cNvSpPr txBox="1"/>
           <p:nvPr/>
         </p:nvSpPr>
@@ -8521,7 +7968,7 @@
               <a:rPr>
                 <a:latin typeface="Inter"/>
               </a:rPr>
-              <a:t>01  Return canonical benchmark and comparison evidence.</a:t>
+              <a:t>01  Confirm the benchmark and return the comparison results.</a:t>
             </a:r>
             <a:br/>
             <a:r>
@@ -8535,7 +7982,7 @@
       </p:sp>
       <p:sp>
         <p:nvSpPr>
-          <p:cNvPr id="10" name="Rectangle 9"/>
+          <p:cNvPr id="9" name="Rectangle 8"/>
           <p:cNvSpPr/>
           <p:nvPr/>
         </p:nvSpPr>
@@ -8584,7 +8031,7 @@
       </p:sp>
       <p:sp>
         <p:nvSpPr>
-          <p:cNvPr id="11" name="TextBox 10"/>
+          <p:cNvPr id="10" name="TextBox 9"/>
           <p:cNvSpPr txBox="1"/>
           <p:nvPr/>
         </p:nvSpPr>
@@ -8626,7 +8073,7 @@
       </p:sp>
       <p:sp>
         <p:nvSpPr>
-          <p:cNvPr id="12" name="TextBox 11"/>
+          <p:cNvPr id="11" name="TextBox 10"/>
           <p:cNvSpPr txBox="1"/>
           <p:nvPr/>
         </p:nvSpPr>
@@ -8668,7 +8115,7 @@
       </p:sp>
       <p:sp>
         <p:nvSpPr>
-          <p:cNvPr id="13" name="TextBox 12"/>
+          <p:cNvPr id="12" name="TextBox 11"/>
           <p:cNvSpPr txBox="1"/>
           <p:nvPr/>
         </p:nvSpPr>
@@ -8784,7 +8231,7 @@
         <p:spPr>
           <a:xfrm>
             <a:off x="640080" y="329184"/>
-            <a:ext cx="5303520" cy="182880"/>
+            <a:ext cx="9875520" cy="182880"/>
           </a:xfrm>
           <a:prstGeom prst="rect">
             <a:avLst/>
@@ -8825,48 +8272,6 @@
         </p:nvSpPr>
         <p:spPr>
           <a:xfrm>
-            <a:off x="5897880" y="310896"/>
-            <a:ext cx="4800600" cy="256032"/>
-          </a:xfrm>
-          <a:prstGeom prst="rect">
-            <a:avLst/>
-          </a:prstGeom>
-          <a:noFill/>
-        </p:spPr>
-        <p:txBody>
-          <a:bodyPr wrap="none" lIns="9144" rIns="9144" tIns="9144" bIns="9144" anchor="t">
-            <a:spAutoFit/>
-          </a:bodyPr>
-          <a:lstStyle/>
-          <a:p>
-            <a:pPr algn="r">
-              <a:spcAft>
-                <a:spcPts val="0"/>
-              </a:spcAft>
-              <a:defRPr sz="680" b="1">
-                <a:solidFill>
-                  <a:srgbClr val="4F6B00"/>
-                </a:solidFill>
-                <a:latin typeface="Inter"/>
-              </a:defRPr>
-            </a:pPr>
-            <a:r>
-              <a:rPr>
-                <a:latin typeface="Inter"/>
-              </a:rPr>
-              <a:t>Illustrative, Gradient Maintained — demo data, not the client's holdings or managers</a:t>
-            </a:r>
-          </a:p>
-        </p:txBody>
-      </p:sp>
-      <p:sp>
-        <p:nvSpPr>
-          <p:cNvPr id="5" name="TextBox 4"/>
-          <p:cNvSpPr txBox="1"/>
-          <p:nvPr/>
-        </p:nvSpPr>
-        <p:spPr>
-          <a:xfrm>
             <a:off x="640080" y="566928"/>
             <a:ext cx="10058400" cy="530352"/>
           </a:xfrm>
@@ -8903,7 +8308,7 @@
       </p:sp>
       <p:sp>
         <p:nvSpPr>
-          <p:cNvPr id="6" name="Rectangle 5"/>
+          <p:cNvPr id="5" name="Rectangle 4"/>
           <p:cNvSpPr/>
           <p:nvPr/>
         </p:nvSpPr>
@@ -8952,7 +8357,7 @@
       </p:sp>
       <p:sp>
         <p:nvSpPr>
-          <p:cNvPr id="7" name="Rectangle 6"/>
+          <p:cNvPr id="6" name="Rectangle 5"/>
           <p:cNvSpPr/>
           <p:nvPr/>
         </p:nvSpPr>
@@ -9001,7 +8406,7 @@
       </p:sp>
       <p:sp>
         <p:nvSpPr>
-          <p:cNvPr id="8" name="TextBox 7"/>
+          <p:cNvPr id="7" name="TextBox 6"/>
           <p:cNvSpPr txBox="1"/>
           <p:nvPr/>
         </p:nvSpPr>
@@ -9043,7 +8448,7 @@
       </p:sp>
       <p:graphicFrame>
         <p:nvGraphicFramePr>
-          <p:cNvPr id="9" name="Table 8"/>
+          <p:cNvPr id="8" name="Table 7"/>
           <p:cNvGraphicFramePr>
             <a:graphicFrameLocks noGrp="1"/>
           </p:cNvGraphicFramePr>
@@ -9051,7 +8456,7 @@
         </p:nvGraphicFramePr>
         <p:xfrm>
           <a:off x="640080" y="1325880"/>
-          <a:ext cx="10908792" cy="968494"/>
+          <a:ext cx="10908792" cy="2189987"/>
         </p:xfrm>
         <a:graphic>
           <a:graphicData uri="http://schemas.openxmlformats.org/drawingml/2006/table">
@@ -9061,16 +8466,12 @@
               </a:tblPr>
               <a:tblGrid>
                 <a:gridCol w="2011680"/>
-                <a:gridCol w="1112139"/>
-                <a:gridCol w="1112139"/>
-                <a:gridCol w="1112139"/>
-                <a:gridCol w="1112139"/>
-                <a:gridCol w="1112139"/>
-                <a:gridCol w="1112139"/>
-                <a:gridCol w="1112139"/>
-                <a:gridCol w="1112139"/>
+                <a:gridCol w="2224278"/>
+                <a:gridCol w="2224278"/>
+                <a:gridCol w="2224278"/>
+                <a:gridCol w="2224278"/>
               </a:tblGrid>
-              <a:tr h="484247">
+              <a:tr h="1094993">
                 <a:tc>
                   <a:txBody>
                     <a:bodyPr/>
@@ -9142,7 +8543,7 @@
                         <a:rPr>
                           <a:latin typeface="Inter"/>
                         </a:rPr>
-                        <a:t>Basis</a:t>
+                        <a:t>Source</a:t>
                       </a:r>
                     </a:p>
                   </a:txBody>
@@ -9169,7 +8570,312 @@
                         <a:rPr>
                           <a:latin typeface="Inter"/>
                         </a:rPr>
-                        <a:t>Tool / view</a:t>
+                        <a:t>As of</a:t>
+                      </a:r>
+                    </a:p>
+                  </a:txBody>
+                  <a:tcPr marL="54864" marR="54864" marT="27432" marB="27432" anchor="ctr">
+                    <a:solidFill>
+                      <a:srgbClr val="0D1117"/>
+                    </a:solidFill>
+                  </a:tcPr>
+                </a:tc>
+                <a:tc>
+                  <a:txBody>
+                    <a:bodyPr/>
+                    <a:lstStyle/>
+                    <a:p>
+                      <a:pPr>
+                        <a:defRPr sz="750" b="1">
+                          <a:solidFill>
+                            <a:srgbClr val="FFFFFF"/>
+                          </a:solidFill>
+                          <a:latin typeface="Inter"/>
+                        </a:defRPr>
+                      </a:pPr>
+                      <a:r>
+                        <a:rPr>
+                          <a:latin typeface="Inter"/>
+                        </a:rPr>
+                        <a:t>Check</a:t>
+                      </a:r>
+                    </a:p>
+                  </a:txBody>
+                  <a:tcPr marL="54864" marR="54864" marT="27432" marB="27432" anchor="ctr">
+                    <a:solidFill>
+                      <a:srgbClr val="0D1117"/>
+                    </a:solidFill>
+                  </a:tcPr>
+                </a:tc>
+              </a:tr>
+              <a:tr h="1094994">
+                <a:tc>
+                  <a:txBody>
+                    <a:bodyPr/>
+                    <a:lstStyle/>
+                    <a:p>
+                      <a:pPr>
+                        <a:defRPr sz="720" b="1">
+                          <a:solidFill>
+                            <a:srgbClr val="0D1117"/>
+                          </a:solidFill>
+                          <a:latin typeface="Inter"/>
+                        </a:defRPr>
+                      </a:pPr>
+                      <a:r>
+                        <a:rPr>
+                          <a:latin typeface="Inter"/>
+                        </a:rPr>
+                        <a:t>S1</a:t>
+                      </a:r>
+                    </a:p>
+                  </a:txBody>
+                  <a:tcPr marL="54864" marR="54864" marT="27432" marB="27432" anchor="ctr">
+                    <a:solidFill>
+                      <a:srgbClr val="FFFFFF"/>
+                    </a:solidFill>
+                  </a:tcPr>
+                </a:tc>
+                <a:tc>
+                  <a:txBody>
+                    <a:bodyPr/>
+                    <a:lstStyle/>
+                    <a:p>
+                      <a:pPr>
+                        <a:defRPr sz="720" b="0">
+                          <a:solidFill>
+                            <a:srgbClr val="0D1117"/>
+                          </a:solidFill>
+                          <a:latin typeface="Inter"/>
+                        </a:defRPr>
+                      </a:pPr>
+                      <a:r>
+                        <a:rPr>
+                          <a:latin typeface="Inter"/>
+                        </a:rPr>
+                        <a:t>Connector capabilities check</a:t>
+                      </a:r>
+                    </a:p>
+                  </a:txBody>
+                  <a:tcPr marL="54864" marR="54864" marT="27432" marB="27432" anchor="ctr">
+                    <a:solidFill>
+                      <a:srgbClr val="FFFFFF"/>
+                    </a:solidFill>
+                  </a:tcPr>
+                </a:tc>
+                <a:tc>
+                  <a:txBody>
+                    <a:bodyPr/>
+                    <a:lstStyle/>
+                    <a:p>
+                      <a:pPr>
+                        <a:defRPr sz="720" b="0">
+                          <a:solidFill>
+                            <a:srgbClr val="0D1117"/>
+                          </a:solidFill>
+                          <a:latin typeface="Inter"/>
+                        </a:defRPr>
+                      </a:pPr>
+                      <a:r>
+                        <a:rPr>
+                          <a:latin typeface="Inter"/>
+                        </a:rPr>
+                        <a:t>get_gradient_capabilities</a:t>
+                      </a:r>
+                    </a:p>
+                  </a:txBody>
+                  <a:tcPr marL="54864" marR="54864" marT="27432" marB="27432" anchor="ctr">
+                    <a:solidFill>
+                      <a:srgbClr val="FFFFFF"/>
+                    </a:solidFill>
+                  </a:tcPr>
+                </a:tc>
+                <a:tc>
+                  <a:txBody>
+                    <a:bodyPr/>
+                    <a:lstStyle/>
+                    <a:p>
+                      <a:pPr>
+                        <a:defRPr sz="720" b="0">
+                          <a:solidFill>
+                            <a:srgbClr val="0D1117"/>
+                          </a:solidFill>
+                          <a:latin typeface="Inter"/>
+                        </a:defRPr>
+                      </a:pPr>
+                      <a:r>
+                        <a:rPr>
+                          <a:latin typeface="Inter"/>
+                        </a:rPr>
+                        <a:t>2025-12-31</a:t>
+                      </a:r>
+                    </a:p>
+                  </a:txBody>
+                  <a:tcPr marL="54864" marR="54864" marT="27432" marB="27432" anchor="ctr">
+                    <a:solidFill>
+                      <a:srgbClr val="FFFFFF"/>
+                    </a:solidFill>
+                  </a:tcPr>
+                </a:tc>
+                <a:tc>
+                  <a:txBody>
+                    <a:bodyPr/>
+                    <a:lstStyle/>
+                    <a:p>
+                      <a:pPr>
+                        <a:defRPr sz="720" b="1">
+                          <a:solidFill>
+                            <a:srgbClr val="C6F432"/>
+                          </a:solidFill>
+                          <a:latin typeface="Inter"/>
+                        </a:defRPr>
+                      </a:pPr>
+                      <a:r>
+                        <a:rPr>
+                          <a:latin typeface="Inter"/>
+                        </a:rPr>
+                        <a:t>● Passed</a:t>
+                      </a:r>
+                    </a:p>
+                  </a:txBody>
+                  <a:tcPr marL="54864" marR="54864" marT="27432" marB="27432" anchor="ctr">
+                    <a:solidFill>
+                      <a:srgbClr val="F5F7F9"/>
+                    </a:solidFill>
+                  </a:tcPr>
+                </a:tc>
+              </a:tr>
+            </a:tbl>
+          </a:graphicData>
+        </a:graphic>
+      </p:graphicFrame>
+      <p:sp>
+        <p:nvSpPr>
+          <p:cNvPr id="9" name="TextBox 8"/>
+          <p:cNvSpPr txBox="1"/>
+          <p:nvPr/>
+        </p:nvSpPr>
+        <p:spPr>
+          <a:xfrm>
+            <a:off x="640080" y="3534155"/>
+            <a:ext cx="10908792" cy="164592"/>
+          </a:xfrm>
+          <a:prstGeom prst="rect">
+            <a:avLst/>
+          </a:prstGeom>
+          <a:noFill/>
+        </p:spPr>
+        <p:txBody>
+          <a:bodyPr wrap="none" lIns="9144" rIns="9144" tIns="9144" bIns="9144" anchor="t">
+            <a:spAutoFit/>
+          </a:bodyPr>
+          <a:lstStyle/>
+          <a:p>
+            <a:pPr algn="l">
+              <a:spcAft>
+                <a:spcPts val="0"/>
+              </a:spcAft>
+              <a:defRPr sz="680" b="0">
+                <a:solidFill>
+                  <a:srgbClr val="8A94A1"/>
+                </a:solidFill>
+                <a:latin typeface="Inter"/>
+              </a:defRPr>
+            </a:pPr>
+            <a:r>
+              <a:rPr>
+                <a:latin typeface="Inter"/>
+              </a:rPr>
+              <a:t>Illustrative, Gradient Maintained — demo data, not the client's holdings or managers. All organizations, portfolios, managers and results in this public example are illustrative.</a:t>
+            </a:r>
+          </a:p>
+        </p:txBody>
+      </p:sp>
+      <p:sp>
+        <p:nvSpPr>
+          <p:cNvPr id="10" name="TextBox 9"/>
+          <p:cNvSpPr txBox="1"/>
+          <p:nvPr/>
+        </p:nvSpPr>
+        <p:spPr>
+          <a:xfrm>
+            <a:off x="640080" y="3826763"/>
+            <a:ext cx="10908792" cy="201168"/>
+          </a:xfrm>
+          <a:prstGeom prst="rect">
+            <a:avLst/>
+          </a:prstGeom>
+          <a:noFill/>
+        </p:spPr>
+        <p:txBody>
+          <a:bodyPr wrap="none" lIns="9144" rIns="9144" tIns="9144" bIns="9144" anchor="t">
+            <a:spAutoFit/>
+          </a:bodyPr>
+          <a:lstStyle/>
+          <a:p>
+            <a:pPr algn="l">
+              <a:spcAft>
+                <a:spcPts val="0"/>
+              </a:spcAft>
+              <a:defRPr sz="720" b="1">
+                <a:solidFill>
+                  <a:srgbClr val="4A5563"/>
+                </a:solidFill>
+                <a:latin typeface="Inter"/>
+              </a:defRPr>
+            </a:pPr>
+            <a:r>
+              <a:rPr>
+                <a:latin typeface="Inter"/>
+              </a:rPr>
+              <a:t>SOURCE AUDIT TRAIL</a:t>
+            </a:r>
+          </a:p>
+        </p:txBody>
+      </p:sp>
+      <p:graphicFrame>
+        <p:nvGraphicFramePr>
+          <p:cNvPr id="11" name="Table 10"/>
+          <p:cNvGraphicFramePr>
+            <a:graphicFrameLocks noGrp="1"/>
+          </p:cNvGraphicFramePr>
+          <p:nvPr/>
+        </p:nvGraphicFramePr>
+        <p:xfrm>
+          <a:off x="640080" y="4101083"/>
+          <a:ext cx="10908792" cy="1915667"/>
+        </p:xfrm>
+        <a:graphic>
+          <a:graphicData uri="http://schemas.openxmlformats.org/drawingml/2006/table">
+            <a:tbl>
+              <a:tblPr firstRow="1" bandRow="1">
+                <a:tableStyleId>{5C22544A-7EE6-4342-B048-85BDC9FD1C3A}</a:tableStyleId>
+              </a:tblPr>
+              <a:tblGrid>
+                <a:gridCol w="2011680"/>
+                <a:gridCol w="2965704"/>
+                <a:gridCol w="2965704"/>
+                <a:gridCol w="2965704"/>
+              </a:tblGrid>
+              <a:tr h="957833">
+                <a:tc>
+                  <a:txBody>
+                    <a:bodyPr/>
+                    <a:lstStyle/>
+                    <a:p>
+                      <a:pPr>
+                        <a:defRPr sz="750" b="1">
+                          <a:solidFill>
+                            <a:srgbClr val="FFFFFF"/>
+                          </a:solidFill>
+                          <a:latin typeface="Inter"/>
+                        </a:defRPr>
+                      </a:pPr>
+                      <a:r>
+                        <a:rPr>
+                          <a:latin typeface="Inter"/>
+                        </a:rPr>
+                        <a:t>Tag</a:t>
                       </a:r>
                     </a:p>
                   </a:txBody>
@@ -9223,61 +8929,7 @@
                         <a:rPr>
                           <a:latin typeface="Inter"/>
                         </a:rPr>
-                        <a:t>As of</a:t>
-                      </a:r>
-                    </a:p>
-                  </a:txBody>
-                  <a:tcPr marL="54864" marR="54864" marT="27432" marB="27432" anchor="ctr">
-                    <a:solidFill>
-                      <a:srgbClr val="0D1117"/>
-                    </a:solidFill>
-                  </a:tcPr>
-                </a:tc>
-                <a:tc>
-                  <a:txBody>
-                    <a:bodyPr/>
-                    <a:lstStyle/>
-                    <a:p>
-                      <a:pPr>
-                        <a:defRPr sz="750" b="1">
-                          <a:solidFill>
-                            <a:srgbClr val="FFFFFF"/>
-                          </a:solidFill>
-                          <a:latin typeface="Inter"/>
-                        </a:defRPr>
-                      </a:pPr>
-                      <a:r>
-                        <a:rPr>
-                          <a:latin typeface="Inter"/>
-                        </a:rPr>
                         <a:t>Data scope</a:t>
-                      </a:r>
-                    </a:p>
-                  </a:txBody>
-                  <a:tcPr marL="54864" marR="54864" marT="27432" marB="27432" anchor="ctr">
-                    <a:solidFill>
-                      <a:srgbClr val="0D1117"/>
-                    </a:solidFill>
-                  </a:tcPr>
-                </a:tc>
-                <a:tc>
-                  <a:txBody>
-                    <a:bodyPr/>
-                    <a:lstStyle/>
-                    <a:p>
-                      <a:pPr>
-                        <a:defRPr sz="750" b="1">
-                          <a:solidFill>
-                            <a:srgbClr val="FFFFFF"/>
-                          </a:solidFill>
-                          <a:latin typeface="Inter"/>
-                        </a:defRPr>
-                      </a:pPr>
-                      <a:r>
-                        <a:rPr>
-                          <a:latin typeface="Inter"/>
-                        </a:rPr>
-                        <a:t>Validation</a:t>
                       </a:r>
                     </a:p>
                   </a:txBody>
@@ -9315,14 +8967,14 @@
                   </a:tcPr>
                 </a:tc>
               </a:tr>
-              <a:tr h="484247">
+              <a:tr h="957834">
                 <a:tc>
                   <a:txBody>
                     <a:bodyPr/>
                     <a:lstStyle/>
                     <a:p>
                       <a:pPr>
-                        <a:defRPr sz="650" b="1">
+                        <a:defRPr sz="800" b="1">
                           <a:solidFill>
                             <a:srgbClr val="0D1117"/>
                           </a:solidFill>
@@ -9349,88 +9001,7 @@
                     <a:lstStyle/>
                     <a:p>
                       <a:pPr>
-                        <a:defRPr sz="650" b="0">
-                          <a:solidFill>
-                            <a:srgbClr val="0D1117"/>
-                          </a:solidFill>
-                          <a:latin typeface="Inter"/>
-                        </a:defRPr>
-                      </a:pPr>
-                      <a:r>
-                        <a:rPr>
-                          <a:latin typeface="Inter"/>
-                        </a:rPr>
-                        <a:t>Typed unavailable test response</a:t>
-                      </a:r>
-                    </a:p>
-                  </a:txBody>
-                  <a:tcPr marL="54864" marR="54864" marT="27432" marB="27432" anchor="ctr">
-                    <a:solidFill>
-                      <a:srgbClr val="FFFFFF"/>
-                    </a:solidFill>
-                  </a:tcPr>
-                </a:tc>
-                <a:tc>
-                  <a:txBody>
-                    <a:bodyPr/>
-                    <a:lstStyle/>
-                    <a:p>
-                      <a:pPr>
-                        <a:defRPr sz="650" b="0">
-                          <a:solidFill>
-                            <a:srgbClr val="0D1117"/>
-                          </a:solidFill>
-                          <a:latin typeface="Inter"/>
-                        </a:defRPr>
-                      </a:pPr>
-                      <a:r>
-                        <a:rPr>
-                          <a:latin typeface="Inter"/>
-                        </a:rPr>
-                        <a:t>gradient_tool</a:t>
-                      </a:r>
-                    </a:p>
-                  </a:txBody>
-                  <a:tcPr marL="54864" marR="54864" marT="27432" marB="27432" anchor="ctr">
-                    <a:solidFill>
-                      <a:srgbClr val="FFFFFF"/>
-                    </a:solidFill>
-                  </a:tcPr>
-                </a:tc>
-                <a:tc>
-                  <a:txBody>
-                    <a:bodyPr/>
-                    <a:lstStyle/>
-                    <a:p>
-                      <a:pPr>
-                        <a:defRPr sz="650" b="0">
-                          <a:solidFill>
-                            <a:srgbClr val="0D1117"/>
-                          </a:solidFill>
-                          <a:latin typeface="Inter"/>
-                        </a:defRPr>
-                      </a:pPr>
-                      <a:r>
-                        <a:rPr>
-                          <a:latin typeface="Inter"/>
-                        </a:rPr>
-                        <a:t>get_gradient_capabilities</a:t>
-                      </a:r>
-                    </a:p>
-                  </a:txBody>
-                  <a:tcPr marL="54864" marR="54864" marT="27432" marB="27432" anchor="ctr">
-                    <a:solidFill>
-                      <a:srgbClr val="FFFFFF"/>
-                    </a:solidFill>
-                  </a:tcPr>
-                </a:tc>
-                <a:tc>
-                  <a:txBody>
-                    <a:bodyPr/>
-                    <a:lstStyle/>
-                    <a:p>
-                      <a:pPr>
-                        <a:defRPr sz="650" b="0">
+                        <a:defRPr sz="800" b="0">
                           <a:solidFill>
                             <a:srgbClr val="0D1117"/>
                           </a:solidFill>
@@ -9457,7 +9028,7 @@
                     <a:lstStyle/>
                     <a:p>
                       <a:pPr>
-                        <a:defRPr sz="650" b="0">
+                        <a:defRPr sz="800" b="0">
                           <a:solidFill>
                             <a:srgbClr val="0D1117"/>
                           </a:solidFill>
@@ -9468,7 +9039,7 @@
                         <a:rPr>
                           <a:latin typeface="Inter"/>
                         </a:rPr>
-                        <a:t>2025-12-31</a:t>
+                        <a:t>Illustrative sample data</a:t>
                       </a:r>
                     </a:p>
                   </a:txBody>
@@ -9484,61 +9055,7 @@
                     <a:lstStyle/>
                     <a:p>
                       <a:pPr>
-                        <a:defRPr sz="650" b="0">
-                          <a:solidFill>
-                            <a:srgbClr val="0D1117"/>
-                          </a:solidFill>
-                          <a:latin typeface="Inter"/>
-                        </a:defRPr>
-                      </a:pPr>
-                      <a:r>
-                        <a:rPr>
-                          <a:latin typeface="Inter"/>
-                        </a:rPr>
-                        <a:t>Gradient-governed review evidence</a:t>
-                      </a:r>
-                    </a:p>
-                  </a:txBody>
-                  <a:tcPr marL="54864" marR="54864" marT="27432" marB="27432" anchor="ctr">
-                    <a:solidFill>
-                      <a:srgbClr val="FFFFFF"/>
-                    </a:solidFill>
-                  </a:tcPr>
-                </a:tc>
-                <a:tc>
-                  <a:txBody>
-                    <a:bodyPr/>
-                    <a:lstStyle/>
-                    <a:p>
-                      <a:pPr>
-                        <a:defRPr sz="650" b="0">
-                          <a:solidFill>
-                            <a:srgbClr val="0D1117"/>
-                          </a:solidFill>
-                          <a:latin typeface="Inter"/>
-                        </a:defRPr>
-                      </a:pPr>
-                      <a:r>
-                        <a:rPr>
-                          <a:latin typeface="Inter"/>
-                        </a:rPr>
-                        <a:t>passed</a:t>
-                      </a:r>
-                    </a:p>
-                  </a:txBody>
-                  <a:tcPr marL="54864" marR="54864" marT="27432" marB="27432" anchor="ctr">
-                    <a:solidFill>
-                      <a:srgbClr val="FFFFFF"/>
-                    </a:solidFill>
-                  </a:tcPr>
-                </a:tc>
-                <a:tc>
-                  <a:txBody>
-                    <a:bodyPr/>
-                    <a:lstStyle/>
-                    <a:p>
-                      <a:pPr>
-                        <a:defRPr sz="650" b="0">
+                        <a:defRPr sz="800" b="0">
                           <a:solidFill>
                             <a:srgbClr val="0D1117"/>
                           </a:solidFill>
@@ -9566,13 +9083,13 @@
       </p:graphicFrame>
       <p:sp>
         <p:nvSpPr>
-          <p:cNvPr id="10" name="TextBox 9"/>
+          <p:cNvPr id="12" name="TextBox 11"/>
           <p:cNvSpPr txBox="1"/>
           <p:nvPr/>
         </p:nvSpPr>
         <p:spPr>
           <a:xfrm>
-            <a:off x="640080" y="2312662"/>
+            <a:off x="640080" y="6035039"/>
             <a:ext cx="10908792" cy="164592"/>
           </a:xfrm>
           <a:prstGeom prst="rect">
@@ -9601,378 +9118,14 @@
               <a:rPr>
                 <a:latin typeface="Inter"/>
               </a:rPr>
-              <a:t>Illustrative, Gradient Maintained — demo data, not the client's holdings or managers. All organizations, portfolios, managers and results in this public example are illustrative.</a:t>
-            </a:r>
-          </a:p>
-        </p:txBody>
-      </p:sp>
-      <p:sp>
-        <p:nvSpPr>
-          <p:cNvPr id="11" name="Rectangle 10"/>
-          <p:cNvSpPr/>
-          <p:nvPr/>
-        </p:nvSpPr>
-        <p:spPr>
-          <a:xfrm>
-            <a:off x="640080" y="2605270"/>
-            <a:ext cx="10908792" cy="1632674"/>
-          </a:xfrm>
-          <a:prstGeom prst="rect">
-            <a:avLst/>
-          </a:prstGeom>
-          <a:solidFill>
-            <a:srgbClr val="F5F7F9"/>
-          </a:solidFill>
-          <a:ln>
-            <a:solidFill>
-              <a:srgbClr val="E3E7EC"/>
-            </a:solidFill>
-          </a:ln>
-        </p:spPr>
-        <p:style>
-          <a:lnRef idx="1">
-            <a:schemeClr val="accent1"/>
-          </a:lnRef>
-          <a:fillRef idx="3">
-            <a:schemeClr val="accent1"/>
-          </a:fillRef>
-          <a:effectRef idx="2">
-            <a:schemeClr val="accent1"/>
-          </a:effectRef>
-          <a:fontRef idx="minor">
-            <a:schemeClr val="lt1"/>
-          </a:fontRef>
-        </p:style>
-        <p:txBody>
-          <a:bodyPr rtlCol="0" anchor="ctr"/>
-          <a:lstStyle/>
-          <a:p>
-            <a:pPr algn="ctr">
-              <a:defRPr>
-                <a:latin typeface="Inter"/>
-              </a:defRPr>
-            </a:pPr>
-          </a:p>
-        </p:txBody>
-      </p:sp>
-      <p:sp>
-        <p:nvSpPr>
-          <p:cNvPr id="12" name="Rectangle 11"/>
-          <p:cNvSpPr/>
-          <p:nvPr/>
-        </p:nvSpPr>
-        <p:spPr>
-          <a:xfrm>
-            <a:off x="640080" y="2605270"/>
-            <a:ext cx="54864" cy="1632674"/>
-          </a:xfrm>
-          <a:prstGeom prst="rect">
-            <a:avLst/>
-          </a:prstGeom>
-          <a:solidFill>
-            <a:srgbClr val="0D1117"/>
-          </a:solidFill>
-          <a:ln>
-            <a:solidFill>
-              <a:srgbClr val="0D1117"/>
-            </a:solidFill>
-          </a:ln>
-        </p:spPr>
-        <p:style>
-          <a:lnRef idx="1">
-            <a:schemeClr val="accent1"/>
-          </a:lnRef>
-          <a:fillRef idx="3">
-            <a:schemeClr val="accent1"/>
-          </a:fillRef>
-          <a:effectRef idx="2">
-            <a:schemeClr val="accent1"/>
-          </a:effectRef>
-          <a:fontRef idx="minor">
-            <a:schemeClr val="lt1"/>
-          </a:fontRef>
-        </p:style>
-        <p:txBody>
-          <a:bodyPr rtlCol="0" anchor="ctr"/>
-          <a:lstStyle/>
-          <a:p>
-            <a:pPr algn="ctr">
-              <a:defRPr>
-                <a:latin typeface="Inter"/>
-              </a:defRPr>
-            </a:pPr>
-          </a:p>
-        </p:txBody>
-      </p:sp>
-      <p:sp>
-        <p:nvSpPr>
-          <p:cNvPr id="13" name="TextBox 12"/>
-          <p:cNvSpPr txBox="1"/>
-          <p:nvPr/>
-        </p:nvSpPr>
-        <p:spPr>
-          <a:xfrm>
-            <a:off x="804671" y="2714998"/>
-            <a:ext cx="10616184" cy="228600"/>
-          </a:xfrm>
-          <a:prstGeom prst="rect">
-            <a:avLst/>
-          </a:prstGeom>
-          <a:noFill/>
-        </p:spPr>
-        <p:txBody>
-          <a:bodyPr wrap="none" lIns="9144" rIns="9144" tIns="9144" bIns="9144" anchor="t">
-            <a:spAutoFit/>
-          </a:bodyPr>
-          <a:lstStyle/>
-          <a:p>
-            <a:pPr algn="l">
-              <a:spcAft>
-                <a:spcPts val="0"/>
-              </a:spcAft>
-              <a:defRPr sz="1000" b="1">
-                <a:solidFill>
-                  <a:srgbClr val="0D1117"/>
-                </a:solidFill>
-                <a:latin typeface="Inter"/>
-              </a:defRPr>
-            </a:pPr>
-            <a:r>
-              <a:rPr>
-                <a:latin typeface="Inter"/>
-              </a:rPr>
-              <a:t>Governed evidence boundary</a:t>
-            </a:r>
-          </a:p>
-        </p:txBody>
-      </p:sp>
-      <p:sp>
-        <p:nvSpPr>
-          <p:cNvPr id="14" name="TextBox 13"/>
-          <p:cNvSpPr txBox="1"/>
-          <p:nvPr/>
-        </p:nvSpPr>
-        <p:spPr>
-          <a:xfrm>
-            <a:off x="804671" y="2998462"/>
-            <a:ext cx="10616184" cy="1148042"/>
-          </a:xfrm>
-          <a:prstGeom prst="rect">
-            <a:avLst/>
-          </a:prstGeom>
-          <a:noFill/>
-        </p:spPr>
-        <p:txBody>
-          <a:bodyPr wrap="none" lIns="9144" rIns="9144" tIns="9144" bIns="9144" anchor="t">
-            <a:spAutoFit/>
-          </a:bodyPr>
-          <a:lstStyle/>
-          <a:p>
-            <a:pPr algn="l">
-              <a:spcAft>
-                <a:spcPts val="0"/>
-              </a:spcAft>
-              <a:defRPr sz="950" b="0">
-                <a:solidFill>
-                  <a:srgbClr val="4A5563"/>
-                </a:solidFill>
-                <a:latin typeface="Inter"/>
-              </a:defRPr>
-            </a:pPr>
-            <a:r>
-              <a:rPr>
-                <a:latin typeface="Inter"/>
-              </a:rPr>
-              <a:t>The report preserves the returned subject identity, benchmark mapping, observation window, units, methods, coverage status and request provenance [S1]. Missing performance, correlation, capture, simulation or regime fields remain unavailable. No local statistics, substitutions, rankings or neutral defaults are introduced.</a:t>
-            </a:r>
-          </a:p>
-        </p:txBody>
-      </p:sp>
-      <p:sp>
-        <p:nvSpPr>
-          <p:cNvPr id="15" name="Rectangle 14"/>
-          <p:cNvSpPr/>
-          <p:nvPr/>
-        </p:nvSpPr>
-        <p:spPr>
-          <a:xfrm>
-            <a:off x="640080" y="4347673"/>
-            <a:ext cx="10908792" cy="1870246"/>
-          </a:xfrm>
-          <a:prstGeom prst="rect">
-            <a:avLst/>
-          </a:prstGeom>
-          <a:solidFill>
-            <a:srgbClr val="F5F7F9"/>
-          </a:solidFill>
-          <a:ln>
-            <a:solidFill>
-              <a:srgbClr val="E3E7EC"/>
-            </a:solidFill>
-          </a:ln>
-        </p:spPr>
-        <p:style>
-          <a:lnRef idx="1">
-            <a:schemeClr val="accent1"/>
-          </a:lnRef>
-          <a:fillRef idx="3">
-            <a:schemeClr val="accent1"/>
-          </a:fillRef>
-          <a:effectRef idx="2">
-            <a:schemeClr val="accent1"/>
-          </a:effectRef>
-          <a:fontRef idx="minor">
-            <a:schemeClr val="lt1"/>
-          </a:fontRef>
-        </p:style>
-        <p:txBody>
-          <a:bodyPr rtlCol="0" anchor="ctr"/>
-          <a:lstStyle/>
-          <a:p>
-            <a:pPr algn="ctr">
-              <a:defRPr>
-                <a:latin typeface="Inter"/>
-              </a:defRPr>
-            </a:pPr>
-          </a:p>
-        </p:txBody>
-      </p:sp>
-      <p:sp>
-        <p:nvSpPr>
-          <p:cNvPr id="16" name="Rectangle 15"/>
-          <p:cNvSpPr/>
-          <p:nvPr/>
-        </p:nvSpPr>
-        <p:spPr>
-          <a:xfrm>
-            <a:off x="640080" y="4347673"/>
-            <a:ext cx="54864" cy="1870246"/>
-          </a:xfrm>
-          <a:prstGeom prst="rect">
-            <a:avLst/>
-          </a:prstGeom>
-          <a:solidFill>
-            <a:srgbClr val="0D1117"/>
-          </a:solidFill>
-          <a:ln>
-            <a:solidFill>
-              <a:srgbClr val="0D1117"/>
-            </a:solidFill>
-          </a:ln>
-        </p:spPr>
-        <p:style>
-          <a:lnRef idx="1">
-            <a:schemeClr val="accent1"/>
-          </a:lnRef>
-          <a:fillRef idx="3">
-            <a:schemeClr val="accent1"/>
-          </a:fillRef>
-          <a:effectRef idx="2">
-            <a:schemeClr val="accent1"/>
-          </a:effectRef>
-          <a:fontRef idx="minor">
-            <a:schemeClr val="lt1"/>
-          </a:fontRef>
-        </p:style>
-        <p:txBody>
-          <a:bodyPr rtlCol="0" anchor="ctr"/>
-          <a:lstStyle/>
-          <a:p>
-            <a:pPr algn="ctr">
-              <a:defRPr>
-                <a:latin typeface="Inter"/>
-              </a:defRPr>
-            </a:pPr>
-          </a:p>
-        </p:txBody>
-      </p:sp>
-      <p:sp>
-        <p:nvSpPr>
-          <p:cNvPr id="17" name="TextBox 16"/>
-          <p:cNvSpPr txBox="1"/>
-          <p:nvPr/>
-        </p:nvSpPr>
-        <p:spPr>
-          <a:xfrm>
-            <a:off x="804671" y="4457401"/>
-            <a:ext cx="10616184" cy="228600"/>
-          </a:xfrm>
-          <a:prstGeom prst="rect">
-            <a:avLst/>
-          </a:prstGeom>
-          <a:noFill/>
-        </p:spPr>
-        <p:txBody>
-          <a:bodyPr wrap="none" lIns="9144" rIns="9144" tIns="9144" bIns="9144" anchor="t">
-            <a:spAutoFit/>
-          </a:bodyPr>
-          <a:lstStyle/>
-          <a:p>
-            <a:pPr algn="l">
-              <a:spcAft>
-                <a:spcPts val="0"/>
-              </a:spcAft>
-              <a:defRPr sz="1000" b="1">
-                <a:solidFill>
-                  <a:srgbClr val="0D1117"/>
-                </a:solidFill>
-                <a:latin typeface="Inter"/>
-              </a:defRPr>
-            </a:pPr>
-            <a:r>
-              <a:rPr>
-                <a:latin typeface="Inter"/>
-              </a:rPr>
-              <a:t>Decision-use boundary</a:t>
-            </a:r>
-          </a:p>
-        </p:txBody>
-      </p:sp>
-      <p:sp>
-        <p:nvSpPr>
-          <p:cNvPr id="18" name="TextBox 17"/>
-          <p:cNvSpPr txBox="1"/>
-          <p:nvPr/>
-        </p:nvSpPr>
-        <p:spPr>
-          <a:xfrm>
-            <a:off x="804671" y="4740865"/>
-            <a:ext cx="10616184" cy="1385614"/>
-          </a:xfrm>
-          <a:prstGeom prst="rect">
-            <a:avLst/>
-          </a:prstGeom>
-          <a:noFill/>
-        </p:spPr>
-        <p:txBody>
-          <a:bodyPr wrap="none" lIns="9144" rIns="9144" tIns="9144" bIns="9144" anchor="t">
-            <a:spAutoFit/>
-          </a:bodyPr>
-          <a:lstStyle/>
-          <a:p>
-            <a:pPr algn="l">
-              <a:spcAft>
-                <a:spcPts val="0"/>
-              </a:spcAft>
-              <a:defRPr sz="950" b="0">
-                <a:solidFill>
-                  <a:srgbClr val="4A5563"/>
-                </a:solidFill>
-                <a:latin typeface="Inter"/>
-              </a:defRPr>
-            </a:pPr>
-            <a:r>
-              <a:rPr>
-                <a:latin typeface="Inter"/>
-              </a:rPr>
-              <a:t>Typed unavailability limits the conclusion and drives the insufficient signal where most required slots are absent [S1]. The evidence supports follow-up collection only; operational diligence and committee decisions remain separate handoffs with their own governed evidence and validation contracts. Every unresolved field remains reader-visible in the delivered report.</a:t>
-            </a:r>
-          </a:p>
-        </p:txBody>
-      </p:sp>
-      <p:sp>
-        <p:nvSpPr>
-          <p:cNvPr id="19" name="Rectangle 18"/>
+              <a:t>Each digest is the SHA-256 fingerprint of the exact data the report used.</a:t>
+            </a:r>
+          </a:p>
+        </p:txBody>
+      </p:sp>
+      <p:sp>
+        <p:nvSpPr>
+          <p:cNvPr id="13" name="Rectangle 12"/>
           <p:cNvSpPr/>
           <p:nvPr/>
         </p:nvSpPr>
@@ -10021,7 +9174,7 @@
       </p:sp>
       <p:sp>
         <p:nvSpPr>
-          <p:cNvPr id="20" name="TextBox 19"/>
+          <p:cNvPr id="14" name="TextBox 13"/>
           <p:cNvSpPr txBox="1"/>
           <p:nvPr/>
         </p:nvSpPr>
@@ -10063,7 +9216,7 @@
       </p:sp>
       <p:sp>
         <p:nvSpPr>
-          <p:cNvPr id="21" name="TextBox 20"/>
+          <p:cNvPr id="15" name="TextBox 14"/>
           <p:cNvSpPr txBox="1"/>
           <p:nvPr/>
         </p:nvSpPr>
@@ -10105,7 +9258,7 @@
       </p:sp>
       <p:sp>
         <p:nvSpPr>
-          <p:cNvPr id="22" name="TextBox 21"/>
+          <p:cNvPr id="16" name="TextBox 15"/>
           <p:cNvSpPr txBox="1"/>
           <p:nvPr/>
         </p:nvSpPr>

--- a/plugins/gradient-cio/assets/examples/gradient-idd-manager-portfolio-fit.pptx
+++ b/plugins/gradient-cio/assets/examples/gradient-idd-manager-portfolio-fit.pptx
@@ -5877,7 +5877,7 @@
         <p:spPr>
           <a:xfrm>
             <a:off x="640080" y="1325880"/>
-            <a:ext cx="10908792" cy="2391156"/>
+            <a:ext cx="10908792" cy="2140268"/>
           </a:xfrm>
           <a:prstGeom prst="rect">
             <a:avLst/>
@@ -5926,7 +5926,7 @@
         <p:spPr>
           <a:xfrm>
             <a:off x="640080" y="1325880"/>
-            <a:ext cx="54864" cy="2391156"/>
+            <a:ext cx="54864" cy="2140268"/>
           </a:xfrm>
           <a:prstGeom prst="rect">
             <a:avLst/>
@@ -6017,7 +6017,7 @@
         <p:spPr>
           <a:xfrm>
             <a:off x="804671" y="1719072"/>
-            <a:ext cx="10616184" cy="1906523"/>
+            <a:ext cx="10616184" cy="1655636"/>
           </a:xfrm>
           <a:prstGeom prst="rect">
             <a:avLst/>
@@ -6058,8 +6058,8 @@
         </p:nvSpPr>
         <p:spPr>
           <a:xfrm>
-            <a:off x="640080" y="3826763"/>
-            <a:ext cx="10908792" cy="2391156"/>
+            <a:off x="640080" y="3575876"/>
+            <a:ext cx="10908792" cy="2642043"/>
           </a:xfrm>
           <a:prstGeom prst="rect">
             <a:avLst/>
@@ -6107,8 +6107,8 @@
         </p:nvSpPr>
         <p:spPr>
           <a:xfrm>
-            <a:off x="640080" y="3826763"/>
-            <a:ext cx="54864" cy="2391156"/>
+            <a:off x="640080" y="3575876"/>
+            <a:ext cx="54864" cy="2642043"/>
           </a:xfrm>
           <a:prstGeom prst="rect">
             <a:avLst/>
@@ -6156,7 +6156,7 @@
         </p:nvSpPr>
         <p:spPr>
           <a:xfrm>
-            <a:off x="804671" y="3936491"/>
+            <a:off x="804671" y="3685604"/>
             <a:ext cx="10616184" cy="228600"/>
           </a:xfrm>
           <a:prstGeom prst="rect">
@@ -6198,8 +6198,8 @@
         </p:nvSpPr>
         <p:spPr>
           <a:xfrm>
-            <a:off x="804671" y="4219955"/>
-            <a:ext cx="10616184" cy="1906524"/>
+            <a:off x="804671" y="3969068"/>
+            <a:ext cx="10616184" cy="2157411"/>
           </a:xfrm>
           <a:prstGeom prst="rect">
             <a:avLst/>
@@ -6749,7 +6749,7 @@
         <p:spPr>
           <a:xfrm>
             <a:off x="640080" y="1325880"/>
-            <a:ext cx="10908792" cy="2374035"/>
+            <a:ext cx="10908792" cy="2140268"/>
           </a:xfrm>
           <a:prstGeom prst="rect">
             <a:avLst/>
@@ -6798,7 +6798,7 @@
         <p:spPr>
           <a:xfrm>
             <a:off x="640080" y="1325880"/>
-            <a:ext cx="54864" cy="2374035"/>
+            <a:ext cx="54864" cy="2140268"/>
           </a:xfrm>
           <a:prstGeom prst="rect">
             <a:avLst/>
@@ -6889,7 +6889,7 @@
         <p:spPr>
           <a:xfrm>
             <a:off x="804671" y="1719072"/>
-            <a:ext cx="10616184" cy="1889403"/>
+            <a:ext cx="10616184" cy="1655636"/>
           </a:xfrm>
           <a:prstGeom prst="rect">
             <a:avLst/>
@@ -6930,8 +6930,8 @@
         </p:nvSpPr>
         <p:spPr>
           <a:xfrm>
-            <a:off x="640080" y="3809643"/>
-            <a:ext cx="10908792" cy="2408276"/>
+            <a:off x="640080" y="3575876"/>
+            <a:ext cx="10908792" cy="2642043"/>
           </a:xfrm>
           <a:prstGeom prst="rect">
             <a:avLst/>
@@ -6979,8 +6979,8 @@
         </p:nvSpPr>
         <p:spPr>
           <a:xfrm>
-            <a:off x="640080" y="3809643"/>
-            <a:ext cx="54864" cy="2408276"/>
+            <a:off x="640080" y="3575876"/>
+            <a:ext cx="54864" cy="2642043"/>
           </a:xfrm>
           <a:prstGeom prst="rect">
             <a:avLst/>
@@ -7028,7 +7028,7 @@
         </p:nvSpPr>
         <p:spPr>
           <a:xfrm>
-            <a:off x="804671" y="3919371"/>
+            <a:off x="804671" y="3685604"/>
             <a:ext cx="10616184" cy="228600"/>
           </a:xfrm>
           <a:prstGeom prst="rect">
@@ -7070,8 +7070,8 @@
         </p:nvSpPr>
         <p:spPr>
           <a:xfrm>
-            <a:off x="804671" y="4202835"/>
-            <a:ext cx="10616184" cy="1923644"/>
+            <a:off x="804671" y="3969068"/>
+            <a:ext cx="10616184" cy="2157411"/>
           </a:xfrm>
           <a:prstGeom prst="rect">
             <a:avLst/>
@@ -7621,7 +7621,7 @@
         <p:spPr>
           <a:xfrm>
             <a:off x="640080" y="1325880"/>
-            <a:ext cx="10908792" cy="2391156"/>
+            <a:ext cx="10908792" cy="2140268"/>
           </a:xfrm>
           <a:prstGeom prst="rect">
             <a:avLst/>
@@ -7670,7 +7670,7 @@
         <p:spPr>
           <a:xfrm>
             <a:off x="640080" y="1325880"/>
-            <a:ext cx="54864" cy="2391156"/>
+            <a:ext cx="54864" cy="2140268"/>
           </a:xfrm>
           <a:prstGeom prst="rect">
             <a:avLst/>
@@ -7761,7 +7761,7 @@
         <p:spPr>
           <a:xfrm>
             <a:off x="804671" y="1719072"/>
-            <a:ext cx="10616184" cy="1906523"/>
+            <a:ext cx="10616184" cy="1655636"/>
           </a:xfrm>
           <a:prstGeom prst="rect">
             <a:avLst/>
@@ -7802,8 +7802,8 @@
         </p:nvSpPr>
         <p:spPr>
           <a:xfrm>
-            <a:off x="640080" y="3826763"/>
-            <a:ext cx="10908792" cy="2391156"/>
+            <a:off x="640080" y="3575876"/>
+            <a:ext cx="10908792" cy="2642043"/>
           </a:xfrm>
           <a:prstGeom prst="rect">
             <a:avLst/>
@@ -7851,8 +7851,8 @@
         </p:nvSpPr>
         <p:spPr>
           <a:xfrm>
-            <a:off x="640080" y="3826763"/>
-            <a:ext cx="54864" cy="2391156"/>
+            <a:off x="640080" y="3575876"/>
+            <a:ext cx="54864" cy="2642043"/>
           </a:xfrm>
           <a:prstGeom prst="rect">
             <a:avLst/>
@@ -7900,7 +7900,7 @@
         </p:nvSpPr>
         <p:spPr>
           <a:xfrm>
-            <a:off x="804671" y="3936491"/>
+            <a:off x="804671" y="3685604"/>
             <a:ext cx="10616184" cy="228600"/>
           </a:xfrm>
           <a:prstGeom prst="rect">
@@ -7942,8 +7942,8 @@
         </p:nvSpPr>
         <p:spPr>
           <a:xfrm>
-            <a:off x="804671" y="4219955"/>
-            <a:ext cx="10616184" cy="1906524"/>
+            <a:off x="804671" y="3969068"/>
+            <a:ext cx="10616184" cy="2157411"/>
           </a:xfrm>
           <a:prstGeom prst="rect">
             <a:avLst/>
@@ -9051,7 +9051,7 @@
         </p:nvGraphicFramePr>
         <p:xfrm>
           <a:off x="640080" y="1325880"/>
-          <a:ext cx="10908792" cy="968494"/>
+          <a:ext cx="10908792" cy="1213522"/>
         </p:xfrm>
         <a:graphic>
           <a:graphicData uri="http://schemas.openxmlformats.org/drawingml/2006/table">
@@ -9070,7 +9070,7 @@
                 <a:gridCol w="1112139"/>
                 <a:gridCol w="1112139"/>
               </a:tblGrid>
-              <a:tr h="484247">
+              <a:tr h="606761">
                 <a:tc>
                   <a:txBody>
                     <a:bodyPr/>
@@ -9315,7 +9315,7 @@
                   </a:tcPr>
                 </a:tc>
               </a:tr>
-              <a:tr h="484247">
+              <a:tr h="606761">
                 <a:tc>
                   <a:txBody>
                     <a:bodyPr/>
@@ -9572,7 +9572,7 @@
         </p:nvSpPr>
         <p:spPr>
           <a:xfrm>
-            <a:off x="640080" y="2312662"/>
+            <a:off x="640080" y="2557690"/>
             <a:ext cx="10908792" cy="164592"/>
           </a:xfrm>
           <a:prstGeom prst="rect">
@@ -9614,8 +9614,8 @@
         </p:nvSpPr>
         <p:spPr>
           <a:xfrm>
-            <a:off x="640080" y="2605270"/>
-            <a:ext cx="10908792" cy="1632674"/>
+            <a:off x="640080" y="2850298"/>
+            <a:ext cx="10908792" cy="1471648"/>
           </a:xfrm>
           <a:prstGeom prst="rect">
             <a:avLst/>
@@ -9663,8 +9663,8 @@
         </p:nvSpPr>
         <p:spPr>
           <a:xfrm>
-            <a:off x="640080" y="2605270"/>
-            <a:ext cx="54864" cy="1632674"/>
+            <a:off x="640080" y="2850298"/>
+            <a:ext cx="54864" cy="1471648"/>
           </a:xfrm>
           <a:prstGeom prst="rect">
             <a:avLst/>
@@ -9712,7 +9712,7 @@
         </p:nvSpPr>
         <p:spPr>
           <a:xfrm>
-            <a:off x="804671" y="2714998"/>
+            <a:off x="804671" y="2960026"/>
             <a:ext cx="10616184" cy="228600"/>
           </a:xfrm>
           <a:prstGeom prst="rect">
@@ -9754,8 +9754,8 @@
         </p:nvSpPr>
         <p:spPr>
           <a:xfrm>
-            <a:off x="804671" y="2998462"/>
-            <a:ext cx="10616184" cy="1148042"/>
+            <a:off x="804671" y="3243490"/>
+            <a:ext cx="10616184" cy="987016"/>
           </a:xfrm>
           <a:prstGeom prst="rect">
             <a:avLst/>
@@ -9796,8 +9796,8 @@
         </p:nvSpPr>
         <p:spPr>
           <a:xfrm>
-            <a:off x="640080" y="4347673"/>
-            <a:ext cx="10908792" cy="1870246"/>
+            <a:off x="640080" y="4431674"/>
+            <a:ext cx="10908792" cy="1786245"/>
           </a:xfrm>
           <a:prstGeom prst="rect">
             <a:avLst/>
@@ -9845,8 +9845,8 @@
         </p:nvSpPr>
         <p:spPr>
           <a:xfrm>
-            <a:off x="640080" y="4347673"/>
-            <a:ext cx="54864" cy="1870246"/>
+            <a:off x="640080" y="4431674"/>
+            <a:ext cx="54864" cy="1786245"/>
           </a:xfrm>
           <a:prstGeom prst="rect">
             <a:avLst/>
@@ -9894,7 +9894,7 @@
         </p:nvSpPr>
         <p:spPr>
           <a:xfrm>
-            <a:off x="804671" y="4457401"/>
+            <a:off x="804671" y="4541402"/>
             <a:ext cx="10616184" cy="228600"/>
           </a:xfrm>
           <a:prstGeom prst="rect">
@@ -9936,8 +9936,8 @@
         </p:nvSpPr>
         <p:spPr>
           <a:xfrm>
-            <a:off x="804671" y="4740865"/>
-            <a:ext cx="10616184" cy="1385614"/>
+            <a:off x="804671" y="4824866"/>
+            <a:ext cx="10616184" cy="1301613"/>
           </a:xfrm>
           <a:prstGeom prst="rect">
             <a:avLst/>

--- a/plugins/gradient-cio/assets/examples/gradient-idd-manager-portfolio-fit.pptx
+++ b/plugins/gradient-cio/assets/examples/gradient-idd-manager-portfolio-fit.pptx
@@ -514,7 +514,7 @@
           </a:p>
           <a:p>
             <a:r>
-              <a:t>Observation: Comparative metrics are unavailable [S1]. Why it matters: No ranking is supportable. Uncertainty: Missing evidence may differ by manager. What would change the view: A governed comparison result.</a:t>
+              <a:t>Observation: No comparison metrics were returned for the four candidates [S1]. Why it matters: Without them, no ranking of the candidates is supportable. Uncertainty: The missing evidence may differ by manager. What would change the view: Comparison results for each candidate.</a:t>
             </a:r>
           </a:p>
         </p:txBody>
@@ -589,7 +589,7 @@
           </a:p>
           <a:p>
             <a:r>
-              <a:t>Observation: Relative evidence is unavailable [S1]. Why it matters: Benchmark-relative behavior is unknown. Uncertainty: Capture may vary by window. What would change the view: A governed relative-return result.</a:t>
+              <a:t>Observation: Benchmark-relative returns were not returned for any candidate [S1]. Why it matters: Behavior against the mandate benchmark is unknown. Uncertainty: Up and down capture may vary by window. What would change the view: Benchmark-relative results for each candidate.</a:t>
             </a:r>
           </a:p>
         </p:txBody>
@@ -664,7 +664,7 @@
           </a:p>
           <a:p>
             <a:r>
-              <a:t>Observation: Robustness evidence is unavailable [S1]. Why it matters: Persistence cannot be assessed. Uncertainty: Results may depend on dates. What would change the view: Governed window tests.</a:t>
+              <a:t>Observation: Persistence and correlation tests were not returned [S1]. Why it matters: Whether results repeat across periods cannot be assessed. Uncertainty: Results may depend on the dates chosen. What would change the view: Tests across several date windows.</a:t>
             </a:r>
           </a:p>
         </p:txBody>
@@ -3222,7 +3222,7 @@
               <a:rPr>
                 <a:latin typeface="Inter"/>
               </a:rPr>
-              <a:t>EVIDENCE</a:t>
+              <a:t>PREPARED FOR</a:t>
             </a:r>
           </a:p>
         </p:txBody>
@@ -3264,7 +3264,7 @@
               <a:rPr>
                 <a:latin typeface="Inter"/>
               </a:rPr>
-              <a:t>Governed return series</a:t>
+              <a:t>Investment Committee</a:t>
             </a:r>
           </a:p>
         </p:txBody>
@@ -3306,7 +3306,7 @@
               <a:rPr>
                 <a:latin typeface="Inter"/>
               </a:rPr>
-              <a:t>AUDIENCE</a:t>
+              <a:t>DATA AS OF</a:t>
             </a:r>
           </a:p>
         </p:txBody>
@@ -3348,7 +3348,7 @@
               <a:rPr>
                 <a:latin typeface="Inter"/>
               </a:rPr>
-              <a:t>Investment Committee</a:t>
+              <a:t>2025-12-31</a:t>
             </a:r>
           </a:p>
         </p:txBody>
@@ -3356,307 +3356,6 @@
       <p:sp>
         <p:nvSpPr>
           <p:cNvPr id="15" name="TextBox 14"/>
-          <p:cNvSpPr txBox="1"/>
-          <p:nvPr/>
-        </p:nvSpPr>
-        <p:spPr>
-          <a:xfrm>
-            <a:off x="5852160" y="4937759"/>
-            <a:ext cx="4709160" cy="182880"/>
-          </a:xfrm>
-          <a:prstGeom prst="rect">
-            <a:avLst/>
-          </a:prstGeom>
-          <a:noFill/>
-        </p:spPr>
-        <p:txBody>
-          <a:bodyPr wrap="none" lIns="9144" rIns="9144" tIns="9144" bIns="9144" anchor="t">
-            <a:spAutoFit/>
-          </a:bodyPr>
-          <a:lstStyle/>
-          <a:p>
-            <a:pPr algn="l">
-              <a:spcAft>
-                <a:spcPts val="0"/>
-              </a:spcAft>
-              <a:defRPr sz="700" b="1">
-                <a:solidFill>
-                  <a:srgbClr val="8A94A1"/>
-                </a:solidFill>
-                <a:latin typeface="Inter"/>
-              </a:defRPr>
-            </a:pPr>
-            <a:r>
-              <a:rPr>
-                <a:latin typeface="Inter"/>
-              </a:rPr>
-              <a:t>DATA AS OF</a:t>
-            </a:r>
-          </a:p>
-        </p:txBody>
-      </p:sp>
-      <p:sp>
-        <p:nvSpPr>
-          <p:cNvPr id="16" name="TextBox 15"/>
-          <p:cNvSpPr txBox="1"/>
-          <p:nvPr/>
-        </p:nvSpPr>
-        <p:spPr>
-          <a:xfrm>
-            <a:off x="5852160" y="5129783"/>
-            <a:ext cx="4709160" cy="310896"/>
-          </a:xfrm>
-          <a:prstGeom prst="rect">
-            <a:avLst/>
-          </a:prstGeom>
-          <a:noFill/>
-        </p:spPr>
-        <p:txBody>
-          <a:bodyPr wrap="none" lIns="9144" rIns="9144" tIns="9144" bIns="9144" anchor="t">
-            <a:spAutoFit/>
-          </a:bodyPr>
-          <a:lstStyle/>
-          <a:p>
-            <a:pPr algn="l">
-              <a:spcAft>
-                <a:spcPts val="0"/>
-              </a:spcAft>
-              <a:defRPr sz="1000" b="1">
-                <a:solidFill>
-                  <a:srgbClr val="FFFFFF"/>
-                </a:solidFill>
-                <a:latin typeface="Inter"/>
-              </a:defRPr>
-            </a:pPr>
-            <a:r>
-              <a:rPr>
-                <a:latin typeface="Inter"/>
-              </a:rPr>
-              <a:t>2025-12-31</a:t>
-            </a:r>
-          </a:p>
-        </p:txBody>
-      </p:sp>
-      <p:sp>
-        <p:nvSpPr>
-          <p:cNvPr id="17" name="Rectangle 16"/>
-          <p:cNvSpPr/>
-          <p:nvPr/>
-        </p:nvSpPr>
-        <p:spPr>
-          <a:xfrm>
-            <a:off x="685800" y="5687568"/>
-            <a:ext cx="3337560" cy="530352"/>
-          </a:xfrm>
-          <a:prstGeom prst="rect">
-            <a:avLst/>
-          </a:prstGeom>
-          <a:solidFill>
-            <a:srgbClr val="9AA5B1"/>
-          </a:solidFill>
-          <a:ln>
-            <a:solidFill>
-              <a:srgbClr val="9AA5B1"/>
-            </a:solidFill>
-          </a:ln>
-        </p:spPr>
-        <p:style>
-          <a:lnRef idx="1">
-            <a:schemeClr val="accent1"/>
-          </a:lnRef>
-          <a:fillRef idx="3">
-            <a:schemeClr val="accent1"/>
-          </a:fillRef>
-          <a:effectRef idx="2">
-            <a:schemeClr val="accent1"/>
-          </a:effectRef>
-          <a:fontRef idx="minor">
-            <a:schemeClr val="lt1"/>
-          </a:fontRef>
-        </p:style>
-        <p:txBody>
-          <a:bodyPr rtlCol="0" anchor="ctr"/>
-          <a:lstStyle/>
-          <a:p>
-            <a:pPr algn="ctr">
-              <a:defRPr>
-                <a:latin typeface="Inter"/>
-              </a:defRPr>
-            </a:pPr>
-          </a:p>
-        </p:txBody>
-      </p:sp>
-      <p:sp>
-        <p:nvSpPr>
-          <p:cNvPr id="18" name="TextBox 17"/>
-          <p:cNvSpPr txBox="1"/>
-          <p:nvPr/>
-        </p:nvSpPr>
-        <p:spPr>
-          <a:xfrm>
-            <a:off x="822960" y="5760720"/>
-            <a:ext cx="3063240" cy="128016"/>
-          </a:xfrm>
-          <a:prstGeom prst="rect">
-            <a:avLst/>
-          </a:prstGeom>
-          <a:noFill/>
-        </p:spPr>
-        <p:txBody>
-          <a:bodyPr wrap="none" lIns="9144" rIns="9144" tIns="9144" bIns="9144" anchor="t">
-            <a:spAutoFit/>
-          </a:bodyPr>
-          <a:lstStyle/>
-          <a:p>
-            <a:pPr algn="l">
-              <a:spcAft>
-                <a:spcPts val="0"/>
-              </a:spcAft>
-              <a:defRPr sz="620" b="1">
-                <a:solidFill>
-                  <a:srgbClr val="0D1117"/>
-                </a:solidFill>
-                <a:latin typeface="Inter"/>
-              </a:defRPr>
-            </a:pPr>
-            <a:r>
-              <a:rPr>
-                <a:latin typeface="Inter"/>
-              </a:rPr>
-              <a:t>OVERALL VIEW</a:t>
-            </a:r>
-          </a:p>
-        </p:txBody>
-      </p:sp>
-      <p:sp>
-        <p:nvSpPr>
-          <p:cNvPr id="19" name="TextBox 18"/>
-          <p:cNvSpPr txBox="1"/>
-          <p:nvPr/>
-        </p:nvSpPr>
-        <p:spPr>
-          <a:xfrm>
-            <a:off x="822960" y="5916168"/>
-            <a:ext cx="3063240" cy="182880"/>
-          </a:xfrm>
-          <a:prstGeom prst="rect">
-            <a:avLst/>
-          </a:prstGeom>
-          <a:noFill/>
-        </p:spPr>
-        <p:txBody>
-          <a:bodyPr wrap="none" lIns="9144" rIns="9144" tIns="9144" bIns="9144" anchor="t">
-            <a:spAutoFit/>
-          </a:bodyPr>
-          <a:lstStyle/>
-          <a:p>
-            <a:pPr algn="l">
-              <a:spcAft>
-                <a:spcPts val="0"/>
-              </a:spcAft>
-              <a:defRPr sz="900" b="1">
-                <a:solidFill>
-                  <a:srgbClr val="0D1117"/>
-                </a:solidFill>
-                <a:latin typeface="Inter"/>
-              </a:defRPr>
-            </a:pPr>
-            <a:r>
-              <a:rPr>
-                <a:latin typeface="Inter"/>
-              </a:rPr>
-              <a:t>Insufficient governed evidence</a:t>
-            </a:r>
-          </a:p>
-        </p:txBody>
-      </p:sp>
-      <p:sp>
-        <p:nvSpPr>
-          <p:cNvPr id="20" name="TextBox 19"/>
-          <p:cNvSpPr txBox="1"/>
-          <p:nvPr/>
-        </p:nvSpPr>
-        <p:spPr>
-          <a:xfrm>
-            <a:off x="4297680" y="5733288"/>
-            <a:ext cx="3108960" cy="164592"/>
-          </a:xfrm>
-          <a:prstGeom prst="rect">
-            <a:avLst/>
-          </a:prstGeom>
-          <a:noFill/>
-        </p:spPr>
-        <p:txBody>
-          <a:bodyPr wrap="none" lIns="9144" rIns="9144" tIns="9144" bIns="9144" anchor="t">
-            <a:spAutoFit/>
-          </a:bodyPr>
-          <a:lstStyle/>
-          <a:p>
-            <a:pPr algn="l">
-              <a:spcAft>
-                <a:spcPts val="0"/>
-              </a:spcAft>
-              <a:defRPr sz="650" b="1">
-                <a:solidFill>
-                  <a:srgbClr val="8A94A1"/>
-                </a:solidFill>
-                <a:latin typeface="Inter"/>
-              </a:defRPr>
-            </a:pPr>
-            <a:r>
-              <a:rPr>
-                <a:latin typeface="Inter"/>
-              </a:rPr>
-              <a:t>SCOPE REVIEWED</a:t>
-            </a:r>
-          </a:p>
-        </p:txBody>
-      </p:sp>
-      <p:sp>
-        <p:nvSpPr>
-          <p:cNvPr id="21" name="TextBox 20"/>
-          <p:cNvSpPr txBox="1"/>
-          <p:nvPr/>
-        </p:nvSpPr>
-        <p:spPr>
-          <a:xfrm>
-            <a:off x="4297680" y="5934456"/>
-            <a:ext cx="3108960" cy="201168"/>
-          </a:xfrm>
-          <a:prstGeom prst="rect">
-            <a:avLst/>
-          </a:prstGeom>
-          <a:noFill/>
-        </p:spPr>
-        <p:txBody>
-          <a:bodyPr wrap="none" lIns="9144" rIns="9144" tIns="9144" bIns="9144" anchor="t">
-            <a:spAutoFit/>
-          </a:bodyPr>
-          <a:lstStyle/>
-          <a:p>
-            <a:pPr algn="l">
-              <a:spcAft>
-                <a:spcPts val="0"/>
-              </a:spcAft>
-              <a:defRPr sz="800" b="1">
-                <a:solidFill>
-                  <a:srgbClr val="FFFFFF"/>
-                </a:solidFill>
-                <a:latin typeface="Inter"/>
-              </a:defRPr>
-            </a:pPr>
-            <a:r>
-              <a:rPr>
-                <a:latin typeface="Inter"/>
-              </a:rPr>
-              <a:t>1 of 4 · Partial</a:t>
-            </a:r>
-          </a:p>
-        </p:txBody>
-      </p:sp>
-      <p:sp>
-        <p:nvSpPr>
-          <p:cNvPr id="22" name="TextBox 21"/>
           <p:cNvSpPr txBox="1"/>
           <p:nvPr/>
         </p:nvSpPr>
@@ -3698,7 +3397,7 @@
       </p:sp>
       <p:sp>
         <p:nvSpPr>
-          <p:cNvPr id="23" name="TextBox 22"/>
+          <p:cNvPr id="16" name="TextBox 15"/>
           <p:cNvSpPr txBox="1"/>
           <p:nvPr/>
         </p:nvSpPr>
@@ -3740,7 +3439,7 @@
       </p:sp>
       <p:sp>
         <p:nvSpPr>
-          <p:cNvPr id="24" name="TextBox 23"/>
+          <p:cNvPr id="17" name="TextBox 16"/>
           <p:cNvSpPr txBox="1"/>
           <p:nvPr/>
         </p:nvSpPr>
@@ -3856,7 +3555,7 @@
         <p:spPr>
           <a:xfrm>
             <a:off x="640080" y="329184"/>
-            <a:ext cx="5303520" cy="182880"/>
+            <a:ext cx="9875520" cy="182880"/>
           </a:xfrm>
           <a:prstGeom prst="rect">
             <a:avLst/>
@@ -3897,48 +3596,6 @@
         </p:nvSpPr>
         <p:spPr>
           <a:xfrm>
-            <a:off x="5897880" y="310896"/>
-            <a:ext cx="4800600" cy="256032"/>
-          </a:xfrm>
-          <a:prstGeom prst="rect">
-            <a:avLst/>
-          </a:prstGeom>
-          <a:noFill/>
-        </p:spPr>
-        <p:txBody>
-          <a:bodyPr wrap="none" lIns="9144" rIns="9144" tIns="9144" bIns="9144" anchor="t">
-            <a:spAutoFit/>
-          </a:bodyPr>
-          <a:lstStyle/>
-          <a:p>
-            <a:pPr algn="r">
-              <a:spcAft>
-                <a:spcPts val="0"/>
-              </a:spcAft>
-              <a:defRPr sz="680" b="1">
-                <a:solidFill>
-                  <a:srgbClr val="4F6B00"/>
-                </a:solidFill>
-                <a:latin typeface="Inter"/>
-              </a:defRPr>
-            </a:pPr>
-            <a:r>
-              <a:rPr>
-                <a:latin typeface="Inter"/>
-              </a:rPr>
-              <a:t>Illustrative, Gradient Maintained — demo data, not the client's holdings or managers</a:t>
-            </a:r>
-          </a:p>
-        </p:txBody>
-      </p:sp>
-      <p:sp>
-        <p:nvSpPr>
-          <p:cNvPr id="5" name="TextBox 4"/>
-          <p:cNvSpPr txBox="1"/>
-          <p:nvPr/>
-        </p:nvSpPr>
-        <p:spPr>
-          <a:xfrm>
             <a:off x="640080" y="566928"/>
             <a:ext cx="10058400" cy="530352"/>
           </a:xfrm>
@@ -3975,7 +3632,7 @@
       </p:sp>
       <p:sp>
         <p:nvSpPr>
-          <p:cNvPr id="6" name="Rectangle 5"/>
+          <p:cNvPr id="5" name="Rectangle 4"/>
           <p:cNvSpPr/>
           <p:nvPr/>
         </p:nvSpPr>
@@ -4024,7 +3681,7 @@
       </p:sp>
       <p:sp>
         <p:nvSpPr>
-          <p:cNvPr id="7" name="Rectangle 6"/>
+          <p:cNvPr id="6" name="Rectangle 5"/>
           <p:cNvSpPr/>
           <p:nvPr/>
         </p:nvSpPr>
@@ -4073,7 +3730,7 @@
       </p:sp>
       <p:sp>
         <p:nvSpPr>
-          <p:cNvPr id="8" name="TextBox 7"/>
+          <p:cNvPr id="7" name="TextBox 6"/>
           <p:cNvSpPr txBox="1"/>
           <p:nvPr/>
         </p:nvSpPr>
@@ -4115,7 +3772,7 @@
       </p:sp>
       <p:sp>
         <p:nvSpPr>
-          <p:cNvPr id="9" name="Rectangle 8"/>
+          <p:cNvPr id="8" name="Rectangle 7"/>
           <p:cNvSpPr/>
           <p:nvPr/>
         </p:nvSpPr>
@@ -4164,7 +3821,7 @@
       </p:sp>
       <p:sp>
         <p:nvSpPr>
-          <p:cNvPr id="10" name="Rectangle 9"/>
+          <p:cNvPr id="9" name="Rectangle 8"/>
           <p:cNvSpPr/>
           <p:nvPr/>
         </p:nvSpPr>
@@ -4213,7 +3870,7 @@
       </p:sp>
       <p:sp>
         <p:nvSpPr>
-          <p:cNvPr id="11" name="TextBox 10"/>
+          <p:cNvPr id="10" name="TextBox 9"/>
           <p:cNvSpPr txBox="1"/>
           <p:nvPr/>
         </p:nvSpPr>
@@ -4255,7 +3912,7 @@
       </p:sp>
       <p:sp>
         <p:nvSpPr>
-          <p:cNvPr id="12" name="TextBox 11"/>
+          <p:cNvPr id="11" name="TextBox 10"/>
           <p:cNvSpPr txBox="1"/>
           <p:nvPr/>
         </p:nvSpPr>
@@ -4290,14 +3947,14 @@
               <a:rPr>
                 <a:latin typeface="Inter"/>
               </a:rPr>
-              <a:t>Observation: Coverage is incomplete [S1]. Why it matters: Comparison is constrained. Uncertainty: Missing reads may change results. What would change the view: Governed comparison evidence.</a:t>
-            </a:r>
-          </a:p>
-        </p:txBody>
-      </p:sp>
-      <p:sp>
-        <p:nvSpPr>
-          <p:cNvPr id="13" name="Rectangle 12"/>
+              <a:t>Observation: Only one of four portfolio-fit inputs is available [S1]. Why it matters: Diversification benefit cannot be estimated. Uncertainty: Missing series may change the correlation. What would change the view: Return series for the manager and the portfolio.</a:t>
+            </a:r>
+          </a:p>
+        </p:txBody>
+      </p:sp>
+      <p:sp>
+        <p:nvSpPr>
+          <p:cNvPr id="12" name="Rectangle 11"/>
           <p:cNvSpPr/>
           <p:nvPr/>
         </p:nvSpPr>
@@ -4346,7 +4003,7 @@
       </p:sp>
       <p:sp>
         <p:nvSpPr>
-          <p:cNvPr id="14" name="Rectangle 13"/>
+          <p:cNvPr id="13" name="Rectangle 12"/>
           <p:cNvSpPr/>
           <p:nvPr/>
         </p:nvSpPr>
@@ -4395,7 +4052,7 @@
       </p:sp>
       <p:sp>
         <p:nvSpPr>
-          <p:cNvPr id="15" name="TextBox 14"/>
+          <p:cNvPr id="14" name="TextBox 13"/>
           <p:cNvSpPr txBox="1"/>
           <p:nvPr/>
         </p:nvSpPr>
@@ -4437,7 +4094,7 @@
       </p:sp>
       <p:sp>
         <p:nvSpPr>
-          <p:cNvPr id="16" name="TextBox 15"/>
+          <p:cNvPr id="15" name="TextBox 14"/>
           <p:cNvSpPr txBox="1"/>
           <p:nvPr/>
         </p:nvSpPr>
@@ -4472,14 +4129,14 @@
               <a:rPr>
                 <a:latin typeface="Inter"/>
               </a:rPr>
-              <a:t>Observation: Benchmark matching is advisory [S1]. Why it matters: Relative evidence is bounded. Uncertainty: Mandate fit is unconfirmed. What would change the view: Canonical matches.</a:t>
-            </a:r>
-          </a:p>
-        </p:txBody>
-      </p:sp>
-      <p:sp>
-        <p:nvSpPr>
-          <p:cNvPr id="17" name="Rectangle 16"/>
+              <a:t>Observation: The benchmark match is suggested, not confirmed [S1]. Why it matters: Fit is judged against the sleeve benchmark. Uncertainty: Mandate fit is unconfirmed. What would change the view: A confirmed benchmark mapping.</a:t>
+            </a:r>
+          </a:p>
+        </p:txBody>
+      </p:sp>
+      <p:sp>
+        <p:nvSpPr>
+          <p:cNvPr id="16" name="Rectangle 15"/>
           <p:cNvSpPr/>
           <p:nvPr/>
         </p:nvSpPr>
@@ -4528,7 +4185,7 @@
       </p:sp>
       <p:sp>
         <p:nvSpPr>
-          <p:cNvPr id="18" name="Rectangle 17"/>
+          <p:cNvPr id="17" name="Rectangle 16"/>
           <p:cNvSpPr/>
           <p:nvPr/>
         </p:nvSpPr>
@@ -4577,7 +4234,7 @@
       </p:sp>
       <p:sp>
         <p:nvSpPr>
-          <p:cNvPr id="19" name="TextBox 18"/>
+          <p:cNvPr id="18" name="TextBox 17"/>
           <p:cNvSpPr txBox="1"/>
           <p:nvPr/>
         </p:nvSpPr>
@@ -4619,7 +4276,7 @@
       </p:sp>
       <p:sp>
         <p:nvSpPr>
-          <p:cNvPr id="20" name="TextBox 19"/>
+          <p:cNvPr id="19" name="TextBox 18"/>
           <p:cNvSpPr txBox="1"/>
           <p:nvPr/>
         </p:nvSpPr>
@@ -4654,14 +4311,14 @@
               <a:rPr>
                 <a:latin typeface="Inter"/>
               </a:rPr>
-              <a:t>Observation: Robustness is unavailable [S1]. Why it matters: Persistence is unknown. Uncertainty: Window sensitivity is untested. What would change the view: Governed robustness results.</a:t>
-            </a:r>
-          </a:p>
-        </p:txBody>
-      </p:sp>
-      <p:sp>
-        <p:nvSpPr>
-          <p:cNvPr id="21" name="Rectangle 20"/>
+              <a:t>Observation: Fit across market regimes was not tested [S1]. Why it matters: A manager can diversify in one regime and not another. Uncertainty: Results may depend on the window. What would change the view: A regime-split analysis.</a:t>
+            </a:r>
+          </a:p>
+        </p:txBody>
+      </p:sp>
+      <p:sp>
+        <p:nvSpPr>
+          <p:cNvPr id="20" name="Rectangle 19"/>
           <p:cNvSpPr/>
           <p:nvPr/>
         </p:nvSpPr>
@@ -4710,7 +4367,7 @@
       </p:sp>
       <p:sp>
         <p:nvSpPr>
-          <p:cNvPr id="22" name="TextBox 21"/>
+          <p:cNvPr id="21" name="TextBox 20"/>
           <p:cNvSpPr txBox="1"/>
           <p:nvPr/>
         </p:nvSpPr>
@@ -4752,7 +4409,7 @@
       </p:sp>
       <p:sp>
         <p:nvSpPr>
-          <p:cNvPr id="23" name="TextBox 22"/>
+          <p:cNvPr id="22" name="TextBox 21"/>
           <p:cNvSpPr txBox="1"/>
           <p:nvPr/>
         </p:nvSpPr>
@@ -4794,7 +4451,7 @@
       </p:sp>
       <p:sp>
         <p:nvSpPr>
-          <p:cNvPr id="24" name="TextBox 23"/>
+          <p:cNvPr id="23" name="TextBox 22"/>
           <p:cNvSpPr txBox="1"/>
           <p:nvPr/>
         </p:nvSpPr>
@@ -4910,7 +4567,7 @@
         <p:spPr>
           <a:xfrm>
             <a:off x="640080" y="329184"/>
-            <a:ext cx="5303520" cy="182880"/>
+            <a:ext cx="9875520" cy="182880"/>
           </a:xfrm>
           <a:prstGeom prst="rect">
             <a:avLst/>
@@ -4938,7 +4595,7 @@
               <a:rPr>
                 <a:latin typeface="Inter"/>
               </a:rPr>
-              <a:t>BENCHMARK IDENTITY REMAINS ADVISORY FOR THE REVIEWED CANDIDATES</a:t>
+              <a:t>BENCHMARK MATCHES ARE SUGGESTED, NOT YET CONFIRMED</a:t>
             </a:r>
           </a:p>
         </p:txBody>
@@ -4946,48 +4603,6 @@
       <p:sp>
         <p:nvSpPr>
           <p:cNvPr id="4" name="TextBox 3"/>
-          <p:cNvSpPr txBox="1"/>
-          <p:nvPr/>
-        </p:nvSpPr>
-        <p:spPr>
-          <a:xfrm>
-            <a:off x="5897880" y="310896"/>
-            <a:ext cx="4800600" cy="256032"/>
-          </a:xfrm>
-          <a:prstGeom prst="rect">
-            <a:avLst/>
-          </a:prstGeom>
-          <a:noFill/>
-        </p:spPr>
-        <p:txBody>
-          <a:bodyPr wrap="none" lIns="9144" rIns="9144" tIns="9144" bIns="9144" anchor="t">
-            <a:spAutoFit/>
-          </a:bodyPr>
-          <a:lstStyle/>
-          <a:p>
-            <a:pPr algn="r">
-              <a:spcAft>
-                <a:spcPts val="0"/>
-              </a:spcAft>
-              <a:defRPr sz="680" b="1">
-                <a:solidFill>
-                  <a:srgbClr val="4F6B00"/>
-                </a:solidFill>
-                <a:latin typeface="Inter"/>
-              </a:defRPr>
-            </a:pPr>
-            <a:r>
-              <a:rPr>
-                <a:latin typeface="Inter"/>
-              </a:rPr>
-              <a:t>Illustrative, Gradient Maintained — demo data, not the client's holdings or managers</a:t>
-            </a:r>
-          </a:p>
-        </p:txBody>
-      </p:sp>
-      <p:sp>
-        <p:nvSpPr>
-          <p:cNvPr id="5" name="TextBox 4"/>
           <p:cNvSpPr txBox="1"/>
           <p:nvPr/>
         </p:nvSpPr>
@@ -5029,7 +4644,7 @@
       </p:sp>
       <p:sp>
         <p:nvSpPr>
-          <p:cNvPr id="6" name="Rectangle 5"/>
+          <p:cNvPr id="5" name="Rectangle 4"/>
           <p:cNvSpPr/>
           <p:nvPr/>
         </p:nvSpPr>
@@ -5078,7 +4693,7 @@
       </p:sp>
       <p:sp>
         <p:nvSpPr>
-          <p:cNvPr id="7" name="Rectangle 6"/>
+          <p:cNvPr id="6" name="Rectangle 5"/>
           <p:cNvSpPr/>
           <p:nvPr/>
         </p:nvSpPr>
@@ -5127,7 +4742,7 @@
       </p:sp>
       <p:sp>
         <p:nvSpPr>
-          <p:cNvPr id="8" name="TextBox 7"/>
+          <p:cNvPr id="7" name="TextBox 6"/>
           <p:cNvSpPr txBox="1"/>
           <p:nvPr/>
         </p:nvSpPr>
@@ -5169,7 +4784,7 @@
       </p:sp>
       <p:graphicFrame>
         <p:nvGraphicFramePr>
-          <p:cNvPr id="9" name="Table 8"/>
+          <p:cNvPr id="8" name="Table 7"/>
           <p:cNvGraphicFramePr>
             <a:graphicFrameLocks noGrp="1"/>
           </p:cNvGraphicFramePr>
@@ -5318,7 +4933,7 @@
                         <a:rPr>
                           <a:latin typeface="Inter"/>
                         </a:rPr>
-                        <a:t>● unavailable</a:t>
+                        <a:t>● Not available</a:t>
                       </a:r>
                     </a:p>
                   </a:txBody>
@@ -5345,7 +4960,7 @@
                         <a:rPr>
                           <a:latin typeface="Inter"/>
                         </a:rPr>
-                        <a:t>Canonical match unavailable [S1]</a:t>
+                        <a:t>Match not confirmed [S1]</a:t>
                       </a:r>
                     </a:p>
                   </a:txBody>
@@ -5362,7 +4977,7 @@
       </p:graphicFrame>
       <p:sp>
         <p:nvSpPr>
-          <p:cNvPr id="10" name="Rectangle 9"/>
+          <p:cNvPr id="9" name="Rectangle 8"/>
           <p:cNvSpPr/>
           <p:nvPr/>
         </p:nvSpPr>
@@ -5411,7 +5026,7 @@
       </p:sp>
       <p:sp>
         <p:nvSpPr>
-          <p:cNvPr id="11" name="TextBox 10"/>
+          <p:cNvPr id="10" name="TextBox 9"/>
           <p:cNvSpPr txBox="1"/>
           <p:nvPr/>
         </p:nvSpPr>
@@ -5453,7 +5068,7 @@
       </p:sp>
       <p:sp>
         <p:nvSpPr>
-          <p:cNvPr id="12" name="TextBox 11"/>
+          <p:cNvPr id="11" name="TextBox 10"/>
           <p:cNvSpPr txBox="1"/>
           <p:nvPr/>
         </p:nvSpPr>
@@ -5495,7 +5110,7 @@
       </p:sp>
       <p:sp>
         <p:nvSpPr>
-          <p:cNvPr id="13" name="TextBox 12"/>
+          <p:cNvPr id="12" name="TextBox 11"/>
           <p:cNvSpPr txBox="1"/>
           <p:nvPr/>
         </p:nvSpPr>
@@ -5611,7 +5226,7 @@
         <p:spPr>
           <a:xfrm>
             <a:off x="640080" y="329184"/>
-            <a:ext cx="5303520" cy="182880"/>
+            <a:ext cx="9875520" cy="182880"/>
           </a:xfrm>
           <a:prstGeom prst="rect">
             <a:avLst/>
@@ -5652,48 +5267,6 @@
         </p:nvSpPr>
         <p:spPr>
           <a:xfrm>
-            <a:off x="5897880" y="310896"/>
-            <a:ext cx="4800600" cy="256032"/>
-          </a:xfrm>
-          <a:prstGeom prst="rect">
-            <a:avLst/>
-          </a:prstGeom>
-          <a:noFill/>
-        </p:spPr>
-        <p:txBody>
-          <a:bodyPr wrap="none" lIns="9144" rIns="9144" tIns="9144" bIns="9144" anchor="t">
-            <a:spAutoFit/>
-          </a:bodyPr>
-          <a:lstStyle/>
-          <a:p>
-            <a:pPr algn="r">
-              <a:spcAft>
-                <a:spcPts val="0"/>
-              </a:spcAft>
-              <a:defRPr sz="680" b="1">
-                <a:solidFill>
-                  <a:srgbClr val="4F6B00"/>
-                </a:solidFill>
-                <a:latin typeface="Inter"/>
-              </a:defRPr>
-            </a:pPr>
-            <a:r>
-              <a:rPr>
-                <a:latin typeface="Inter"/>
-              </a:rPr>
-              <a:t>Illustrative, Gradient Maintained — demo data, not the client's holdings or managers</a:t>
-            </a:r>
-          </a:p>
-        </p:txBody>
-      </p:sp>
-      <p:sp>
-        <p:nvSpPr>
-          <p:cNvPr id="5" name="TextBox 4"/>
-          <p:cNvSpPr txBox="1"/>
-          <p:nvPr/>
-        </p:nvSpPr>
-        <p:spPr>
-          <a:xfrm>
             <a:off x="640080" y="566928"/>
             <a:ext cx="10058400" cy="530352"/>
           </a:xfrm>
@@ -5730,7 +5303,7 @@
       </p:sp>
       <p:sp>
         <p:nvSpPr>
-          <p:cNvPr id="6" name="Rectangle 5"/>
+          <p:cNvPr id="5" name="Rectangle 4"/>
           <p:cNvSpPr/>
           <p:nvPr/>
         </p:nvSpPr>
@@ -5779,7 +5352,7 @@
       </p:sp>
       <p:sp>
         <p:nvSpPr>
-          <p:cNvPr id="7" name="Rectangle 6"/>
+          <p:cNvPr id="6" name="Rectangle 5"/>
           <p:cNvSpPr/>
           <p:nvPr/>
         </p:nvSpPr>
@@ -5828,7 +5401,7 @@
       </p:sp>
       <p:sp>
         <p:nvSpPr>
-          <p:cNvPr id="8" name="TextBox 7"/>
+          <p:cNvPr id="7" name="TextBox 6"/>
           <p:cNvSpPr txBox="1"/>
           <p:nvPr/>
         </p:nvSpPr>
@@ -5870,7 +5443,7 @@
       </p:sp>
       <p:sp>
         <p:nvSpPr>
-          <p:cNvPr id="9" name="Rectangle 8"/>
+          <p:cNvPr id="8" name="Rectangle 7"/>
           <p:cNvSpPr/>
           <p:nvPr/>
         </p:nvSpPr>
@@ -5919,7 +5492,7 @@
       </p:sp>
       <p:sp>
         <p:nvSpPr>
-          <p:cNvPr id="10" name="Rectangle 9"/>
+          <p:cNvPr id="9" name="Rectangle 8"/>
           <p:cNvSpPr/>
           <p:nvPr/>
         </p:nvSpPr>
@@ -5968,7 +5541,7 @@
       </p:sp>
       <p:sp>
         <p:nvSpPr>
-          <p:cNvPr id="11" name="TextBox 10"/>
+          <p:cNvPr id="10" name="TextBox 9"/>
           <p:cNvSpPr txBox="1"/>
           <p:nvPr/>
         </p:nvSpPr>
@@ -6010,7 +5583,7 @@
       </p:sp>
       <p:sp>
         <p:nvSpPr>
-          <p:cNvPr id="12" name="TextBox 11"/>
+          <p:cNvPr id="11" name="TextBox 10"/>
           <p:cNvSpPr txBox="1"/>
           <p:nvPr/>
         </p:nvSpPr>
@@ -6045,14 +5618,14 @@
               <a:rPr>
                 <a:latin typeface="Inter"/>
               </a:rPr>
-              <a:t>Not available — governed comparison result missing [S1].</a:t>
-            </a:r>
-          </a:p>
-        </p:txBody>
-      </p:sp>
-      <p:sp>
-        <p:nvSpPr>
-          <p:cNvPr id="13" name="Rectangle 12"/>
+              <a:t>The comparison tool returned no results for these candidates [S1].</a:t>
+            </a:r>
+          </a:p>
+        </p:txBody>
+      </p:sp>
+      <p:sp>
+        <p:nvSpPr>
+          <p:cNvPr id="12" name="Rectangle 11"/>
           <p:cNvSpPr/>
           <p:nvPr/>
         </p:nvSpPr>
@@ -6101,7 +5674,7 @@
       </p:sp>
       <p:sp>
         <p:nvSpPr>
-          <p:cNvPr id="14" name="Rectangle 13"/>
+          <p:cNvPr id="13" name="Rectangle 12"/>
           <p:cNvSpPr/>
           <p:nvPr/>
         </p:nvSpPr>
@@ -6150,7 +5723,7 @@
       </p:sp>
       <p:sp>
         <p:nvSpPr>
-          <p:cNvPr id="15" name="TextBox 14"/>
+          <p:cNvPr id="14" name="TextBox 13"/>
           <p:cNvSpPr txBox="1"/>
           <p:nvPr/>
         </p:nvSpPr>
@@ -6192,7 +5765,7 @@
       </p:sp>
       <p:sp>
         <p:nvSpPr>
-          <p:cNvPr id="16" name="TextBox 15"/>
+          <p:cNvPr id="15" name="TextBox 14"/>
           <p:cNvSpPr txBox="1"/>
           <p:nvPr/>
         </p:nvSpPr>
@@ -6227,14 +5800,14 @@
               <a:rPr>
                 <a:latin typeface="Inter"/>
               </a:rPr>
-              <a:t>Observation: Comparative metrics are unavailable [S1]. Why it matters: No ranking is supportable. Uncertainty: Missing evidence may differ by manager. What would change the view: A governed comparison…</a:t>
-            </a:r>
-          </a:p>
-        </p:txBody>
-      </p:sp>
-      <p:sp>
-        <p:nvSpPr>
-          <p:cNvPr id="17" name="Rectangle 16"/>
+              <a:t>Observation: No comparison metrics were returned for the four candidates [S1]. Why it matters: Without them, no ranking of the candidates is supportable. Uncertainty: The missing evidence may…</a:t>
+            </a:r>
+          </a:p>
+        </p:txBody>
+      </p:sp>
+      <p:sp>
+        <p:nvSpPr>
+          <p:cNvPr id="16" name="Rectangle 15"/>
           <p:cNvSpPr/>
           <p:nvPr/>
         </p:nvSpPr>
@@ -6283,7 +5856,7 @@
       </p:sp>
       <p:sp>
         <p:nvSpPr>
-          <p:cNvPr id="18" name="TextBox 17"/>
+          <p:cNvPr id="17" name="TextBox 16"/>
           <p:cNvSpPr txBox="1"/>
           <p:nvPr/>
         </p:nvSpPr>
@@ -6325,7 +5898,7 @@
       </p:sp>
       <p:sp>
         <p:nvSpPr>
-          <p:cNvPr id="19" name="TextBox 18"/>
+          <p:cNvPr id="18" name="TextBox 17"/>
           <p:cNvSpPr txBox="1"/>
           <p:nvPr/>
         </p:nvSpPr>
@@ -6367,7 +5940,7 @@
       </p:sp>
       <p:sp>
         <p:nvSpPr>
-          <p:cNvPr id="20" name="TextBox 19"/>
+          <p:cNvPr id="19" name="TextBox 18"/>
           <p:cNvSpPr txBox="1"/>
           <p:nvPr/>
         </p:nvSpPr>
@@ -6483,7 +6056,7 @@
         <p:spPr>
           <a:xfrm>
             <a:off x="640080" y="329184"/>
-            <a:ext cx="5303520" cy="182880"/>
+            <a:ext cx="9875520" cy="182880"/>
           </a:xfrm>
           <a:prstGeom prst="rect">
             <a:avLst/>
@@ -6524,48 +6097,6 @@
         </p:nvSpPr>
         <p:spPr>
           <a:xfrm>
-            <a:off x="5897880" y="310896"/>
-            <a:ext cx="4800600" cy="256032"/>
-          </a:xfrm>
-          <a:prstGeom prst="rect">
-            <a:avLst/>
-          </a:prstGeom>
-          <a:noFill/>
-        </p:spPr>
-        <p:txBody>
-          <a:bodyPr wrap="none" lIns="9144" rIns="9144" tIns="9144" bIns="9144" anchor="t">
-            <a:spAutoFit/>
-          </a:bodyPr>
-          <a:lstStyle/>
-          <a:p>
-            <a:pPr algn="r">
-              <a:spcAft>
-                <a:spcPts val="0"/>
-              </a:spcAft>
-              <a:defRPr sz="680" b="1">
-                <a:solidFill>
-                  <a:srgbClr val="4F6B00"/>
-                </a:solidFill>
-                <a:latin typeface="Inter"/>
-              </a:defRPr>
-            </a:pPr>
-            <a:r>
-              <a:rPr>
-                <a:latin typeface="Inter"/>
-              </a:rPr>
-              <a:t>Illustrative, Gradient Maintained — demo data, not the client's holdings or managers</a:t>
-            </a:r>
-          </a:p>
-        </p:txBody>
-      </p:sp>
-      <p:sp>
-        <p:nvSpPr>
-          <p:cNvPr id="5" name="TextBox 4"/>
-          <p:cNvSpPr txBox="1"/>
-          <p:nvPr/>
-        </p:nvSpPr>
-        <p:spPr>
-          <a:xfrm>
             <a:off x="640080" y="566928"/>
             <a:ext cx="10058400" cy="530352"/>
           </a:xfrm>
@@ -6602,7 +6133,7 @@
       </p:sp>
       <p:sp>
         <p:nvSpPr>
-          <p:cNvPr id="6" name="Rectangle 5"/>
+          <p:cNvPr id="5" name="Rectangle 4"/>
           <p:cNvSpPr/>
           <p:nvPr/>
         </p:nvSpPr>
@@ -6651,7 +6182,7 @@
       </p:sp>
       <p:sp>
         <p:nvSpPr>
-          <p:cNvPr id="7" name="Rectangle 6"/>
+          <p:cNvPr id="6" name="Rectangle 5"/>
           <p:cNvSpPr/>
           <p:nvPr/>
         </p:nvSpPr>
@@ -6700,7 +6231,7 @@
       </p:sp>
       <p:sp>
         <p:nvSpPr>
-          <p:cNvPr id="8" name="TextBox 7"/>
+          <p:cNvPr id="7" name="TextBox 6"/>
           <p:cNvSpPr txBox="1"/>
           <p:nvPr/>
         </p:nvSpPr>
@@ -6742,7 +6273,7 @@
       </p:sp>
       <p:sp>
         <p:nvSpPr>
-          <p:cNvPr id="9" name="Rectangle 8"/>
+          <p:cNvPr id="8" name="Rectangle 7"/>
           <p:cNvSpPr/>
           <p:nvPr/>
         </p:nvSpPr>
@@ -6791,7 +6322,7 @@
       </p:sp>
       <p:sp>
         <p:nvSpPr>
-          <p:cNvPr id="10" name="Rectangle 9"/>
+          <p:cNvPr id="9" name="Rectangle 8"/>
           <p:cNvSpPr/>
           <p:nvPr/>
         </p:nvSpPr>
@@ -6840,7 +6371,7 @@
       </p:sp>
       <p:sp>
         <p:nvSpPr>
-          <p:cNvPr id="11" name="TextBox 10"/>
+          <p:cNvPr id="10" name="TextBox 9"/>
           <p:cNvSpPr txBox="1"/>
           <p:nvPr/>
         </p:nvSpPr>
@@ -6882,7 +6413,7 @@
       </p:sp>
       <p:sp>
         <p:nvSpPr>
-          <p:cNvPr id="12" name="TextBox 11"/>
+          <p:cNvPr id="11" name="TextBox 10"/>
           <p:cNvSpPr txBox="1"/>
           <p:nvPr/>
         </p:nvSpPr>
@@ -6917,14 +6448,14 @@
               <a:rPr>
                 <a:latin typeface="Inter"/>
               </a:rPr>
-              <a:t>Not available — relative-return result missing [S1].</a:t>
-            </a:r>
-          </a:p>
-        </p:txBody>
-      </p:sp>
-      <p:sp>
-        <p:nvSpPr>
-          <p:cNvPr id="13" name="Rectangle 12"/>
+              <a:t>Benchmark-relative returns were not returned [S1].</a:t>
+            </a:r>
+          </a:p>
+        </p:txBody>
+      </p:sp>
+      <p:sp>
+        <p:nvSpPr>
+          <p:cNvPr id="12" name="Rectangle 11"/>
           <p:cNvSpPr/>
           <p:nvPr/>
         </p:nvSpPr>
@@ -6973,7 +6504,7 @@
       </p:sp>
       <p:sp>
         <p:nvSpPr>
-          <p:cNvPr id="14" name="Rectangle 13"/>
+          <p:cNvPr id="13" name="Rectangle 12"/>
           <p:cNvSpPr/>
           <p:nvPr/>
         </p:nvSpPr>
@@ -7022,7 +6553,7 @@
       </p:sp>
       <p:sp>
         <p:nvSpPr>
-          <p:cNvPr id="15" name="TextBox 14"/>
+          <p:cNvPr id="14" name="TextBox 13"/>
           <p:cNvSpPr txBox="1"/>
           <p:nvPr/>
         </p:nvSpPr>
@@ -7064,7 +6595,7 @@
       </p:sp>
       <p:sp>
         <p:nvSpPr>
-          <p:cNvPr id="16" name="TextBox 15"/>
+          <p:cNvPr id="15" name="TextBox 14"/>
           <p:cNvSpPr txBox="1"/>
           <p:nvPr/>
         </p:nvSpPr>
@@ -7099,14 +6630,14 @@
               <a:rPr>
                 <a:latin typeface="Inter"/>
               </a:rPr>
-              <a:t>Observation: Relative evidence is unavailable [S1]. Why it matters: Benchmark-relative behavior is unknown. Uncertainty: Capture may vary by window. What would change the view: A governed relative-return result.</a:t>
-            </a:r>
-          </a:p>
-        </p:txBody>
-      </p:sp>
-      <p:sp>
-        <p:nvSpPr>
-          <p:cNvPr id="17" name="Rectangle 16"/>
+              <a:t>Observation: Benchmark-relative returns were not returned for any candidate [S1]. Why it matters: Behavior against the mandate benchmark is unknown. Uncertainty: Up and down capture may vary by…</a:t>
+            </a:r>
+          </a:p>
+        </p:txBody>
+      </p:sp>
+      <p:sp>
+        <p:nvSpPr>
+          <p:cNvPr id="16" name="Rectangle 15"/>
           <p:cNvSpPr/>
           <p:nvPr/>
         </p:nvSpPr>
@@ -7155,7 +6686,7 @@
       </p:sp>
       <p:sp>
         <p:nvSpPr>
-          <p:cNvPr id="18" name="TextBox 17"/>
+          <p:cNvPr id="17" name="TextBox 16"/>
           <p:cNvSpPr txBox="1"/>
           <p:nvPr/>
         </p:nvSpPr>
@@ -7197,7 +6728,7 @@
       </p:sp>
       <p:sp>
         <p:nvSpPr>
-          <p:cNvPr id="19" name="TextBox 18"/>
+          <p:cNvPr id="18" name="TextBox 17"/>
           <p:cNvSpPr txBox="1"/>
           <p:nvPr/>
         </p:nvSpPr>
@@ -7239,7 +6770,7 @@
       </p:sp>
       <p:sp>
         <p:nvSpPr>
-          <p:cNvPr id="20" name="TextBox 19"/>
+          <p:cNvPr id="19" name="TextBox 18"/>
           <p:cNvSpPr txBox="1"/>
           <p:nvPr/>
         </p:nvSpPr>
@@ -7355,7 +6886,7 @@
         <p:spPr>
           <a:xfrm>
             <a:off x="640080" y="329184"/>
-            <a:ext cx="5303520" cy="182880"/>
+            <a:ext cx="9875520" cy="182880"/>
           </a:xfrm>
           <a:prstGeom prst="rect">
             <a:avLst/>
@@ -7396,48 +6927,6 @@
         </p:nvSpPr>
         <p:spPr>
           <a:xfrm>
-            <a:off x="5897880" y="310896"/>
-            <a:ext cx="4800600" cy="256032"/>
-          </a:xfrm>
-          <a:prstGeom prst="rect">
-            <a:avLst/>
-          </a:prstGeom>
-          <a:noFill/>
-        </p:spPr>
-        <p:txBody>
-          <a:bodyPr wrap="none" lIns="9144" rIns="9144" tIns="9144" bIns="9144" anchor="t">
-            <a:spAutoFit/>
-          </a:bodyPr>
-          <a:lstStyle/>
-          <a:p>
-            <a:pPr algn="r">
-              <a:spcAft>
-                <a:spcPts val="0"/>
-              </a:spcAft>
-              <a:defRPr sz="680" b="1">
-                <a:solidFill>
-                  <a:srgbClr val="4F6B00"/>
-                </a:solidFill>
-                <a:latin typeface="Inter"/>
-              </a:defRPr>
-            </a:pPr>
-            <a:r>
-              <a:rPr>
-                <a:latin typeface="Inter"/>
-              </a:rPr>
-              <a:t>Illustrative, Gradient Maintained — demo data, not the client's holdings or managers</a:t>
-            </a:r>
-          </a:p>
-        </p:txBody>
-      </p:sp>
-      <p:sp>
-        <p:nvSpPr>
-          <p:cNvPr id="5" name="TextBox 4"/>
-          <p:cNvSpPr txBox="1"/>
-          <p:nvPr/>
-        </p:nvSpPr>
-        <p:spPr>
-          <a:xfrm>
             <a:off x="640080" y="566928"/>
             <a:ext cx="10058400" cy="530352"/>
           </a:xfrm>
@@ -7474,7 +6963,7 @@
       </p:sp>
       <p:sp>
         <p:nvSpPr>
-          <p:cNvPr id="6" name="Rectangle 5"/>
+          <p:cNvPr id="5" name="Rectangle 4"/>
           <p:cNvSpPr/>
           <p:nvPr/>
         </p:nvSpPr>
@@ -7523,7 +7012,7 @@
       </p:sp>
       <p:sp>
         <p:nvSpPr>
-          <p:cNvPr id="7" name="Rectangle 6"/>
+          <p:cNvPr id="6" name="Rectangle 5"/>
           <p:cNvSpPr/>
           <p:nvPr/>
         </p:nvSpPr>
@@ -7572,7 +7061,7 @@
       </p:sp>
       <p:sp>
         <p:nvSpPr>
-          <p:cNvPr id="8" name="TextBox 7"/>
+          <p:cNvPr id="7" name="TextBox 6"/>
           <p:cNvSpPr txBox="1"/>
           <p:nvPr/>
         </p:nvSpPr>
@@ -7614,7 +7103,7 @@
       </p:sp>
       <p:sp>
         <p:nvSpPr>
-          <p:cNvPr id="9" name="Rectangle 8"/>
+          <p:cNvPr id="8" name="Rectangle 7"/>
           <p:cNvSpPr/>
           <p:nvPr/>
         </p:nvSpPr>
@@ -7663,7 +7152,7 @@
       </p:sp>
       <p:sp>
         <p:nvSpPr>
-          <p:cNvPr id="10" name="Rectangle 9"/>
+          <p:cNvPr id="9" name="Rectangle 8"/>
           <p:cNvSpPr/>
           <p:nvPr/>
         </p:nvSpPr>
@@ -7712,7 +7201,7 @@
       </p:sp>
       <p:sp>
         <p:nvSpPr>
-          <p:cNvPr id="11" name="TextBox 10"/>
+          <p:cNvPr id="10" name="TextBox 9"/>
           <p:cNvSpPr txBox="1"/>
           <p:nvPr/>
         </p:nvSpPr>
@@ -7754,7 +7243,7 @@
       </p:sp>
       <p:sp>
         <p:nvSpPr>
-          <p:cNvPr id="12" name="TextBox 11"/>
+          <p:cNvPr id="11" name="TextBox 10"/>
           <p:cNvSpPr txBox="1"/>
           <p:nvPr/>
         </p:nvSpPr>
@@ -7789,14 +7278,14 @@
               <a:rPr>
                 <a:latin typeface="Inter"/>
               </a:rPr>
-              <a:t>Not available — governed robustness and correlation results missing [S1].</a:t>
-            </a:r>
-          </a:p>
-        </p:txBody>
-      </p:sp>
-      <p:sp>
-        <p:nvSpPr>
-          <p:cNvPr id="13" name="Rectangle 12"/>
+              <a:t>Persistence and correlation tests were not returned [S1].</a:t>
+            </a:r>
+          </a:p>
+        </p:txBody>
+      </p:sp>
+      <p:sp>
+        <p:nvSpPr>
+          <p:cNvPr id="12" name="Rectangle 11"/>
           <p:cNvSpPr/>
           <p:nvPr/>
         </p:nvSpPr>
@@ -7845,7 +7334,7 @@
       </p:sp>
       <p:sp>
         <p:nvSpPr>
-          <p:cNvPr id="14" name="Rectangle 13"/>
+          <p:cNvPr id="13" name="Rectangle 12"/>
           <p:cNvSpPr/>
           <p:nvPr/>
         </p:nvSpPr>
@@ -7894,7 +7383,7 @@
       </p:sp>
       <p:sp>
         <p:nvSpPr>
-          <p:cNvPr id="15" name="TextBox 14"/>
+          <p:cNvPr id="14" name="TextBox 13"/>
           <p:cNvSpPr txBox="1"/>
           <p:nvPr/>
         </p:nvSpPr>
@@ -7936,7 +7425,7 @@
       </p:sp>
       <p:sp>
         <p:nvSpPr>
-          <p:cNvPr id="16" name="TextBox 15"/>
+          <p:cNvPr id="15" name="TextBox 14"/>
           <p:cNvSpPr txBox="1"/>
           <p:nvPr/>
         </p:nvSpPr>
@@ -7971,14 +7460,14 @@
               <a:rPr>
                 <a:latin typeface="Inter"/>
               </a:rPr>
-              <a:t>Observation: Robustness evidence is unavailable [S1]. Why it matters: Persistence cannot be assessed. Uncertainty: Results may depend on dates. What would change the view: Governed window tests.</a:t>
-            </a:r>
-          </a:p>
-        </p:txBody>
-      </p:sp>
-      <p:sp>
-        <p:nvSpPr>
-          <p:cNvPr id="17" name="Rectangle 16"/>
+              <a:t>Observation: Persistence and correlation tests were not returned [S1]. Why it matters: Whether results repeat across periods cannot be assessed. Uncertainty: Results may depend on the dates chosen…</a:t>
+            </a:r>
+          </a:p>
+        </p:txBody>
+      </p:sp>
+      <p:sp>
+        <p:nvSpPr>
+          <p:cNvPr id="16" name="Rectangle 15"/>
           <p:cNvSpPr/>
           <p:nvPr/>
         </p:nvSpPr>
@@ -8027,7 +7516,7 @@
       </p:sp>
       <p:sp>
         <p:nvSpPr>
-          <p:cNvPr id="18" name="TextBox 17"/>
+          <p:cNvPr id="17" name="TextBox 16"/>
           <p:cNvSpPr txBox="1"/>
           <p:nvPr/>
         </p:nvSpPr>
@@ -8069,7 +7558,7 @@
       </p:sp>
       <p:sp>
         <p:nvSpPr>
-          <p:cNvPr id="19" name="TextBox 18"/>
+          <p:cNvPr id="18" name="TextBox 17"/>
           <p:cNvSpPr txBox="1"/>
           <p:nvPr/>
         </p:nvSpPr>
@@ -8111,7 +7600,7 @@
       </p:sp>
       <p:sp>
         <p:nvSpPr>
-          <p:cNvPr id="20" name="TextBox 19"/>
+          <p:cNvPr id="19" name="TextBox 18"/>
           <p:cNvSpPr txBox="1"/>
           <p:nvPr/>
         </p:nvSpPr>
@@ -8227,7 +7716,7 @@
         <p:spPr>
           <a:xfrm>
             <a:off x="640080" y="329184"/>
-            <a:ext cx="5303520" cy="182880"/>
+            <a:ext cx="9875520" cy="182880"/>
           </a:xfrm>
           <a:prstGeom prst="rect">
             <a:avLst/>
@@ -8255,7 +7744,7 @@
               <a:rPr>
                 <a:latin typeface="Inter"/>
               </a:rPr>
-              <a:t>ONE GOVERNED EVIDENCE REQUEST REMAINS</a:t>
+              <a:t>ONE DATA REQUEST REMAINS</a:t>
             </a:r>
           </a:p>
         </p:txBody>
@@ -8263,48 +7752,6 @@
       <p:sp>
         <p:nvSpPr>
           <p:cNvPr id="4" name="TextBox 3"/>
-          <p:cNvSpPr txBox="1"/>
-          <p:nvPr/>
-        </p:nvSpPr>
-        <p:spPr>
-          <a:xfrm>
-            <a:off x="5897880" y="310896"/>
-            <a:ext cx="4800600" cy="256032"/>
-          </a:xfrm>
-          <a:prstGeom prst="rect">
-            <a:avLst/>
-          </a:prstGeom>
-          <a:noFill/>
-        </p:spPr>
-        <p:txBody>
-          <a:bodyPr wrap="none" lIns="9144" rIns="9144" tIns="9144" bIns="9144" anchor="t">
-            <a:spAutoFit/>
-          </a:bodyPr>
-          <a:lstStyle/>
-          <a:p>
-            <a:pPr algn="r">
-              <a:spcAft>
-                <a:spcPts val="0"/>
-              </a:spcAft>
-              <a:defRPr sz="680" b="1">
-                <a:solidFill>
-                  <a:srgbClr val="4F6B00"/>
-                </a:solidFill>
-                <a:latin typeface="Inter"/>
-              </a:defRPr>
-            </a:pPr>
-            <a:r>
-              <a:rPr>
-                <a:latin typeface="Inter"/>
-              </a:rPr>
-              <a:t>Illustrative, Gradient Maintained — demo data, not the client's holdings or managers</a:t>
-            </a:r>
-          </a:p>
-        </p:txBody>
-      </p:sp>
-      <p:sp>
-        <p:nvSpPr>
-          <p:cNvPr id="5" name="TextBox 4"/>
           <p:cNvSpPr txBox="1"/>
           <p:nvPr/>
         </p:nvSpPr>
@@ -8346,7 +7793,7 @@
       </p:sp>
       <p:sp>
         <p:nvSpPr>
-          <p:cNvPr id="6" name="Rectangle 5"/>
+          <p:cNvPr id="5" name="Rectangle 4"/>
           <p:cNvSpPr/>
           <p:nvPr/>
         </p:nvSpPr>
@@ -8395,7 +7842,7 @@
       </p:sp>
       <p:sp>
         <p:nvSpPr>
-          <p:cNvPr id="7" name="Rectangle 6"/>
+          <p:cNvPr id="6" name="Rectangle 5"/>
           <p:cNvSpPr/>
           <p:nvPr/>
         </p:nvSpPr>
@@ -8444,7 +7891,7 @@
       </p:sp>
       <p:sp>
         <p:nvSpPr>
-          <p:cNvPr id="8" name="TextBox 7"/>
+          <p:cNvPr id="7" name="TextBox 6"/>
           <p:cNvSpPr txBox="1"/>
           <p:nvPr/>
         </p:nvSpPr>
@@ -8486,7 +7933,7 @@
       </p:sp>
       <p:sp>
         <p:nvSpPr>
-          <p:cNvPr id="9" name="TextBox 8"/>
+          <p:cNvPr id="8" name="TextBox 7"/>
           <p:cNvSpPr txBox="1"/>
           <p:nvPr/>
         </p:nvSpPr>
@@ -8521,7 +7968,7 @@
               <a:rPr>
                 <a:latin typeface="Inter"/>
               </a:rPr>
-              <a:t>01  Return canonical benchmark and comparison evidence.</a:t>
+              <a:t>01  Confirm the benchmark and return the comparison results.</a:t>
             </a:r>
             <a:br/>
             <a:r>
@@ -8535,7 +7982,7 @@
       </p:sp>
       <p:sp>
         <p:nvSpPr>
-          <p:cNvPr id="10" name="Rectangle 9"/>
+          <p:cNvPr id="9" name="Rectangle 8"/>
           <p:cNvSpPr/>
           <p:nvPr/>
         </p:nvSpPr>
@@ -8584,7 +8031,7 @@
       </p:sp>
       <p:sp>
         <p:nvSpPr>
-          <p:cNvPr id="11" name="TextBox 10"/>
+          <p:cNvPr id="10" name="TextBox 9"/>
           <p:cNvSpPr txBox="1"/>
           <p:nvPr/>
         </p:nvSpPr>
@@ -8626,7 +8073,7 @@
       </p:sp>
       <p:sp>
         <p:nvSpPr>
-          <p:cNvPr id="12" name="TextBox 11"/>
+          <p:cNvPr id="11" name="TextBox 10"/>
           <p:cNvSpPr txBox="1"/>
           <p:nvPr/>
         </p:nvSpPr>
@@ -8668,7 +8115,7 @@
       </p:sp>
       <p:sp>
         <p:nvSpPr>
-          <p:cNvPr id="13" name="TextBox 12"/>
+          <p:cNvPr id="12" name="TextBox 11"/>
           <p:cNvSpPr txBox="1"/>
           <p:nvPr/>
         </p:nvSpPr>
@@ -8784,7 +8231,7 @@
         <p:spPr>
           <a:xfrm>
             <a:off x="640080" y="329184"/>
-            <a:ext cx="5303520" cy="182880"/>
+            <a:ext cx="9875520" cy="182880"/>
           </a:xfrm>
           <a:prstGeom prst="rect">
             <a:avLst/>
@@ -8825,48 +8272,6 @@
         </p:nvSpPr>
         <p:spPr>
           <a:xfrm>
-            <a:off x="5897880" y="310896"/>
-            <a:ext cx="4800600" cy="256032"/>
-          </a:xfrm>
-          <a:prstGeom prst="rect">
-            <a:avLst/>
-          </a:prstGeom>
-          <a:noFill/>
-        </p:spPr>
-        <p:txBody>
-          <a:bodyPr wrap="none" lIns="9144" rIns="9144" tIns="9144" bIns="9144" anchor="t">
-            <a:spAutoFit/>
-          </a:bodyPr>
-          <a:lstStyle/>
-          <a:p>
-            <a:pPr algn="r">
-              <a:spcAft>
-                <a:spcPts val="0"/>
-              </a:spcAft>
-              <a:defRPr sz="680" b="1">
-                <a:solidFill>
-                  <a:srgbClr val="4F6B00"/>
-                </a:solidFill>
-                <a:latin typeface="Inter"/>
-              </a:defRPr>
-            </a:pPr>
-            <a:r>
-              <a:rPr>
-                <a:latin typeface="Inter"/>
-              </a:rPr>
-              <a:t>Illustrative, Gradient Maintained — demo data, not the client's holdings or managers</a:t>
-            </a:r>
-          </a:p>
-        </p:txBody>
-      </p:sp>
-      <p:sp>
-        <p:nvSpPr>
-          <p:cNvPr id="5" name="TextBox 4"/>
-          <p:cNvSpPr txBox="1"/>
-          <p:nvPr/>
-        </p:nvSpPr>
-        <p:spPr>
-          <a:xfrm>
             <a:off x="640080" y="566928"/>
             <a:ext cx="10058400" cy="530352"/>
           </a:xfrm>
@@ -8903,7 +8308,7 @@
       </p:sp>
       <p:sp>
         <p:nvSpPr>
-          <p:cNvPr id="6" name="Rectangle 5"/>
+          <p:cNvPr id="5" name="Rectangle 4"/>
           <p:cNvSpPr/>
           <p:nvPr/>
         </p:nvSpPr>
@@ -8952,7 +8357,7 @@
       </p:sp>
       <p:sp>
         <p:nvSpPr>
-          <p:cNvPr id="7" name="Rectangle 6"/>
+          <p:cNvPr id="6" name="Rectangle 5"/>
           <p:cNvSpPr/>
           <p:nvPr/>
         </p:nvSpPr>
@@ -9001,7 +8406,7 @@
       </p:sp>
       <p:sp>
         <p:nvSpPr>
-          <p:cNvPr id="8" name="TextBox 7"/>
+          <p:cNvPr id="7" name="TextBox 6"/>
           <p:cNvSpPr txBox="1"/>
           <p:nvPr/>
         </p:nvSpPr>
@@ -9043,7 +8448,7 @@
       </p:sp>
       <p:graphicFrame>
         <p:nvGraphicFramePr>
-          <p:cNvPr id="9" name="Table 8"/>
+          <p:cNvPr id="8" name="Table 7"/>
           <p:cNvGraphicFramePr>
             <a:graphicFrameLocks noGrp="1"/>
           </p:cNvGraphicFramePr>
@@ -9051,7 +8456,7 @@
         </p:nvGraphicFramePr>
         <p:xfrm>
           <a:off x="640080" y="1325880"/>
-          <a:ext cx="10908792" cy="1213522"/>
+          <a:ext cx="10908792" cy="2189987"/>
         </p:xfrm>
         <a:graphic>
           <a:graphicData uri="http://schemas.openxmlformats.org/drawingml/2006/table">
@@ -9061,16 +8466,12 @@
               </a:tblPr>
               <a:tblGrid>
                 <a:gridCol w="2011680"/>
-                <a:gridCol w="1112139"/>
-                <a:gridCol w="1112139"/>
-                <a:gridCol w="1112139"/>
-                <a:gridCol w="1112139"/>
-                <a:gridCol w="1112139"/>
-                <a:gridCol w="1112139"/>
-                <a:gridCol w="1112139"/>
-                <a:gridCol w="1112139"/>
+                <a:gridCol w="2224278"/>
+                <a:gridCol w="2224278"/>
+                <a:gridCol w="2224278"/>
+                <a:gridCol w="2224278"/>
               </a:tblGrid>
-              <a:tr h="606761">
+              <a:tr h="1094993">
                 <a:tc>
                   <a:txBody>
                     <a:bodyPr/>
@@ -9142,7 +8543,7 @@
                         <a:rPr>
                           <a:latin typeface="Inter"/>
                         </a:rPr>
-                        <a:t>Basis</a:t>
+                        <a:t>Source</a:t>
                       </a:r>
                     </a:p>
                   </a:txBody>
@@ -9169,7 +8570,312 @@
                         <a:rPr>
                           <a:latin typeface="Inter"/>
                         </a:rPr>
-                        <a:t>Tool / view</a:t>
+                        <a:t>As of</a:t>
+                      </a:r>
+                    </a:p>
+                  </a:txBody>
+                  <a:tcPr marL="54864" marR="54864" marT="27432" marB="27432" anchor="ctr">
+                    <a:solidFill>
+                      <a:srgbClr val="0D1117"/>
+                    </a:solidFill>
+                  </a:tcPr>
+                </a:tc>
+                <a:tc>
+                  <a:txBody>
+                    <a:bodyPr/>
+                    <a:lstStyle/>
+                    <a:p>
+                      <a:pPr>
+                        <a:defRPr sz="750" b="1">
+                          <a:solidFill>
+                            <a:srgbClr val="FFFFFF"/>
+                          </a:solidFill>
+                          <a:latin typeface="Inter"/>
+                        </a:defRPr>
+                      </a:pPr>
+                      <a:r>
+                        <a:rPr>
+                          <a:latin typeface="Inter"/>
+                        </a:rPr>
+                        <a:t>Check</a:t>
+                      </a:r>
+                    </a:p>
+                  </a:txBody>
+                  <a:tcPr marL="54864" marR="54864" marT="27432" marB="27432" anchor="ctr">
+                    <a:solidFill>
+                      <a:srgbClr val="0D1117"/>
+                    </a:solidFill>
+                  </a:tcPr>
+                </a:tc>
+              </a:tr>
+              <a:tr h="1094994">
+                <a:tc>
+                  <a:txBody>
+                    <a:bodyPr/>
+                    <a:lstStyle/>
+                    <a:p>
+                      <a:pPr>
+                        <a:defRPr sz="720" b="1">
+                          <a:solidFill>
+                            <a:srgbClr val="0D1117"/>
+                          </a:solidFill>
+                          <a:latin typeface="Inter"/>
+                        </a:defRPr>
+                      </a:pPr>
+                      <a:r>
+                        <a:rPr>
+                          <a:latin typeface="Inter"/>
+                        </a:rPr>
+                        <a:t>S1</a:t>
+                      </a:r>
+                    </a:p>
+                  </a:txBody>
+                  <a:tcPr marL="54864" marR="54864" marT="27432" marB="27432" anchor="ctr">
+                    <a:solidFill>
+                      <a:srgbClr val="FFFFFF"/>
+                    </a:solidFill>
+                  </a:tcPr>
+                </a:tc>
+                <a:tc>
+                  <a:txBody>
+                    <a:bodyPr/>
+                    <a:lstStyle/>
+                    <a:p>
+                      <a:pPr>
+                        <a:defRPr sz="720" b="0">
+                          <a:solidFill>
+                            <a:srgbClr val="0D1117"/>
+                          </a:solidFill>
+                          <a:latin typeface="Inter"/>
+                        </a:defRPr>
+                      </a:pPr>
+                      <a:r>
+                        <a:rPr>
+                          <a:latin typeface="Inter"/>
+                        </a:rPr>
+                        <a:t>Connector capabilities check</a:t>
+                      </a:r>
+                    </a:p>
+                  </a:txBody>
+                  <a:tcPr marL="54864" marR="54864" marT="27432" marB="27432" anchor="ctr">
+                    <a:solidFill>
+                      <a:srgbClr val="FFFFFF"/>
+                    </a:solidFill>
+                  </a:tcPr>
+                </a:tc>
+                <a:tc>
+                  <a:txBody>
+                    <a:bodyPr/>
+                    <a:lstStyle/>
+                    <a:p>
+                      <a:pPr>
+                        <a:defRPr sz="720" b="0">
+                          <a:solidFill>
+                            <a:srgbClr val="0D1117"/>
+                          </a:solidFill>
+                          <a:latin typeface="Inter"/>
+                        </a:defRPr>
+                      </a:pPr>
+                      <a:r>
+                        <a:rPr>
+                          <a:latin typeface="Inter"/>
+                        </a:rPr>
+                        <a:t>get_gradient_capabilities</a:t>
+                      </a:r>
+                    </a:p>
+                  </a:txBody>
+                  <a:tcPr marL="54864" marR="54864" marT="27432" marB="27432" anchor="ctr">
+                    <a:solidFill>
+                      <a:srgbClr val="FFFFFF"/>
+                    </a:solidFill>
+                  </a:tcPr>
+                </a:tc>
+                <a:tc>
+                  <a:txBody>
+                    <a:bodyPr/>
+                    <a:lstStyle/>
+                    <a:p>
+                      <a:pPr>
+                        <a:defRPr sz="720" b="0">
+                          <a:solidFill>
+                            <a:srgbClr val="0D1117"/>
+                          </a:solidFill>
+                          <a:latin typeface="Inter"/>
+                        </a:defRPr>
+                      </a:pPr>
+                      <a:r>
+                        <a:rPr>
+                          <a:latin typeface="Inter"/>
+                        </a:rPr>
+                        <a:t>2025-12-31</a:t>
+                      </a:r>
+                    </a:p>
+                  </a:txBody>
+                  <a:tcPr marL="54864" marR="54864" marT="27432" marB="27432" anchor="ctr">
+                    <a:solidFill>
+                      <a:srgbClr val="FFFFFF"/>
+                    </a:solidFill>
+                  </a:tcPr>
+                </a:tc>
+                <a:tc>
+                  <a:txBody>
+                    <a:bodyPr/>
+                    <a:lstStyle/>
+                    <a:p>
+                      <a:pPr>
+                        <a:defRPr sz="720" b="1">
+                          <a:solidFill>
+                            <a:srgbClr val="C6F432"/>
+                          </a:solidFill>
+                          <a:latin typeface="Inter"/>
+                        </a:defRPr>
+                      </a:pPr>
+                      <a:r>
+                        <a:rPr>
+                          <a:latin typeface="Inter"/>
+                        </a:rPr>
+                        <a:t>● Passed</a:t>
+                      </a:r>
+                    </a:p>
+                  </a:txBody>
+                  <a:tcPr marL="54864" marR="54864" marT="27432" marB="27432" anchor="ctr">
+                    <a:solidFill>
+                      <a:srgbClr val="F5F7F9"/>
+                    </a:solidFill>
+                  </a:tcPr>
+                </a:tc>
+              </a:tr>
+            </a:tbl>
+          </a:graphicData>
+        </a:graphic>
+      </p:graphicFrame>
+      <p:sp>
+        <p:nvSpPr>
+          <p:cNvPr id="9" name="TextBox 8"/>
+          <p:cNvSpPr txBox="1"/>
+          <p:nvPr/>
+        </p:nvSpPr>
+        <p:spPr>
+          <a:xfrm>
+            <a:off x="640080" y="3534155"/>
+            <a:ext cx="10908792" cy="164592"/>
+          </a:xfrm>
+          <a:prstGeom prst="rect">
+            <a:avLst/>
+          </a:prstGeom>
+          <a:noFill/>
+        </p:spPr>
+        <p:txBody>
+          <a:bodyPr wrap="none" lIns="9144" rIns="9144" tIns="9144" bIns="9144" anchor="t">
+            <a:spAutoFit/>
+          </a:bodyPr>
+          <a:lstStyle/>
+          <a:p>
+            <a:pPr algn="l">
+              <a:spcAft>
+                <a:spcPts val="0"/>
+              </a:spcAft>
+              <a:defRPr sz="680" b="0">
+                <a:solidFill>
+                  <a:srgbClr val="8A94A1"/>
+                </a:solidFill>
+                <a:latin typeface="Inter"/>
+              </a:defRPr>
+            </a:pPr>
+            <a:r>
+              <a:rPr>
+                <a:latin typeface="Inter"/>
+              </a:rPr>
+              <a:t>Illustrative, Gradient Maintained — demo data, not the client's holdings or managers. All organizations, portfolios, managers and results in this public example are illustrative.</a:t>
+            </a:r>
+          </a:p>
+        </p:txBody>
+      </p:sp>
+      <p:sp>
+        <p:nvSpPr>
+          <p:cNvPr id="10" name="TextBox 9"/>
+          <p:cNvSpPr txBox="1"/>
+          <p:nvPr/>
+        </p:nvSpPr>
+        <p:spPr>
+          <a:xfrm>
+            <a:off x="640080" y="3826763"/>
+            <a:ext cx="10908792" cy="201168"/>
+          </a:xfrm>
+          <a:prstGeom prst="rect">
+            <a:avLst/>
+          </a:prstGeom>
+          <a:noFill/>
+        </p:spPr>
+        <p:txBody>
+          <a:bodyPr wrap="none" lIns="9144" rIns="9144" tIns="9144" bIns="9144" anchor="t">
+            <a:spAutoFit/>
+          </a:bodyPr>
+          <a:lstStyle/>
+          <a:p>
+            <a:pPr algn="l">
+              <a:spcAft>
+                <a:spcPts val="0"/>
+              </a:spcAft>
+              <a:defRPr sz="720" b="1">
+                <a:solidFill>
+                  <a:srgbClr val="4A5563"/>
+                </a:solidFill>
+                <a:latin typeface="Inter"/>
+              </a:defRPr>
+            </a:pPr>
+            <a:r>
+              <a:rPr>
+                <a:latin typeface="Inter"/>
+              </a:rPr>
+              <a:t>SOURCE AUDIT TRAIL</a:t>
+            </a:r>
+          </a:p>
+        </p:txBody>
+      </p:sp>
+      <p:graphicFrame>
+        <p:nvGraphicFramePr>
+          <p:cNvPr id="11" name="Table 10"/>
+          <p:cNvGraphicFramePr>
+            <a:graphicFrameLocks noGrp="1"/>
+          </p:cNvGraphicFramePr>
+          <p:nvPr/>
+        </p:nvGraphicFramePr>
+        <p:xfrm>
+          <a:off x="640080" y="4101083"/>
+          <a:ext cx="10908792" cy="1915667"/>
+        </p:xfrm>
+        <a:graphic>
+          <a:graphicData uri="http://schemas.openxmlformats.org/drawingml/2006/table">
+            <a:tbl>
+              <a:tblPr firstRow="1" bandRow="1">
+                <a:tableStyleId>{5C22544A-7EE6-4342-B048-85BDC9FD1C3A}</a:tableStyleId>
+              </a:tblPr>
+              <a:tblGrid>
+                <a:gridCol w="2011680"/>
+                <a:gridCol w="2965704"/>
+                <a:gridCol w="2965704"/>
+                <a:gridCol w="2965704"/>
+              </a:tblGrid>
+              <a:tr h="957833">
+                <a:tc>
+                  <a:txBody>
+                    <a:bodyPr/>
+                    <a:lstStyle/>
+                    <a:p>
+                      <a:pPr>
+                        <a:defRPr sz="750" b="1">
+                          <a:solidFill>
+                            <a:srgbClr val="FFFFFF"/>
+                          </a:solidFill>
+                          <a:latin typeface="Inter"/>
+                        </a:defRPr>
+                      </a:pPr>
+                      <a:r>
+                        <a:rPr>
+                          <a:latin typeface="Inter"/>
+                        </a:rPr>
+                        <a:t>Tag</a:t>
                       </a:r>
                     </a:p>
                   </a:txBody>
@@ -9223,61 +8929,7 @@
                         <a:rPr>
                           <a:latin typeface="Inter"/>
                         </a:rPr>
-                        <a:t>As of</a:t>
-                      </a:r>
-                    </a:p>
-                  </a:txBody>
-                  <a:tcPr marL="54864" marR="54864" marT="27432" marB="27432" anchor="ctr">
-                    <a:solidFill>
-                      <a:srgbClr val="0D1117"/>
-                    </a:solidFill>
-                  </a:tcPr>
-                </a:tc>
-                <a:tc>
-                  <a:txBody>
-                    <a:bodyPr/>
-                    <a:lstStyle/>
-                    <a:p>
-                      <a:pPr>
-                        <a:defRPr sz="750" b="1">
-                          <a:solidFill>
-                            <a:srgbClr val="FFFFFF"/>
-                          </a:solidFill>
-                          <a:latin typeface="Inter"/>
-                        </a:defRPr>
-                      </a:pPr>
-                      <a:r>
-                        <a:rPr>
-                          <a:latin typeface="Inter"/>
-                        </a:rPr>
                         <a:t>Data scope</a:t>
-                      </a:r>
-                    </a:p>
-                  </a:txBody>
-                  <a:tcPr marL="54864" marR="54864" marT="27432" marB="27432" anchor="ctr">
-                    <a:solidFill>
-                      <a:srgbClr val="0D1117"/>
-                    </a:solidFill>
-                  </a:tcPr>
-                </a:tc>
-                <a:tc>
-                  <a:txBody>
-                    <a:bodyPr/>
-                    <a:lstStyle/>
-                    <a:p>
-                      <a:pPr>
-                        <a:defRPr sz="750" b="1">
-                          <a:solidFill>
-                            <a:srgbClr val="FFFFFF"/>
-                          </a:solidFill>
-                          <a:latin typeface="Inter"/>
-                        </a:defRPr>
-                      </a:pPr>
-                      <a:r>
-                        <a:rPr>
-                          <a:latin typeface="Inter"/>
-                        </a:rPr>
-                        <a:t>Validation</a:t>
                       </a:r>
                     </a:p>
                   </a:txBody>
@@ -9315,14 +8967,14 @@
                   </a:tcPr>
                 </a:tc>
               </a:tr>
-              <a:tr h="606761">
+              <a:tr h="957834">
                 <a:tc>
                   <a:txBody>
                     <a:bodyPr/>
                     <a:lstStyle/>
                     <a:p>
                       <a:pPr>
-                        <a:defRPr sz="650" b="1">
+                        <a:defRPr sz="800" b="1">
                           <a:solidFill>
                             <a:srgbClr val="0D1117"/>
                           </a:solidFill>
@@ -9349,88 +9001,7 @@
                     <a:lstStyle/>
                     <a:p>
                       <a:pPr>
-                        <a:defRPr sz="650" b="0">
-                          <a:solidFill>
-                            <a:srgbClr val="0D1117"/>
-                          </a:solidFill>
-                          <a:latin typeface="Inter"/>
-                        </a:defRPr>
-                      </a:pPr>
-                      <a:r>
-                        <a:rPr>
-                          <a:latin typeface="Inter"/>
-                        </a:rPr>
-                        <a:t>Typed unavailable test response</a:t>
-                      </a:r>
-                    </a:p>
-                  </a:txBody>
-                  <a:tcPr marL="54864" marR="54864" marT="27432" marB="27432" anchor="ctr">
-                    <a:solidFill>
-                      <a:srgbClr val="FFFFFF"/>
-                    </a:solidFill>
-                  </a:tcPr>
-                </a:tc>
-                <a:tc>
-                  <a:txBody>
-                    <a:bodyPr/>
-                    <a:lstStyle/>
-                    <a:p>
-                      <a:pPr>
-                        <a:defRPr sz="650" b="0">
-                          <a:solidFill>
-                            <a:srgbClr val="0D1117"/>
-                          </a:solidFill>
-                          <a:latin typeface="Inter"/>
-                        </a:defRPr>
-                      </a:pPr>
-                      <a:r>
-                        <a:rPr>
-                          <a:latin typeface="Inter"/>
-                        </a:rPr>
-                        <a:t>gradient_tool</a:t>
-                      </a:r>
-                    </a:p>
-                  </a:txBody>
-                  <a:tcPr marL="54864" marR="54864" marT="27432" marB="27432" anchor="ctr">
-                    <a:solidFill>
-                      <a:srgbClr val="FFFFFF"/>
-                    </a:solidFill>
-                  </a:tcPr>
-                </a:tc>
-                <a:tc>
-                  <a:txBody>
-                    <a:bodyPr/>
-                    <a:lstStyle/>
-                    <a:p>
-                      <a:pPr>
-                        <a:defRPr sz="650" b="0">
-                          <a:solidFill>
-                            <a:srgbClr val="0D1117"/>
-                          </a:solidFill>
-                          <a:latin typeface="Inter"/>
-                        </a:defRPr>
-                      </a:pPr>
-                      <a:r>
-                        <a:rPr>
-                          <a:latin typeface="Inter"/>
-                        </a:rPr>
-                        <a:t>get_gradient_capabilities</a:t>
-                      </a:r>
-                    </a:p>
-                  </a:txBody>
-                  <a:tcPr marL="54864" marR="54864" marT="27432" marB="27432" anchor="ctr">
-                    <a:solidFill>
-                      <a:srgbClr val="FFFFFF"/>
-                    </a:solidFill>
-                  </a:tcPr>
-                </a:tc>
-                <a:tc>
-                  <a:txBody>
-                    <a:bodyPr/>
-                    <a:lstStyle/>
-                    <a:p>
-                      <a:pPr>
-                        <a:defRPr sz="650" b="0">
+                        <a:defRPr sz="800" b="0">
                           <a:solidFill>
                             <a:srgbClr val="0D1117"/>
                           </a:solidFill>
@@ -9457,7 +9028,7 @@
                     <a:lstStyle/>
                     <a:p>
                       <a:pPr>
-                        <a:defRPr sz="650" b="0">
+                        <a:defRPr sz="800" b="0">
                           <a:solidFill>
                             <a:srgbClr val="0D1117"/>
                           </a:solidFill>
@@ -9468,7 +9039,7 @@
                         <a:rPr>
                           <a:latin typeface="Inter"/>
                         </a:rPr>
-                        <a:t>2025-12-31</a:t>
+                        <a:t>Illustrative sample data</a:t>
                       </a:r>
                     </a:p>
                   </a:txBody>
@@ -9484,61 +9055,7 @@
                     <a:lstStyle/>
                     <a:p>
                       <a:pPr>
-                        <a:defRPr sz="650" b="0">
-                          <a:solidFill>
-                            <a:srgbClr val="0D1117"/>
-                          </a:solidFill>
-                          <a:latin typeface="Inter"/>
-                        </a:defRPr>
-                      </a:pPr>
-                      <a:r>
-                        <a:rPr>
-                          <a:latin typeface="Inter"/>
-                        </a:rPr>
-                        <a:t>Gradient-governed review evidence</a:t>
-                      </a:r>
-                    </a:p>
-                  </a:txBody>
-                  <a:tcPr marL="54864" marR="54864" marT="27432" marB="27432" anchor="ctr">
-                    <a:solidFill>
-                      <a:srgbClr val="FFFFFF"/>
-                    </a:solidFill>
-                  </a:tcPr>
-                </a:tc>
-                <a:tc>
-                  <a:txBody>
-                    <a:bodyPr/>
-                    <a:lstStyle/>
-                    <a:p>
-                      <a:pPr>
-                        <a:defRPr sz="650" b="0">
-                          <a:solidFill>
-                            <a:srgbClr val="0D1117"/>
-                          </a:solidFill>
-                          <a:latin typeface="Inter"/>
-                        </a:defRPr>
-                      </a:pPr>
-                      <a:r>
-                        <a:rPr>
-                          <a:latin typeface="Inter"/>
-                        </a:rPr>
-                        <a:t>passed</a:t>
-                      </a:r>
-                    </a:p>
-                  </a:txBody>
-                  <a:tcPr marL="54864" marR="54864" marT="27432" marB="27432" anchor="ctr">
-                    <a:solidFill>
-                      <a:srgbClr val="FFFFFF"/>
-                    </a:solidFill>
-                  </a:tcPr>
-                </a:tc>
-                <a:tc>
-                  <a:txBody>
-                    <a:bodyPr/>
-                    <a:lstStyle/>
-                    <a:p>
-                      <a:pPr>
-                        <a:defRPr sz="650" b="0">
+                        <a:defRPr sz="800" b="0">
                           <a:solidFill>
                             <a:srgbClr val="0D1117"/>
                           </a:solidFill>
@@ -9566,13 +9083,13 @@
       </p:graphicFrame>
       <p:sp>
         <p:nvSpPr>
-          <p:cNvPr id="10" name="TextBox 9"/>
+          <p:cNvPr id="12" name="TextBox 11"/>
           <p:cNvSpPr txBox="1"/>
           <p:nvPr/>
         </p:nvSpPr>
         <p:spPr>
           <a:xfrm>
-            <a:off x="640080" y="2557690"/>
+            <a:off x="640080" y="6035039"/>
             <a:ext cx="10908792" cy="164592"/>
           </a:xfrm>
           <a:prstGeom prst="rect">
@@ -9601,378 +9118,14 @@
               <a:rPr>
                 <a:latin typeface="Inter"/>
               </a:rPr>
-              <a:t>Illustrative, Gradient Maintained — demo data, not the client's holdings or managers. All organizations, portfolios, managers and results in this public example are illustrative.</a:t>
-            </a:r>
-          </a:p>
-        </p:txBody>
-      </p:sp>
-      <p:sp>
-        <p:nvSpPr>
-          <p:cNvPr id="11" name="Rectangle 10"/>
-          <p:cNvSpPr/>
-          <p:nvPr/>
-        </p:nvSpPr>
-        <p:spPr>
-          <a:xfrm>
-            <a:off x="640080" y="2850298"/>
-            <a:ext cx="10908792" cy="1471648"/>
-          </a:xfrm>
-          <a:prstGeom prst="rect">
-            <a:avLst/>
-          </a:prstGeom>
-          <a:solidFill>
-            <a:srgbClr val="F5F7F9"/>
-          </a:solidFill>
-          <a:ln>
-            <a:solidFill>
-              <a:srgbClr val="E3E7EC"/>
-            </a:solidFill>
-          </a:ln>
-        </p:spPr>
-        <p:style>
-          <a:lnRef idx="1">
-            <a:schemeClr val="accent1"/>
-          </a:lnRef>
-          <a:fillRef idx="3">
-            <a:schemeClr val="accent1"/>
-          </a:fillRef>
-          <a:effectRef idx="2">
-            <a:schemeClr val="accent1"/>
-          </a:effectRef>
-          <a:fontRef idx="minor">
-            <a:schemeClr val="lt1"/>
-          </a:fontRef>
-        </p:style>
-        <p:txBody>
-          <a:bodyPr rtlCol="0" anchor="ctr"/>
-          <a:lstStyle/>
-          <a:p>
-            <a:pPr algn="ctr">
-              <a:defRPr>
-                <a:latin typeface="Inter"/>
-              </a:defRPr>
-            </a:pPr>
-          </a:p>
-        </p:txBody>
-      </p:sp>
-      <p:sp>
-        <p:nvSpPr>
-          <p:cNvPr id="12" name="Rectangle 11"/>
-          <p:cNvSpPr/>
-          <p:nvPr/>
-        </p:nvSpPr>
-        <p:spPr>
-          <a:xfrm>
-            <a:off x="640080" y="2850298"/>
-            <a:ext cx="54864" cy="1471648"/>
-          </a:xfrm>
-          <a:prstGeom prst="rect">
-            <a:avLst/>
-          </a:prstGeom>
-          <a:solidFill>
-            <a:srgbClr val="0D1117"/>
-          </a:solidFill>
-          <a:ln>
-            <a:solidFill>
-              <a:srgbClr val="0D1117"/>
-            </a:solidFill>
-          </a:ln>
-        </p:spPr>
-        <p:style>
-          <a:lnRef idx="1">
-            <a:schemeClr val="accent1"/>
-          </a:lnRef>
-          <a:fillRef idx="3">
-            <a:schemeClr val="accent1"/>
-          </a:fillRef>
-          <a:effectRef idx="2">
-            <a:schemeClr val="accent1"/>
-          </a:effectRef>
-          <a:fontRef idx="minor">
-            <a:schemeClr val="lt1"/>
-          </a:fontRef>
-        </p:style>
-        <p:txBody>
-          <a:bodyPr rtlCol="0" anchor="ctr"/>
-          <a:lstStyle/>
-          <a:p>
-            <a:pPr algn="ctr">
-              <a:defRPr>
-                <a:latin typeface="Inter"/>
-              </a:defRPr>
-            </a:pPr>
-          </a:p>
-        </p:txBody>
-      </p:sp>
-      <p:sp>
-        <p:nvSpPr>
-          <p:cNvPr id="13" name="TextBox 12"/>
-          <p:cNvSpPr txBox="1"/>
-          <p:nvPr/>
-        </p:nvSpPr>
-        <p:spPr>
-          <a:xfrm>
-            <a:off x="804671" y="2960026"/>
-            <a:ext cx="10616184" cy="228600"/>
-          </a:xfrm>
-          <a:prstGeom prst="rect">
-            <a:avLst/>
-          </a:prstGeom>
-          <a:noFill/>
-        </p:spPr>
-        <p:txBody>
-          <a:bodyPr wrap="none" lIns="9144" rIns="9144" tIns="9144" bIns="9144" anchor="t">
-            <a:spAutoFit/>
-          </a:bodyPr>
-          <a:lstStyle/>
-          <a:p>
-            <a:pPr algn="l">
-              <a:spcAft>
-                <a:spcPts val="0"/>
-              </a:spcAft>
-              <a:defRPr sz="1000" b="1">
-                <a:solidFill>
-                  <a:srgbClr val="0D1117"/>
-                </a:solidFill>
-                <a:latin typeface="Inter"/>
-              </a:defRPr>
-            </a:pPr>
-            <a:r>
-              <a:rPr>
-                <a:latin typeface="Inter"/>
-              </a:rPr>
-              <a:t>Governed evidence boundary</a:t>
-            </a:r>
-          </a:p>
-        </p:txBody>
-      </p:sp>
-      <p:sp>
-        <p:nvSpPr>
-          <p:cNvPr id="14" name="TextBox 13"/>
-          <p:cNvSpPr txBox="1"/>
-          <p:nvPr/>
-        </p:nvSpPr>
-        <p:spPr>
-          <a:xfrm>
-            <a:off x="804671" y="3243490"/>
-            <a:ext cx="10616184" cy="987016"/>
-          </a:xfrm>
-          <a:prstGeom prst="rect">
-            <a:avLst/>
-          </a:prstGeom>
-          <a:noFill/>
-        </p:spPr>
-        <p:txBody>
-          <a:bodyPr wrap="none" lIns="9144" rIns="9144" tIns="9144" bIns="9144" anchor="t">
-            <a:spAutoFit/>
-          </a:bodyPr>
-          <a:lstStyle/>
-          <a:p>
-            <a:pPr algn="l">
-              <a:spcAft>
-                <a:spcPts val="0"/>
-              </a:spcAft>
-              <a:defRPr sz="950" b="0">
-                <a:solidFill>
-                  <a:srgbClr val="4A5563"/>
-                </a:solidFill>
-                <a:latin typeface="Inter"/>
-              </a:defRPr>
-            </a:pPr>
-            <a:r>
-              <a:rPr>
-                <a:latin typeface="Inter"/>
-              </a:rPr>
-              <a:t>The report preserves the returned subject identity, benchmark mapping, observation window, units, methods, coverage status and request provenance [S1]. Missing performance, correlation, capture, simulation or regime fields remain unavailable. No local statistics, substitutions, rankings or neutral defaults are introduced.</a:t>
-            </a:r>
-          </a:p>
-        </p:txBody>
-      </p:sp>
-      <p:sp>
-        <p:nvSpPr>
-          <p:cNvPr id="15" name="Rectangle 14"/>
-          <p:cNvSpPr/>
-          <p:nvPr/>
-        </p:nvSpPr>
-        <p:spPr>
-          <a:xfrm>
-            <a:off x="640080" y="4431674"/>
-            <a:ext cx="10908792" cy="1786245"/>
-          </a:xfrm>
-          <a:prstGeom prst="rect">
-            <a:avLst/>
-          </a:prstGeom>
-          <a:solidFill>
-            <a:srgbClr val="F5F7F9"/>
-          </a:solidFill>
-          <a:ln>
-            <a:solidFill>
-              <a:srgbClr val="E3E7EC"/>
-            </a:solidFill>
-          </a:ln>
-        </p:spPr>
-        <p:style>
-          <a:lnRef idx="1">
-            <a:schemeClr val="accent1"/>
-          </a:lnRef>
-          <a:fillRef idx="3">
-            <a:schemeClr val="accent1"/>
-          </a:fillRef>
-          <a:effectRef idx="2">
-            <a:schemeClr val="accent1"/>
-          </a:effectRef>
-          <a:fontRef idx="minor">
-            <a:schemeClr val="lt1"/>
-          </a:fontRef>
-        </p:style>
-        <p:txBody>
-          <a:bodyPr rtlCol="0" anchor="ctr"/>
-          <a:lstStyle/>
-          <a:p>
-            <a:pPr algn="ctr">
-              <a:defRPr>
-                <a:latin typeface="Inter"/>
-              </a:defRPr>
-            </a:pPr>
-          </a:p>
-        </p:txBody>
-      </p:sp>
-      <p:sp>
-        <p:nvSpPr>
-          <p:cNvPr id="16" name="Rectangle 15"/>
-          <p:cNvSpPr/>
-          <p:nvPr/>
-        </p:nvSpPr>
-        <p:spPr>
-          <a:xfrm>
-            <a:off x="640080" y="4431674"/>
-            <a:ext cx="54864" cy="1786245"/>
-          </a:xfrm>
-          <a:prstGeom prst="rect">
-            <a:avLst/>
-          </a:prstGeom>
-          <a:solidFill>
-            <a:srgbClr val="0D1117"/>
-          </a:solidFill>
-          <a:ln>
-            <a:solidFill>
-              <a:srgbClr val="0D1117"/>
-            </a:solidFill>
-          </a:ln>
-        </p:spPr>
-        <p:style>
-          <a:lnRef idx="1">
-            <a:schemeClr val="accent1"/>
-          </a:lnRef>
-          <a:fillRef idx="3">
-            <a:schemeClr val="accent1"/>
-          </a:fillRef>
-          <a:effectRef idx="2">
-            <a:schemeClr val="accent1"/>
-          </a:effectRef>
-          <a:fontRef idx="minor">
-            <a:schemeClr val="lt1"/>
-          </a:fontRef>
-        </p:style>
-        <p:txBody>
-          <a:bodyPr rtlCol="0" anchor="ctr"/>
-          <a:lstStyle/>
-          <a:p>
-            <a:pPr algn="ctr">
-              <a:defRPr>
-                <a:latin typeface="Inter"/>
-              </a:defRPr>
-            </a:pPr>
-          </a:p>
-        </p:txBody>
-      </p:sp>
-      <p:sp>
-        <p:nvSpPr>
-          <p:cNvPr id="17" name="TextBox 16"/>
-          <p:cNvSpPr txBox="1"/>
-          <p:nvPr/>
-        </p:nvSpPr>
-        <p:spPr>
-          <a:xfrm>
-            <a:off x="804671" y="4541402"/>
-            <a:ext cx="10616184" cy="228600"/>
-          </a:xfrm>
-          <a:prstGeom prst="rect">
-            <a:avLst/>
-          </a:prstGeom>
-          <a:noFill/>
-        </p:spPr>
-        <p:txBody>
-          <a:bodyPr wrap="none" lIns="9144" rIns="9144" tIns="9144" bIns="9144" anchor="t">
-            <a:spAutoFit/>
-          </a:bodyPr>
-          <a:lstStyle/>
-          <a:p>
-            <a:pPr algn="l">
-              <a:spcAft>
-                <a:spcPts val="0"/>
-              </a:spcAft>
-              <a:defRPr sz="1000" b="1">
-                <a:solidFill>
-                  <a:srgbClr val="0D1117"/>
-                </a:solidFill>
-                <a:latin typeface="Inter"/>
-              </a:defRPr>
-            </a:pPr>
-            <a:r>
-              <a:rPr>
-                <a:latin typeface="Inter"/>
-              </a:rPr>
-              <a:t>Decision-use boundary</a:t>
-            </a:r>
-          </a:p>
-        </p:txBody>
-      </p:sp>
-      <p:sp>
-        <p:nvSpPr>
-          <p:cNvPr id="18" name="TextBox 17"/>
-          <p:cNvSpPr txBox="1"/>
-          <p:nvPr/>
-        </p:nvSpPr>
-        <p:spPr>
-          <a:xfrm>
-            <a:off x="804671" y="4824866"/>
-            <a:ext cx="10616184" cy="1301613"/>
-          </a:xfrm>
-          <a:prstGeom prst="rect">
-            <a:avLst/>
-          </a:prstGeom>
-          <a:noFill/>
-        </p:spPr>
-        <p:txBody>
-          <a:bodyPr wrap="none" lIns="9144" rIns="9144" tIns="9144" bIns="9144" anchor="t">
-            <a:spAutoFit/>
-          </a:bodyPr>
-          <a:lstStyle/>
-          <a:p>
-            <a:pPr algn="l">
-              <a:spcAft>
-                <a:spcPts val="0"/>
-              </a:spcAft>
-              <a:defRPr sz="950" b="0">
-                <a:solidFill>
-                  <a:srgbClr val="4A5563"/>
-                </a:solidFill>
-                <a:latin typeface="Inter"/>
-              </a:defRPr>
-            </a:pPr>
-            <a:r>
-              <a:rPr>
-                <a:latin typeface="Inter"/>
-              </a:rPr>
-              <a:t>Typed unavailability limits the conclusion and drives the insufficient signal where most required slots are absent [S1]. The evidence supports follow-up collection only; operational diligence and committee decisions remain separate handoffs with their own governed evidence and validation contracts. Every unresolved field remains reader-visible in the delivered report.</a:t>
-            </a:r>
-          </a:p>
-        </p:txBody>
-      </p:sp>
-      <p:sp>
-        <p:nvSpPr>
-          <p:cNvPr id="19" name="Rectangle 18"/>
+              <a:t>Each digest is the SHA-256 fingerprint of the exact data the report used.</a:t>
+            </a:r>
+          </a:p>
+        </p:txBody>
+      </p:sp>
+      <p:sp>
+        <p:nvSpPr>
+          <p:cNvPr id="13" name="Rectangle 12"/>
           <p:cNvSpPr/>
           <p:nvPr/>
         </p:nvSpPr>
@@ -10021,7 +9174,7 @@
       </p:sp>
       <p:sp>
         <p:nvSpPr>
-          <p:cNvPr id="20" name="TextBox 19"/>
+          <p:cNvPr id="14" name="TextBox 13"/>
           <p:cNvSpPr txBox="1"/>
           <p:nvPr/>
         </p:nvSpPr>
@@ -10063,7 +9216,7 @@
       </p:sp>
       <p:sp>
         <p:nvSpPr>
-          <p:cNvPr id="21" name="TextBox 20"/>
+          <p:cNvPr id="15" name="TextBox 14"/>
           <p:cNvSpPr txBox="1"/>
           <p:nvPr/>
         </p:nvSpPr>
@@ -10105,7 +9258,7 @@
       </p:sp>
       <p:sp>
         <p:nvSpPr>
-          <p:cNvPr id="22" name="TextBox 21"/>
+          <p:cNvPr id="16" name="TextBox 15"/>
           <p:cNvSpPr txBox="1"/>
           <p:nvPr/>
         </p:nvSpPr>
